--- a/SAP Build Process Automation Day 2.pptx
+++ b/SAP Build Process Automation Day 2.pptx
@@ -5,10 +5,10 @@
     <p:sldMasterId id="2147483648" r:id="rId4"/>
   </p:sldMasterIdLst>
   <p:notesMasterIdLst>
-    <p:notesMasterId r:id="rId16"/>
+    <p:notesMasterId r:id="rId14"/>
   </p:notesMasterIdLst>
   <p:handoutMasterIdLst>
-    <p:handoutMasterId r:id="rId17"/>
+    <p:handoutMasterId r:id="rId15"/>
   </p:handoutMasterIdLst>
   <p:sldIdLst>
     <p:sldId id="889" r:id="rId5"/>
@@ -20,13 +20,11 @@
     <p:sldId id="564" r:id="rId11"/>
     <p:sldId id="898" r:id="rId12"/>
     <p:sldId id="686" r:id="rId13"/>
-    <p:sldId id="901" r:id="rId14"/>
-    <p:sldId id="903" r:id="rId15"/>
   </p:sldIdLst>
   <p:sldSz cx="12192000" cy="6858000"/>
   <p:notesSz cx="7315200" cy="9601200"/>
   <p:custDataLst>
-    <p:tags r:id="rId18"/>
+    <p:tags r:id="rId16"/>
   </p:custDataLst>
   <p:defaultTextStyle>
     <a:defPPr>
@@ -193,8 +191,451 @@
 </p:cmAuthorLst>
 </file>
 
+<file path=ppt/revisionInfo.xml><?xml version="1.0" encoding="utf-8"?>
+<p1510:revInfo xmlns:a="http://schemas.openxmlformats.org/drawingml/2006/main" xmlns:r="http://schemas.openxmlformats.org/officeDocument/2006/relationships" xmlns:p1510="http://schemas.microsoft.com/office/powerpoint/2015/10/main">
+  <p1510:revLst>
+    <p1510:client id="{132B69AE-34CF-02A8-29DB-DC120E078532}" v="27" dt="2023-06-13T09:45:39.672"/>
+    <p1510:client id="{1DBC473F-0E99-029A-0BB9-8988050CC67C}" v="26" dt="2023-06-21T08:41:23.821"/>
+    <p1510:client id="{296E2F37-18D7-4F50-8380-FF9BFE889343}" v="1" dt="2023-06-13T13:06:26.324"/>
+    <p1510:client id="{2E1A052E-845F-8751-AA9C-B583C495DDDA}" v="4" dt="2023-06-13T10:04:28.371"/>
+    <p1510:client id="{3B7FE807-EDB9-19C1-13FE-59DDE07EDDCD}" v="7" dt="2023-08-01T15:51:03.346"/>
+    <p1510:client id="{A6AAD112-0D58-3934-9049-FB580C396535}" v="136" dt="2023-06-19T18:44:25.591"/>
+    <p1510:client id="{CB3B24C3-0CE0-9501-04BE-80FAD9FFB32F}" v="6" dt="2023-06-20T09:19:21.038"/>
+    <p1510:client id="{CD3E3580-98B4-D402-BE03-B05F3D57162B}" v="4" dt="2023-07-04T13:06:32.038"/>
+    <p1510:client id="{CE288D4E-A439-6E19-1EA5-654391DE5B94}" v="66" dt="2023-06-12T19:19:54.641"/>
+    <p1510:client id="{DFD3FCCE-F022-53D3-2774-0512410A9D00}" v="1" dt="2023-06-21T14:57:50.053"/>
+  </p1510:revLst>
+</p1510:revInfo>
+</file>
+
 <file path=ppt/changesInfos/changesInfo1.xml><?xml version="1.0" encoding="utf-8"?>
 <pc:chgInfo xmlns:a="http://schemas.openxmlformats.org/drawingml/2006/main" xmlns:r="http://schemas.openxmlformats.org/officeDocument/2006/relationships" xmlns:ac="http://schemas.microsoft.com/office/drawing/2013/main/command" xmlns:pc="http://schemas.microsoft.com/office/powerpoint/2013/main/command">
+  <pc:docChgLst>
+    <pc:chgData name="Verma, Sandeep" userId="S::sandverma@deloitte.com::d30842dc-0cf9-420b-8643-a509591151fe" providerId="AD" clId="Web-{CB3B24C3-0CE0-9501-04BE-80FAD9FFB32F}"/>
+    <pc:docChg chg="modSld">
+      <pc:chgData name="Verma, Sandeep" userId="S::sandverma@deloitte.com::d30842dc-0cf9-420b-8643-a509591151fe" providerId="AD" clId="Web-{CB3B24C3-0CE0-9501-04BE-80FAD9FFB32F}" dt="2023-06-20T09:19:21.038" v="5" actId="1076"/>
+      <pc:docMkLst>
+        <pc:docMk/>
+      </pc:docMkLst>
+      <pc:sldChg chg="modSp">
+        <pc:chgData name="Verma, Sandeep" userId="S::sandverma@deloitte.com::d30842dc-0cf9-420b-8643-a509591151fe" providerId="AD" clId="Web-{CB3B24C3-0CE0-9501-04BE-80FAD9FFB32F}" dt="2023-06-20T09:19:21.038" v="5" actId="1076"/>
+        <pc:sldMkLst>
+          <pc:docMk/>
+          <pc:sldMk cId="1265867692" sldId="282"/>
+        </pc:sldMkLst>
+        <pc:spChg chg="mod">
+          <ac:chgData name="Verma, Sandeep" userId="S::sandverma@deloitte.com::d30842dc-0cf9-420b-8643-a509591151fe" providerId="AD" clId="Web-{CB3B24C3-0CE0-9501-04BE-80FAD9FFB32F}" dt="2023-06-20T09:19:11.225" v="3" actId="1076"/>
+          <ac:spMkLst>
+            <pc:docMk/>
+            <pc:sldMk cId="1265867692" sldId="282"/>
+            <ac:spMk id="54" creationId="{50848D64-FB64-429D-B5E6-9D84359772B7}"/>
+          </ac:spMkLst>
+        </pc:spChg>
+        <pc:spChg chg="mod">
+          <ac:chgData name="Verma, Sandeep" userId="S::sandverma@deloitte.com::d30842dc-0cf9-420b-8643-a509591151fe" providerId="AD" clId="Web-{CB3B24C3-0CE0-9501-04BE-80FAD9FFB32F}" dt="2023-06-20T09:19:17.241" v="4" actId="1076"/>
+          <ac:spMkLst>
+            <pc:docMk/>
+            <pc:sldMk cId="1265867692" sldId="282"/>
+            <ac:spMk id="60" creationId="{705B094B-759B-4752-A5E5-3BC6FB706E4F}"/>
+          </ac:spMkLst>
+        </pc:spChg>
+        <pc:spChg chg="mod">
+          <ac:chgData name="Verma, Sandeep" userId="S::sandverma@deloitte.com::d30842dc-0cf9-420b-8643-a509591151fe" providerId="AD" clId="Web-{CB3B24C3-0CE0-9501-04BE-80FAD9FFB32F}" dt="2023-06-20T09:19:02.037" v="1" actId="1076"/>
+          <ac:spMkLst>
+            <pc:docMk/>
+            <pc:sldMk cId="1265867692" sldId="282"/>
+            <ac:spMk id="67" creationId="{00000000-0000-0000-0000-000000000000}"/>
+          </ac:spMkLst>
+        </pc:spChg>
+        <pc:spChg chg="mod">
+          <ac:chgData name="Verma, Sandeep" userId="S::sandverma@deloitte.com::d30842dc-0cf9-420b-8643-a509591151fe" providerId="AD" clId="Web-{CB3B24C3-0CE0-9501-04BE-80FAD9FFB32F}" dt="2023-06-20T09:18:51.396" v="0" actId="1076"/>
+          <ac:spMkLst>
+            <pc:docMk/>
+            <pc:sldMk cId="1265867692" sldId="282"/>
+            <ac:spMk id="76" creationId="{55267C9B-D960-4607-A136-ECC9350F05C2}"/>
+          </ac:spMkLst>
+        </pc:spChg>
+        <pc:spChg chg="mod">
+          <ac:chgData name="Verma, Sandeep" userId="S::sandverma@deloitte.com::d30842dc-0cf9-420b-8643-a509591151fe" providerId="AD" clId="Web-{CB3B24C3-0CE0-9501-04BE-80FAD9FFB32F}" dt="2023-06-20T09:19:06.444" v="2" actId="1076"/>
+          <ac:spMkLst>
+            <pc:docMk/>
+            <pc:sldMk cId="1265867692" sldId="282"/>
+            <ac:spMk id="79" creationId="{00000000-0000-0000-0000-000000000000}"/>
+          </ac:spMkLst>
+        </pc:spChg>
+        <pc:spChg chg="mod">
+          <ac:chgData name="Verma, Sandeep" userId="S::sandverma@deloitte.com::d30842dc-0cf9-420b-8643-a509591151fe" providerId="AD" clId="Web-{CB3B24C3-0CE0-9501-04BE-80FAD9FFB32F}" dt="2023-06-20T09:19:21.038" v="5" actId="1076"/>
+          <ac:spMkLst>
+            <pc:docMk/>
+            <pc:sldMk cId="1265867692" sldId="282"/>
+            <ac:spMk id="80" creationId="{6ADDD7CA-9D33-4DD1-87C0-0D494C642B4E}"/>
+          </ac:spMkLst>
+        </pc:spChg>
+      </pc:sldChg>
+    </pc:docChg>
+  </pc:docChgLst>
+  <pc:docChgLst>
+    <pc:chgData name="Matam, Karthik Kumar" userId="8ba2ca17-c33e-470d-a951-4ec5d393c3c8" providerId="ADAL" clId="{4E30B0BE-69A9-4053-9F9A-D887C4963FD9}"/>
+    <pc:docChg chg="custSel delSld modSld">
+      <pc:chgData name="Matam, Karthik Kumar" userId="8ba2ca17-c33e-470d-a951-4ec5d393c3c8" providerId="ADAL" clId="{4E30B0BE-69A9-4053-9F9A-D887C4963FD9}" dt="2023-06-07T09:39:35.060" v="30" actId="14734"/>
+      <pc:docMkLst>
+        <pc:docMk/>
+      </pc:docMkLst>
+      <pc:sldChg chg="del">
+        <pc:chgData name="Matam, Karthik Kumar" userId="8ba2ca17-c33e-470d-a951-4ec5d393c3c8" providerId="ADAL" clId="{4E30B0BE-69A9-4053-9F9A-D887C4963FD9}" dt="2023-06-07T09:32:50.124" v="3" actId="47"/>
+        <pc:sldMkLst>
+          <pc:docMk/>
+          <pc:sldMk cId="4233707550" sldId="864"/>
+        </pc:sldMkLst>
+      </pc:sldChg>
+      <pc:sldChg chg="del">
+        <pc:chgData name="Matam, Karthik Kumar" userId="8ba2ca17-c33e-470d-a951-4ec5d393c3c8" providerId="ADAL" clId="{4E30B0BE-69A9-4053-9F9A-D887C4963FD9}" dt="2023-06-07T09:32:56.226" v="7" actId="47"/>
+        <pc:sldMkLst>
+          <pc:docMk/>
+          <pc:sldMk cId="3892241365" sldId="865"/>
+        </pc:sldMkLst>
+      </pc:sldChg>
+      <pc:sldChg chg="del">
+        <pc:chgData name="Matam, Karthik Kumar" userId="8ba2ca17-c33e-470d-a951-4ec5d393c3c8" providerId="ADAL" clId="{4E30B0BE-69A9-4053-9F9A-D887C4963FD9}" dt="2023-06-07T09:32:57.989" v="8" actId="47"/>
+        <pc:sldMkLst>
+          <pc:docMk/>
+          <pc:sldMk cId="277403518" sldId="866"/>
+        </pc:sldMkLst>
+      </pc:sldChg>
+      <pc:sldChg chg="del">
+        <pc:chgData name="Matam, Karthik Kumar" userId="8ba2ca17-c33e-470d-a951-4ec5d393c3c8" providerId="ADAL" clId="{4E30B0BE-69A9-4053-9F9A-D887C4963FD9}" dt="2023-06-07T09:32:51.601" v="5" actId="47"/>
+        <pc:sldMkLst>
+          <pc:docMk/>
+          <pc:sldMk cId="3708139478" sldId="867"/>
+        </pc:sldMkLst>
+      </pc:sldChg>
+      <pc:sldChg chg="del">
+        <pc:chgData name="Matam, Karthik Kumar" userId="8ba2ca17-c33e-470d-a951-4ec5d393c3c8" providerId="ADAL" clId="{4E30B0BE-69A9-4053-9F9A-D887C4963FD9}" dt="2023-06-07T09:32:49.579" v="2" actId="47"/>
+        <pc:sldMkLst>
+          <pc:docMk/>
+          <pc:sldMk cId="2044743389" sldId="868"/>
+        </pc:sldMkLst>
+      </pc:sldChg>
+      <pc:sldChg chg="del">
+        <pc:chgData name="Matam, Karthik Kumar" userId="8ba2ca17-c33e-470d-a951-4ec5d393c3c8" providerId="ADAL" clId="{4E30B0BE-69A9-4053-9F9A-D887C4963FD9}" dt="2023-06-07T09:33:02.411" v="10" actId="47"/>
+        <pc:sldMkLst>
+          <pc:docMk/>
+          <pc:sldMk cId="979310763" sldId="869"/>
+        </pc:sldMkLst>
+      </pc:sldChg>
+      <pc:sldChg chg="del">
+        <pc:chgData name="Matam, Karthik Kumar" userId="8ba2ca17-c33e-470d-a951-4ec5d393c3c8" providerId="ADAL" clId="{4E30B0BE-69A9-4053-9F9A-D887C4963FD9}" dt="2023-06-07T09:33:01.510" v="9" actId="47"/>
+        <pc:sldMkLst>
+          <pc:docMk/>
+          <pc:sldMk cId="101569031" sldId="871"/>
+        </pc:sldMkLst>
+      </pc:sldChg>
+      <pc:sldChg chg="modSp mod">
+        <pc:chgData name="Matam, Karthik Kumar" userId="8ba2ca17-c33e-470d-a951-4ec5d393c3c8" providerId="ADAL" clId="{4E30B0BE-69A9-4053-9F9A-D887C4963FD9}" dt="2023-06-07T09:34:36.271" v="21" actId="20577"/>
+        <pc:sldMkLst>
+          <pc:docMk/>
+          <pc:sldMk cId="1259888063" sldId="889"/>
+        </pc:sldMkLst>
+        <pc:spChg chg="mod">
+          <ac:chgData name="Matam, Karthik Kumar" userId="8ba2ca17-c33e-470d-a951-4ec5d393c3c8" providerId="ADAL" clId="{4E30B0BE-69A9-4053-9F9A-D887C4963FD9}" dt="2023-06-07T09:34:36.271" v="21" actId="20577"/>
+          <ac:spMkLst>
+            <pc:docMk/>
+            <pc:sldMk cId="1259888063" sldId="889"/>
+            <ac:spMk id="6" creationId="{9A40E202-D37F-4FA8-82FB-20DA95C2575A}"/>
+          </ac:spMkLst>
+        </pc:spChg>
+      </pc:sldChg>
+      <pc:sldChg chg="delSp modSp mod">
+        <pc:chgData name="Matam, Karthik Kumar" userId="8ba2ca17-c33e-470d-a951-4ec5d393c3c8" providerId="ADAL" clId="{4E30B0BE-69A9-4053-9F9A-D887C4963FD9}" dt="2023-06-07T09:39:35.060" v="30" actId="14734"/>
+        <pc:sldMkLst>
+          <pc:docMk/>
+          <pc:sldMk cId="1865761104" sldId="890"/>
+        </pc:sldMkLst>
+        <pc:spChg chg="mod">
+          <ac:chgData name="Matam, Karthik Kumar" userId="8ba2ca17-c33e-470d-a951-4ec5d393c3c8" providerId="ADAL" clId="{4E30B0BE-69A9-4053-9F9A-D887C4963FD9}" dt="2023-06-07T09:35:13.782" v="26" actId="14100"/>
+          <ac:spMkLst>
+            <pc:docMk/>
+            <pc:sldMk cId="1865761104" sldId="890"/>
+            <ac:spMk id="8" creationId="{00000000-0000-0000-0000-000000000000}"/>
+          </ac:spMkLst>
+        </pc:spChg>
+        <pc:graphicFrameChg chg="mod modGraphic">
+          <ac:chgData name="Matam, Karthik Kumar" userId="8ba2ca17-c33e-470d-a951-4ec5d393c3c8" providerId="ADAL" clId="{4E30B0BE-69A9-4053-9F9A-D887C4963FD9}" dt="2023-06-07T09:39:35.060" v="30" actId="14734"/>
+          <ac:graphicFrameMkLst>
+            <pc:docMk/>
+            <pc:sldMk cId="1865761104" sldId="890"/>
+            <ac:graphicFrameMk id="2" creationId="{9EEFFC91-3B06-4A4E-8FAA-B6D9FE3DDCAD}"/>
+          </ac:graphicFrameMkLst>
+        </pc:graphicFrameChg>
+        <pc:inkChg chg="del">
+          <ac:chgData name="Matam, Karthik Kumar" userId="8ba2ca17-c33e-470d-a951-4ec5d393c3c8" providerId="ADAL" clId="{4E30B0BE-69A9-4053-9F9A-D887C4963FD9}" dt="2023-06-07T09:35:03.196" v="23" actId="478"/>
+          <ac:inkMkLst>
+            <pc:docMk/>
+            <pc:sldMk cId="1865761104" sldId="890"/>
+            <ac:inkMk id="3" creationId="{BB29B3B0-FDE2-4614-9A8E-110448D5AC6C}"/>
+          </ac:inkMkLst>
+        </pc:inkChg>
+        <pc:inkChg chg="del">
+          <ac:chgData name="Matam, Karthik Kumar" userId="8ba2ca17-c33e-470d-a951-4ec5d393c3c8" providerId="ADAL" clId="{4E30B0BE-69A9-4053-9F9A-D887C4963FD9}" dt="2023-06-07T09:35:05.306" v="24" actId="478"/>
+          <ac:inkMkLst>
+            <pc:docMk/>
+            <pc:sldMk cId="1865761104" sldId="890"/>
+            <ac:inkMk id="6" creationId="{51DC5748-BF3C-40AD-A1CA-67C51F485FFC}"/>
+          </ac:inkMkLst>
+        </pc:inkChg>
+      </pc:sldChg>
+      <pc:sldChg chg="del">
+        <pc:chgData name="Matam, Karthik Kumar" userId="8ba2ca17-c33e-470d-a951-4ec5d393c3c8" providerId="ADAL" clId="{4E30B0BE-69A9-4053-9F9A-D887C4963FD9}" dt="2023-06-07T09:32:48.859" v="1" actId="47"/>
+        <pc:sldMkLst>
+          <pc:docMk/>
+          <pc:sldMk cId="3625284588" sldId="891"/>
+        </pc:sldMkLst>
+      </pc:sldChg>
+      <pc:sldChg chg="del">
+        <pc:chgData name="Matam, Karthik Kumar" userId="8ba2ca17-c33e-470d-a951-4ec5d393c3c8" providerId="ADAL" clId="{4E30B0BE-69A9-4053-9F9A-D887C4963FD9}" dt="2023-06-07T09:32:50.809" v="4" actId="47"/>
+        <pc:sldMkLst>
+          <pc:docMk/>
+          <pc:sldMk cId="669540159" sldId="892"/>
+        </pc:sldMkLst>
+      </pc:sldChg>
+      <pc:sldChg chg="del">
+        <pc:chgData name="Matam, Karthik Kumar" userId="8ba2ca17-c33e-470d-a951-4ec5d393c3c8" providerId="ADAL" clId="{4E30B0BE-69A9-4053-9F9A-D887C4963FD9}" dt="2023-06-07T09:32:52.443" v="6" actId="47"/>
+        <pc:sldMkLst>
+          <pc:docMk/>
+          <pc:sldMk cId="1345464040" sldId="893"/>
+        </pc:sldMkLst>
+      </pc:sldChg>
+      <pc:sldChg chg="del">
+        <pc:chgData name="Matam, Karthik Kumar" userId="8ba2ca17-c33e-470d-a951-4ec5d393c3c8" providerId="ADAL" clId="{4E30B0BE-69A9-4053-9F9A-D887C4963FD9}" dt="2023-06-07T09:33:03.239" v="11" actId="47"/>
+        <pc:sldMkLst>
+          <pc:docMk/>
+          <pc:sldMk cId="455663281" sldId="894"/>
+        </pc:sldMkLst>
+      </pc:sldChg>
+      <pc:sldChg chg="del">
+        <pc:chgData name="Matam, Karthik Kumar" userId="8ba2ca17-c33e-470d-a951-4ec5d393c3c8" providerId="ADAL" clId="{4E30B0BE-69A9-4053-9F9A-D887C4963FD9}" dt="2023-06-07T09:33:23.984" v="12" actId="47"/>
+        <pc:sldMkLst>
+          <pc:docMk/>
+          <pc:sldMk cId="1116644027" sldId="899"/>
+        </pc:sldMkLst>
+      </pc:sldChg>
+      <pc:sldChg chg="del">
+        <pc:chgData name="Matam, Karthik Kumar" userId="8ba2ca17-c33e-470d-a951-4ec5d393c3c8" providerId="ADAL" clId="{4E30B0BE-69A9-4053-9F9A-D887C4963FD9}" dt="2023-06-07T09:33:26.101" v="13" actId="47"/>
+        <pc:sldMkLst>
+          <pc:docMk/>
+          <pc:sldMk cId="142933786" sldId="900"/>
+        </pc:sldMkLst>
+      </pc:sldChg>
+      <pc:sldChg chg="del">
+        <pc:chgData name="Matam, Karthik Kumar" userId="8ba2ca17-c33e-470d-a951-4ec5d393c3c8" providerId="ADAL" clId="{4E30B0BE-69A9-4053-9F9A-D887C4963FD9}" dt="2023-06-07T09:33:35.534" v="14" actId="47"/>
+        <pc:sldMkLst>
+          <pc:docMk/>
+          <pc:sldMk cId="661034062" sldId="901"/>
+        </pc:sldMkLst>
+      </pc:sldChg>
+    </pc:docChg>
+  </pc:docChgLst>
+  <pc:docChgLst>
+    <pc:chgData name="Verma, Sandeep" userId="S::sandverma@deloitte.com::d30842dc-0cf9-420b-8643-a509591151fe" providerId="AD" clId="Web-{DFD3FCCE-F022-53D3-2774-0512410A9D00}"/>
+    <pc:docChg chg="delSld">
+      <pc:chgData name="Verma, Sandeep" userId="S::sandverma@deloitte.com::d30842dc-0cf9-420b-8643-a509591151fe" providerId="AD" clId="Web-{DFD3FCCE-F022-53D3-2774-0512410A9D00}" dt="2023-06-21T14:57:50.053" v="0"/>
+      <pc:docMkLst>
+        <pc:docMk/>
+      </pc:docMkLst>
+      <pc:sldChg chg="del">
+        <pc:chgData name="Verma, Sandeep" userId="S::sandverma@deloitte.com::d30842dc-0cf9-420b-8643-a509591151fe" providerId="AD" clId="Web-{DFD3FCCE-F022-53D3-2774-0512410A9D00}" dt="2023-06-21T14:57:50.053" v="0"/>
+        <pc:sldMkLst>
+          <pc:docMk/>
+          <pc:sldMk cId="3534433074" sldId="904"/>
+        </pc:sldMkLst>
+      </pc:sldChg>
+    </pc:docChg>
+  </pc:docChgLst>
+  <pc:docChgLst>
+    <pc:chgData name="Verma, Sandeep" userId="S::sandverma@deloitte.com::d30842dc-0cf9-420b-8643-a509591151fe" providerId="AD" clId="Web-{2E1A052E-845F-8751-AA9C-B583C495DDDA}"/>
+    <pc:docChg chg="addSld modSld">
+      <pc:chgData name="Verma, Sandeep" userId="S::sandverma@deloitte.com::d30842dc-0cf9-420b-8643-a509591151fe" providerId="AD" clId="Web-{2E1A052E-845F-8751-AA9C-B583C495DDDA}" dt="2023-06-13T10:04:28.371" v="3"/>
+      <pc:docMkLst>
+        <pc:docMk/>
+      </pc:docMkLst>
+      <pc:sldChg chg="delSp">
+        <pc:chgData name="Verma, Sandeep" userId="S::sandverma@deloitte.com::d30842dc-0cf9-420b-8643-a509591151fe" providerId="AD" clId="Web-{2E1A052E-845F-8751-AA9C-B583C495DDDA}" dt="2023-06-13T10:04:28.371" v="3"/>
+        <pc:sldMkLst>
+          <pc:docMk/>
+          <pc:sldMk cId="945300574" sldId="571"/>
+        </pc:sldMkLst>
+        <pc:picChg chg="del">
+          <ac:chgData name="Verma, Sandeep" userId="S::sandverma@deloitte.com::d30842dc-0cf9-420b-8643-a509591151fe" providerId="AD" clId="Web-{2E1A052E-845F-8751-AA9C-B583C495DDDA}" dt="2023-06-13T10:04:26.668" v="1"/>
+          <ac:picMkLst>
+            <pc:docMk/>
+            <pc:sldMk cId="945300574" sldId="571"/>
+            <ac:picMk id="17" creationId="{7C21FBD6-FD6A-4361-975B-DC12D4D3A762}"/>
+          </ac:picMkLst>
+        </pc:picChg>
+        <pc:picChg chg="del">
+          <ac:chgData name="Verma, Sandeep" userId="S::sandverma@deloitte.com::d30842dc-0cf9-420b-8643-a509591151fe" providerId="AD" clId="Web-{2E1A052E-845F-8751-AA9C-B583C495DDDA}" dt="2023-06-13T10:04:27.481" v="2"/>
+          <ac:picMkLst>
+            <pc:docMk/>
+            <pc:sldMk cId="945300574" sldId="571"/>
+            <ac:picMk id="19" creationId="{76749DC0-F6AA-469F-AC9C-31480996B272}"/>
+          </ac:picMkLst>
+        </pc:picChg>
+        <pc:picChg chg="del">
+          <ac:chgData name="Verma, Sandeep" userId="S::sandverma@deloitte.com::d30842dc-0cf9-420b-8643-a509591151fe" providerId="AD" clId="Web-{2E1A052E-845F-8751-AA9C-B583C495DDDA}" dt="2023-06-13T10:04:28.371" v="3"/>
+          <ac:picMkLst>
+            <pc:docMk/>
+            <pc:sldMk cId="945300574" sldId="571"/>
+            <ac:picMk id="20" creationId="{4F8BB1E9-28D5-4E8B-AEB0-E8B6ECCFB6C2}"/>
+          </ac:picMkLst>
+        </pc:picChg>
+      </pc:sldChg>
+      <pc:sldChg chg="add replId">
+        <pc:chgData name="Verma, Sandeep" userId="S::sandverma@deloitte.com::d30842dc-0cf9-420b-8643-a509591151fe" providerId="AD" clId="Web-{2E1A052E-845F-8751-AA9C-B583C495DDDA}" dt="2023-06-13T10:04:03.839" v="0"/>
+        <pc:sldMkLst>
+          <pc:docMk/>
+          <pc:sldMk cId="731864128" sldId="908"/>
+        </pc:sldMkLst>
+      </pc:sldChg>
+    </pc:docChg>
+  </pc:docChgLst>
+  <pc:docChgLst>
+    <pc:chgData name="Pandey, Divya" userId="S::divyapandey3@deloitte.com::f32c0b42-1b24-41e6-ac2b-9966af6e6075" providerId="AD" clId="Web-{1DBC473F-0E99-029A-0BB9-8988050CC67C}"/>
+    <pc:docChg chg="delSld modSld">
+      <pc:chgData name="Pandey, Divya" userId="S::divyapandey3@deloitte.com::f32c0b42-1b24-41e6-ac2b-9966af6e6075" providerId="AD" clId="Web-{1DBC473F-0E99-029A-0BB9-8988050CC67C}" dt="2023-06-21T08:34:19.016" v="13" actId="1076"/>
+      <pc:docMkLst>
+        <pc:docMk/>
+      </pc:docMkLst>
+      <pc:sldChg chg="modSp">
+        <pc:chgData name="Pandey, Divya" userId="S::divyapandey3@deloitte.com::f32c0b42-1b24-41e6-ac2b-9966af6e6075" providerId="AD" clId="Web-{1DBC473F-0E99-029A-0BB9-8988050CC67C}" dt="2023-06-21T08:33:00.623" v="12" actId="20577"/>
+        <pc:sldMkLst>
+          <pc:docMk/>
+          <pc:sldMk cId="1257336563" sldId="573"/>
+        </pc:sldMkLst>
+        <pc:spChg chg="mod">
+          <ac:chgData name="Pandey, Divya" userId="S::divyapandey3@deloitte.com::f32c0b42-1b24-41e6-ac2b-9966af6e6075" providerId="AD" clId="Web-{1DBC473F-0E99-029A-0BB9-8988050CC67C}" dt="2023-06-21T08:33:00.623" v="12" actId="20577"/>
+          <ac:spMkLst>
+            <pc:docMk/>
+            <pc:sldMk cId="1257336563" sldId="573"/>
+            <ac:spMk id="52" creationId="{883BF4F0-1B5D-48E8-A2AA-9FC5239516D7}"/>
+          </ac:spMkLst>
+        </pc:spChg>
+      </pc:sldChg>
+      <pc:sldChg chg="modSp">
+        <pc:chgData name="Pandey, Divya" userId="S::divyapandey3@deloitte.com::f32c0b42-1b24-41e6-ac2b-9966af6e6075" providerId="AD" clId="Web-{1DBC473F-0E99-029A-0BB9-8988050CC67C}" dt="2023-06-21T08:34:19.016" v="13" actId="1076"/>
+        <pc:sldMkLst>
+          <pc:docMk/>
+          <pc:sldMk cId="3140372417" sldId="887"/>
+        </pc:sldMkLst>
+        <pc:spChg chg="mod">
+          <ac:chgData name="Pandey, Divya" userId="S::divyapandey3@deloitte.com::f32c0b42-1b24-41e6-ac2b-9966af6e6075" providerId="AD" clId="Web-{1DBC473F-0E99-029A-0BB9-8988050CC67C}" dt="2023-06-21T08:34:19.016" v="13" actId="1076"/>
+          <ac:spMkLst>
+            <pc:docMk/>
+            <pc:sldMk cId="3140372417" sldId="887"/>
+            <ac:spMk id="9" creationId="{F007B35D-AD4A-4753-B787-6C6A21526FDF}"/>
+          </ac:spMkLst>
+        </pc:spChg>
+      </pc:sldChg>
+      <pc:sldChg chg="delSp modSp del">
+        <pc:chgData name="Pandey, Divya" userId="S::divyapandey3@deloitte.com::f32c0b42-1b24-41e6-ac2b-9966af6e6075" providerId="AD" clId="Web-{1DBC473F-0E99-029A-0BB9-8988050CC67C}" dt="2023-06-21T08:31:21.855" v="2"/>
+        <pc:sldMkLst>
+          <pc:docMk/>
+          <pc:sldMk cId="1024736671" sldId="903"/>
+        </pc:sldMkLst>
+        <pc:spChg chg="del mod">
+          <ac:chgData name="Pandey, Divya" userId="S::divyapandey3@deloitte.com::f32c0b42-1b24-41e6-ac2b-9966af6e6075" providerId="AD" clId="Web-{1DBC473F-0E99-029A-0BB9-8988050CC67C}" dt="2023-06-21T08:31:19.027" v="1"/>
+          <ac:spMkLst>
+            <pc:docMk/>
+            <pc:sldMk cId="1024736671" sldId="903"/>
+            <ac:spMk id="4" creationId="{7E3B52AE-D736-43F6-82B0-7D63C9A40BFE}"/>
+          </ac:spMkLst>
+        </pc:spChg>
+      </pc:sldChg>
+    </pc:docChg>
+  </pc:docChgLst>
+  <pc:docChgLst>
+    <pc:chgData name="Alleni, Narendhar" userId="S::nalleni@deloitte.com::3a22b8f0-fbf5-4243-a263-69a53057ec23" providerId="AD" clId="Web-{A8731F99-5BE1-1F0F-4DBE-787A87666F45}"/>
+    <pc:docChg chg="addSld modSld">
+      <pc:chgData name="Alleni, Narendhar" userId="S::nalleni@deloitte.com::3a22b8f0-fbf5-4243-a263-69a53057ec23" providerId="AD" clId="Web-{A8731F99-5BE1-1F0F-4DBE-787A87666F45}" dt="2023-04-12T11:07:31.251" v="2"/>
+      <pc:docMkLst>
+        <pc:docMk/>
+      </pc:docMkLst>
+      <pc:sldChg chg="delSp add replId">
+        <pc:chgData name="Alleni, Narendhar" userId="S::nalleni@deloitte.com::3a22b8f0-fbf5-4243-a263-69a53057ec23" providerId="AD" clId="Web-{A8731F99-5BE1-1F0F-4DBE-787A87666F45}" dt="2023-04-12T11:07:31.251" v="2"/>
+        <pc:sldMkLst>
+          <pc:docMk/>
+          <pc:sldMk cId="1075210502" sldId="897"/>
+        </pc:sldMkLst>
+        <pc:spChg chg="del">
+          <ac:chgData name="Alleni, Narendhar" userId="S::nalleni@deloitte.com::3a22b8f0-fbf5-4243-a263-69a53057ec23" providerId="AD" clId="Web-{A8731F99-5BE1-1F0F-4DBE-787A87666F45}" dt="2023-04-12T11:07:31.251" v="2"/>
+          <ac:spMkLst>
+            <pc:docMk/>
+            <pc:sldMk cId="1075210502" sldId="897"/>
+            <ac:spMk id="11" creationId="{08520DDA-3E42-4FFE-B4BB-FBFD902EFEB6}"/>
+          </ac:spMkLst>
+        </pc:spChg>
+        <pc:picChg chg="del">
+          <ac:chgData name="Alleni, Narendhar" userId="S::nalleni@deloitte.com::3a22b8f0-fbf5-4243-a263-69a53057ec23" providerId="AD" clId="Web-{A8731F99-5BE1-1F0F-4DBE-787A87666F45}" dt="2023-04-12T11:07:27.735" v="1"/>
+          <ac:picMkLst>
+            <pc:docMk/>
+            <pc:sldMk cId="1075210502" sldId="897"/>
+            <ac:picMk id="6" creationId="{A9640F28-B8C5-4370-A5A3-AB2B894DCD2D}"/>
+          </ac:picMkLst>
+        </pc:picChg>
+      </pc:sldChg>
+    </pc:docChg>
+  </pc:docChgLst>
+  <pc:docChgLst>
+    <pc:chgData name="Matam, Karthik Kumar" userId="8ba2ca17-c33e-470d-a951-4ec5d393c3c8" providerId="ADAL" clId="{296E2F37-18D7-4F50-8380-FF9BFE889343}"/>
+    <pc:docChg chg="addSld delSld modSld sldOrd">
+      <pc:chgData name="Matam, Karthik Kumar" userId="8ba2ca17-c33e-470d-a951-4ec5d393c3c8" providerId="ADAL" clId="{296E2F37-18D7-4F50-8380-FF9BFE889343}" dt="2023-06-13T13:06:33.149" v="5"/>
+      <pc:docMkLst>
+        <pc:docMk/>
+      </pc:docMkLst>
+      <pc:sldChg chg="add ord">
+        <pc:chgData name="Matam, Karthik Kumar" userId="8ba2ca17-c33e-470d-a951-4ec5d393c3c8" providerId="ADAL" clId="{296E2F37-18D7-4F50-8380-FF9BFE889343}" dt="2023-06-13T13:06:33.149" v="5"/>
+        <pc:sldMkLst>
+          <pc:docMk/>
+          <pc:sldMk cId="1717122797" sldId="797"/>
+        </pc:sldMkLst>
+      </pc:sldChg>
+      <pc:sldChg chg="del">
+        <pc:chgData name="Matam, Karthik Kumar" userId="8ba2ca17-c33e-470d-a951-4ec5d393c3c8" providerId="ADAL" clId="{296E2F37-18D7-4F50-8380-FF9BFE889343}" dt="2023-06-13T13:06:23.217" v="2" actId="2696"/>
+        <pc:sldMkLst>
+          <pc:docMk/>
+          <pc:sldMk cId="2964921621" sldId="797"/>
+        </pc:sldMkLst>
+      </pc:sldChg>
+      <pc:sldChg chg="del">
+        <pc:chgData name="Matam, Karthik Kumar" userId="8ba2ca17-c33e-470d-a951-4ec5d393c3c8" providerId="ADAL" clId="{296E2F37-18D7-4F50-8380-FF9BFE889343}" dt="2023-06-13T13:05:15.478" v="1" actId="47"/>
+        <pc:sldMkLst>
+          <pc:docMk/>
+          <pc:sldMk cId="1749771289" sldId="904"/>
+        </pc:sldMkLst>
+      </pc:sldChg>
+      <pc:sldChg chg="del">
+        <pc:chgData name="Matam, Karthik Kumar" userId="8ba2ca17-c33e-470d-a951-4ec5d393c3c8" providerId="ADAL" clId="{296E2F37-18D7-4F50-8380-FF9BFE889343}" dt="2023-06-13T13:05:04.024" v="0" actId="47"/>
+        <pc:sldMkLst>
+          <pc:docMk/>
+          <pc:sldMk cId="1032245967" sldId="906"/>
+        </pc:sldMkLst>
+      </pc:sldChg>
+      <pc:sldMasterChg chg="delSldLayout">
+        <pc:chgData name="Matam, Karthik Kumar" userId="8ba2ca17-c33e-470d-a951-4ec5d393c3c8" providerId="ADAL" clId="{296E2F37-18D7-4F50-8380-FF9BFE889343}" dt="2023-06-13T13:06:23.217" v="2" actId="2696"/>
+        <pc:sldMasterMkLst>
+          <pc:docMk/>
+          <pc:sldMasterMk cId="0" sldId="2147483648"/>
+        </pc:sldMasterMkLst>
+        <pc:sldLayoutChg chg="del">
+          <pc:chgData name="Matam, Karthik Kumar" userId="8ba2ca17-c33e-470d-a951-4ec5d393c3c8" providerId="ADAL" clId="{296E2F37-18D7-4F50-8380-FF9BFE889343}" dt="2023-06-13T13:06:23.217" v="2" actId="2696"/>
+          <pc:sldLayoutMkLst>
+            <pc:docMk/>
+            <pc:sldMasterMk cId="0" sldId="2147483648"/>
+            <pc:sldLayoutMk cId="3919608582" sldId="2147483763"/>
+          </pc:sldLayoutMkLst>
+        </pc:sldLayoutChg>
+      </pc:sldMasterChg>
+    </pc:docChg>
+  </pc:docChgLst>
   <pc:docChgLst>
     <pc:chgData name="Verma, Sandeep" userId="S::sandverma@deloitte.com::d30842dc-0cf9-420b-8643-a509591151fe" providerId="AD" clId="Web-{3B7FE807-EDB9-19C1-13FE-59DDE07EDDCD}"/>
     <pc:docChg chg="modSld sldOrd">
@@ -242,302 +683,32 @@
     </pc:docChg>
   </pc:docChgLst>
   <pc:docChgLst>
-    <pc:chgData name="Verma, Sandeep" userId="S::sandverma@deloitte.com::d30842dc-0cf9-420b-8643-a509591151fe" providerId="AD" clId="Web-{DFD3FCCE-F022-53D3-2774-0512410A9D00}"/>
-    <pc:docChg chg="delSld">
-      <pc:chgData name="Verma, Sandeep" userId="S::sandverma@deloitte.com::d30842dc-0cf9-420b-8643-a509591151fe" providerId="AD" clId="Web-{DFD3FCCE-F022-53D3-2774-0512410A9D00}" dt="2023-06-21T14:57:50.053" v="0"/>
+    <pc:chgData name="Verma, Sandeep" userId="S::sandverma@deloitte.com::d30842dc-0cf9-420b-8643-a509591151fe" providerId="AD" clId="Web-{CD3E3580-98B4-D402-BE03-B05F3D57162B}"/>
+    <pc:docChg chg="modSld sldOrd">
+      <pc:chgData name="Verma, Sandeep" userId="S::sandverma@deloitte.com::d30842dc-0cf9-420b-8643-a509591151fe" providerId="AD" clId="Web-{CD3E3580-98B4-D402-BE03-B05F3D57162B}" dt="2023-07-04T13:06:32.038" v="3" actId="1076"/>
       <pc:docMkLst>
         <pc:docMk/>
       </pc:docMkLst>
-      <pc:sldChg chg="del">
-        <pc:chgData name="Verma, Sandeep" userId="S::sandverma@deloitte.com::d30842dc-0cf9-420b-8643-a509591151fe" providerId="AD" clId="Web-{DFD3FCCE-F022-53D3-2774-0512410A9D00}" dt="2023-06-21T14:57:50.053" v="0"/>
+      <pc:sldChg chg="modSp ord">
+        <pc:chgData name="Verma, Sandeep" userId="S::sandverma@deloitte.com::d30842dc-0cf9-420b-8643-a509591151fe" providerId="AD" clId="Web-{CD3E3580-98B4-D402-BE03-B05F3D57162B}" dt="2023-07-04T13:06:32.038" v="3" actId="1076"/>
         <pc:sldMkLst>
           <pc:docMk/>
-          <pc:sldMk cId="3534433074" sldId="904"/>
+          <pc:sldMk cId="1265867692" sldId="282"/>
         </pc:sldMkLst>
-      </pc:sldChg>
-    </pc:docChg>
-  </pc:docChgLst>
-  <pc:docChgLst>
-    <pc:chgData clId="Web-{AB8B8374-EE51-5EFD-12A8-D2983638F586}"/>
-    <pc:docChg chg="modSld">
-      <pc:chgData name="" userId="" providerId="" clId="Web-{AB8B8374-EE51-5EFD-12A8-D2983638F586}" dt="2024-04-16T16:08:53.608" v="0" actId="1076"/>
-      <pc:docMkLst>
-        <pc:docMk/>
-      </pc:docMkLst>
-      <pc:sldChg chg="modSp">
-        <pc:chgData name="" userId="" providerId="" clId="Web-{AB8B8374-EE51-5EFD-12A8-D2983638F586}" dt="2024-04-16T16:08:53.608" v="0" actId="1076"/>
-        <pc:sldMkLst>
-          <pc:docMk/>
-          <pc:sldMk cId="1259888063" sldId="889"/>
-        </pc:sldMkLst>
-        <pc:picChg chg="mod">
-          <ac:chgData name="" userId="" providerId="" clId="Web-{AB8B8374-EE51-5EFD-12A8-D2983638F586}" dt="2024-04-16T16:08:53.608" v="0" actId="1076"/>
-          <ac:picMkLst>
-            <pc:docMk/>
-            <pc:sldMk cId="1259888063" sldId="889"/>
-            <ac:picMk id="9" creationId="{35C13028-3154-401C-868E-0725508DBD0D}"/>
-          </ac:picMkLst>
-        </pc:picChg>
-      </pc:sldChg>
-    </pc:docChg>
-  </pc:docChgLst>
-  <pc:docChgLst>
-    <pc:chgData name="Vishal, R" userId="S::rvishal5@deloitte.com::f4d109f5-0d85-43b2-9d23-b7f73bdaf84a" providerId="AD" clId="Web-{AB8B8374-EE51-5EFD-12A8-D2983638F586}"/>
-    <pc:docChg chg="modSld">
-      <pc:chgData name="Vishal, R" userId="S::rvishal5@deloitte.com::f4d109f5-0d85-43b2-9d23-b7f73bdaf84a" providerId="AD" clId="Web-{AB8B8374-EE51-5EFD-12A8-D2983638F586}" dt="2024-04-16T16:08:59.515" v="0" actId="1076"/>
-      <pc:docMkLst>
-        <pc:docMk/>
-      </pc:docMkLst>
-      <pc:sldChg chg="modSp">
-        <pc:chgData name="Vishal, R" userId="S::rvishal5@deloitte.com::f4d109f5-0d85-43b2-9d23-b7f73bdaf84a" providerId="AD" clId="Web-{AB8B8374-EE51-5EFD-12A8-D2983638F586}" dt="2024-04-16T16:08:59.515" v="0" actId="1076"/>
-        <pc:sldMkLst>
-          <pc:docMk/>
-          <pc:sldMk cId="1259888063" sldId="889"/>
-        </pc:sldMkLst>
-        <pc:picChg chg="mod">
-          <ac:chgData name="Vishal, R" userId="S::rvishal5@deloitte.com::f4d109f5-0d85-43b2-9d23-b7f73bdaf84a" providerId="AD" clId="Web-{AB8B8374-EE51-5EFD-12A8-D2983638F586}" dt="2024-04-16T16:08:59.515" v="0" actId="1076"/>
-          <ac:picMkLst>
-            <pc:docMk/>
-            <pc:sldMk cId="1259888063" sldId="889"/>
-            <ac:picMk id="9" creationId="{35C13028-3154-401C-868E-0725508DBD0D}"/>
-          </ac:picMkLst>
-        </pc:picChg>
-      </pc:sldChg>
-    </pc:docChg>
-  </pc:docChgLst>
-  <pc:docChgLst>
-    <pc:chgData name="Sharma, Ayushi" userId="S::ayushisharma5@deloitte.com::3cdde7ff-21f1-4340-802f-e61f2f39f62b" providerId="AD" clId="Web-{FA197C73-464B-4C16-B8C9-F80D2964B3EE}"/>
-    <pc:docChg chg="mod">
-      <pc:chgData name="Sharma, Ayushi" userId="S::ayushisharma5@deloitte.com::3cdde7ff-21f1-4340-802f-e61f2f39f62b" providerId="AD" clId="Web-{FA197C73-464B-4C16-B8C9-F80D2964B3EE}" dt="2024-07-18T11:29:10.113" v="0" actId="33475"/>
-      <pc:docMkLst>
-        <pc:docMk/>
-      </pc:docMkLst>
-    </pc:docChg>
-  </pc:docChgLst>
-  <pc:docChgLst>
-    <pc:chgData clId="Web-{8752F526-3710-29DA-83A6-97CB5078ACED}"/>
-    <pc:docChg chg="modSld">
-      <pc:chgData name="" userId="" providerId="" clId="Web-{8752F526-3710-29DA-83A6-97CB5078ACED}" dt="2024-04-16T16:09:21.068" v="0" actId="1076"/>
-      <pc:docMkLst>
-        <pc:docMk/>
-      </pc:docMkLst>
-      <pc:sldChg chg="modSp">
-        <pc:chgData name="" userId="" providerId="" clId="Web-{8752F526-3710-29DA-83A6-97CB5078ACED}" dt="2024-04-16T16:09:21.068" v="0" actId="1076"/>
-        <pc:sldMkLst>
-          <pc:docMk/>
-          <pc:sldMk cId="1259888063" sldId="889"/>
-        </pc:sldMkLst>
-        <pc:picChg chg="mod">
-          <ac:chgData name="" userId="" providerId="" clId="Web-{8752F526-3710-29DA-83A6-97CB5078ACED}" dt="2024-04-16T16:09:21.068" v="0" actId="1076"/>
-          <ac:picMkLst>
-            <pc:docMk/>
-            <pc:sldMk cId="1259888063" sldId="889"/>
-            <ac:picMk id="9" creationId="{35C13028-3154-401C-868E-0725508DBD0D}"/>
-          </ac:picMkLst>
-        </pc:picChg>
-      </pc:sldChg>
-    </pc:docChg>
-  </pc:docChgLst>
-  <pc:docChgLst>
-    <pc:chgData name="Alleni, Narendhar" userId="S::nalleni@deloitte.com::3a22b8f0-fbf5-4243-a263-69a53057ec23" providerId="AD" clId="Web-{A8731F99-5BE1-1F0F-4DBE-787A87666F45}"/>
-    <pc:docChg chg="addSld modSld">
-      <pc:chgData name="Alleni, Narendhar" userId="S::nalleni@deloitte.com::3a22b8f0-fbf5-4243-a263-69a53057ec23" providerId="AD" clId="Web-{A8731F99-5BE1-1F0F-4DBE-787A87666F45}" dt="2023-04-12T11:07:31.251" v="2"/>
-      <pc:docMkLst>
-        <pc:docMk/>
-      </pc:docMkLst>
-      <pc:sldChg chg="delSp add replId">
-        <pc:chgData name="Alleni, Narendhar" userId="S::nalleni@deloitte.com::3a22b8f0-fbf5-4243-a263-69a53057ec23" providerId="AD" clId="Web-{A8731F99-5BE1-1F0F-4DBE-787A87666F45}" dt="2023-04-12T11:07:31.251" v="2"/>
-        <pc:sldMkLst>
-          <pc:docMk/>
-          <pc:sldMk cId="1075210502" sldId="897"/>
-        </pc:sldMkLst>
-        <pc:spChg chg="del">
-          <ac:chgData name="Alleni, Narendhar" userId="S::nalleni@deloitte.com::3a22b8f0-fbf5-4243-a263-69a53057ec23" providerId="AD" clId="Web-{A8731F99-5BE1-1F0F-4DBE-787A87666F45}" dt="2023-04-12T11:07:31.251" v="2"/>
+        <pc:spChg chg="mod">
+          <ac:chgData name="Verma, Sandeep" userId="S::sandverma@deloitte.com::d30842dc-0cf9-420b-8643-a509591151fe" providerId="AD" clId="Web-{CD3E3580-98B4-D402-BE03-B05F3D57162B}" dt="2023-07-04T13:06:28.866" v="2" actId="1076"/>
           <ac:spMkLst>
             <pc:docMk/>
-            <pc:sldMk cId="1075210502" sldId="897"/>
-            <ac:spMk id="11" creationId="{08520DDA-3E42-4FFE-B4BB-FBFD902EFEB6}"/>
-          </ac:spMkLst>
-        </pc:spChg>
-        <pc:picChg chg="del">
-          <ac:chgData name="Alleni, Narendhar" userId="S::nalleni@deloitte.com::3a22b8f0-fbf5-4243-a263-69a53057ec23" providerId="AD" clId="Web-{A8731F99-5BE1-1F0F-4DBE-787A87666F45}" dt="2023-04-12T11:07:27.735" v="1"/>
-          <ac:picMkLst>
-            <pc:docMk/>
-            <pc:sldMk cId="1075210502" sldId="897"/>
-            <ac:picMk id="6" creationId="{A9640F28-B8C5-4370-A5A3-AB2B894DCD2D}"/>
-          </ac:picMkLst>
-        </pc:picChg>
-      </pc:sldChg>
-    </pc:docChg>
-  </pc:docChgLst>
-  <pc:docChgLst>
-    <pc:chgData name="Zakia, Ismat" userId="S::izakia@deloitte.com::285662d0-8c59-4ce6-b980-f579189dfa53" providerId="AD" clId="Web-{3494DA40-E19F-15EC-F924-4CD4B41110F4}"/>
-    <pc:docChg chg="modSld">
-      <pc:chgData name="Zakia, Ismat" userId="S::izakia@deloitte.com::285662d0-8c59-4ce6-b980-f579189dfa53" providerId="AD" clId="Web-{3494DA40-E19F-15EC-F924-4CD4B41110F4}" dt="2024-04-25T14:31:40.495" v="26" actId="1076"/>
-      <pc:docMkLst>
-        <pc:docMk/>
-      </pc:docMkLst>
-      <pc:sldChg chg="addSp modSp">
-        <pc:chgData name="Zakia, Ismat" userId="S::izakia@deloitte.com::285662d0-8c59-4ce6-b980-f579189dfa53" providerId="AD" clId="Web-{3494DA40-E19F-15EC-F924-4CD4B41110F4}" dt="2024-04-25T14:31:40.495" v="26" actId="1076"/>
-        <pc:sldMkLst>
-          <pc:docMk/>
-          <pc:sldMk cId="567236525" sldId="454"/>
-        </pc:sldMkLst>
-        <pc:spChg chg="add mod">
-          <ac:chgData name="Zakia, Ismat" userId="S::izakia@deloitte.com::285662d0-8c59-4ce6-b980-f579189dfa53" providerId="AD" clId="Web-{3494DA40-E19F-15EC-F924-4CD4B41110F4}" dt="2024-04-25T14:31:40.495" v="26" actId="1076"/>
-          <ac:spMkLst>
-            <pc:docMk/>
-            <pc:sldMk cId="567236525" sldId="454"/>
-            <ac:spMk id="2" creationId="{1B98E482-D930-7FDA-8F48-3C7212E821F1}"/>
+            <pc:sldMk cId="1265867692" sldId="282"/>
+            <ac:spMk id="63" creationId="{00000000-0000-0000-0000-000000000000}"/>
           </ac:spMkLst>
         </pc:spChg>
         <pc:spChg chg="mod">
-          <ac:chgData name="Zakia, Ismat" userId="S::izakia@deloitte.com::285662d0-8c59-4ce6-b980-f579189dfa53" providerId="AD" clId="Web-{3494DA40-E19F-15EC-F924-4CD4B41110F4}" dt="2024-04-25T14:31:15.572" v="22" actId="1076"/>
+          <ac:chgData name="Verma, Sandeep" userId="S::sandverma@deloitte.com::d30842dc-0cf9-420b-8643-a509591151fe" providerId="AD" clId="Web-{CD3E3580-98B4-D402-BE03-B05F3D57162B}" dt="2023-07-04T13:06:32.038" v="3" actId="1076"/>
           <ac:spMkLst>
             <pc:docMk/>
-            <pc:sldMk cId="567236525" sldId="454"/>
-            <ac:spMk id="16" creationId="{3BD204F7-A057-422A-99CB-BE6A85C02AEF}"/>
-          </ac:spMkLst>
-        </pc:spChg>
-        <pc:spChg chg="mod">
-          <ac:chgData name="Zakia, Ismat" userId="S::izakia@deloitte.com::285662d0-8c59-4ce6-b980-f579189dfa53" providerId="AD" clId="Web-{3494DA40-E19F-15EC-F924-4CD4B41110F4}" dt="2024-04-25T14:31:33.010" v="25" actId="1076"/>
-          <ac:spMkLst>
-            <pc:docMk/>
-            <pc:sldMk cId="567236525" sldId="454"/>
-            <ac:spMk id="18" creationId="{CE7621EA-909F-4C47-9E0C-646515D9B00C}"/>
-          </ac:spMkLst>
-        </pc:spChg>
-        <pc:spChg chg="mod">
-          <ac:chgData name="Zakia, Ismat" userId="S::izakia@deloitte.com::285662d0-8c59-4ce6-b980-f579189dfa53" providerId="AD" clId="Web-{3494DA40-E19F-15EC-F924-4CD4B41110F4}" dt="2024-04-25T14:31:26.135" v="24" actId="1076"/>
-          <ac:spMkLst>
-            <pc:docMk/>
-            <pc:sldMk cId="567236525" sldId="454"/>
-            <ac:spMk id="20" creationId="{C29703C2-C8EF-4BB2-9A50-03D06F294381}"/>
-          </ac:spMkLst>
-        </pc:spChg>
-        <pc:spChg chg="mod">
-          <ac:chgData name="Zakia, Ismat" userId="S::izakia@deloitte.com::285662d0-8c59-4ce6-b980-f579189dfa53" providerId="AD" clId="Web-{3494DA40-E19F-15EC-F924-4CD4B41110F4}" dt="2024-04-25T14:29:42.553" v="2" actId="14100"/>
-          <ac:spMkLst>
-            <pc:docMk/>
-            <pc:sldMk cId="567236525" sldId="454"/>
-            <ac:spMk id="22" creationId="{14710C37-F80E-48AA-AD08-9E0A6E5B9DAB}"/>
-          </ac:spMkLst>
-        </pc:spChg>
-      </pc:sldChg>
-    </pc:docChg>
-  </pc:docChgLst>
-  <pc:docChgLst>
-    <pc:chgData name="Verma, Sandeep" userId="S::sandverma@deloitte.com::d30842dc-0cf9-420b-8643-a509591151fe" providerId="AD" clId="Web-{CE288D4E-A439-6E19-1EA5-654391DE5B94}"/>
-    <pc:docChg chg="modSld">
-      <pc:chgData name="Verma, Sandeep" userId="S::sandverma@deloitte.com::d30842dc-0cf9-420b-8643-a509591151fe" providerId="AD" clId="Web-{CE288D4E-A439-6E19-1EA5-654391DE5B94}" dt="2023-06-12T19:19:54.641" v="49" actId="1076"/>
-      <pc:docMkLst>
-        <pc:docMk/>
-      </pc:docMkLst>
-      <pc:sldChg chg="modSp">
-        <pc:chgData name="Verma, Sandeep" userId="S::sandverma@deloitte.com::d30842dc-0cf9-420b-8643-a509591151fe" providerId="AD" clId="Web-{CE288D4E-A439-6E19-1EA5-654391DE5B94}" dt="2023-06-12T19:18:41.169" v="40" actId="20577"/>
-        <pc:sldMkLst>
-          <pc:docMk/>
-          <pc:sldMk cId="1257336563" sldId="573"/>
-        </pc:sldMkLst>
-        <pc:spChg chg="mod">
-          <ac:chgData name="Verma, Sandeep" userId="S::sandverma@deloitte.com::d30842dc-0cf9-420b-8643-a509591151fe" providerId="AD" clId="Web-{CE288D4E-A439-6E19-1EA5-654391DE5B94}" dt="2023-06-12T19:18:41.169" v="40" actId="20577"/>
-          <ac:spMkLst>
-            <pc:docMk/>
-            <pc:sldMk cId="1257336563" sldId="573"/>
-            <ac:spMk id="29" creationId="{1FB1CE05-F2BE-4BA7-820C-09F457EC9757}"/>
-          </ac:spMkLst>
-        </pc:spChg>
-      </pc:sldChg>
-      <pc:sldChg chg="modSp">
-        <pc:chgData name="Verma, Sandeep" userId="S::sandverma@deloitte.com::d30842dc-0cf9-420b-8643-a509591151fe" providerId="AD" clId="Web-{CE288D4E-A439-6E19-1EA5-654391DE5B94}" dt="2023-06-12T19:19:54.641" v="49" actId="1076"/>
-        <pc:sldMkLst>
-          <pc:docMk/>
-          <pc:sldMk cId="3140372417" sldId="887"/>
-        </pc:sldMkLst>
-        <pc:spChg chg="mod">
-          <ac:chgData name="Verma, Sandeep" userId="S::sandverma@deloitte.com::d30842dc-0cf9-420b-8643-a509591151fe" providerId="AD" clId="Web-{CE288D4E-A439-6E19-1EA5-654391DE5B94}" dt="2023-06-12T19:19:54.641" v="49" actId="1076"/>
-          <ac:spMkLst>
-            <pc:docMk/>
-            <pc:sldMk cId="3140372417" sldId="887"/>
-            <ac:spMk id="13" creationId="{35646B25-4F0A-4174-BB22-F706A36E961F}"/>
-          </ac:spMkLst>
-        </pc:spChg>
-        <pc:spChg chg="mod">
-          <ac:chgData name="Verma, Sandeep" userId="S::sandverma@deloitte.com::d30842dc-0cf9-420b-8643-a509591151fe" providerId="AD" clId="Web-{CE288D4E-A439-6E19-1EA5-654391DE5B94}" dt="2023-06-12T19:19:37.609" v="45" actId="1076"/>
-          <ac:spMkLst>
-            <pc:docMk/>
-            <pc:sldMk cId="3140372417" sldId="887"/>
-            <ac:spMk id="14" creationId="{99B0C0E5-9F9F-4546-A910-D9D9D238A8E5}"/>
-          </ac:spMkLst>
-        </pc:spChg>
-        <pc:picChg chg="mod">
-          <ac:chgData name="Verma, Sandeep" userId="S::sandverma@deloitte.com::d30842dc-0cf9-420b-8643-a509591151fe" providerId="AD" clId="Web-{CE288D4E-A439-6E19-1EA5-654391DE5B94}" dt="2023-06-12T19:19:51.016" v="48" actId="1076"/>
-          <ac:picMkLst>
-            <pc:docMk/>
-            <pc:sldMk cId="3140372417" sldId="887"/>
-            <ac:picMk id="7" creationId="{26EE033B-4071-4ECD-80DE-B0FB9EFBA73E}"/>
-          </ac:picMkLst>
-        </pc:picChg>
-        <pc:picChg chg="mod">
-          <ac:chgData name="Verma, Sandeep" userId="S::sandverma@deloitte.com::d30842dc-0cf9-420b-8643-a509591151fe" providerId="AD" clId="Web-{CE288D4E-A439-6E19-1EA5-654391DE5B94}" dt="2023-06-12T19:19:23.249" v="42" actId="1076"/>
-          <ac:picMkLst>
-            <pc:docMk/>
-            <pc:sldMk cId="3140372417" sldId="887"/>
-            <ac:picMk id="17" creationId="{D844DBAB-FE84-415D-B08A-21C887779085}"/>
-          </ac:picMkLst>
-        </pc:picChg>
-        <pc:picChg chg="mod">
-          <ac:chgData name="Verma, Sandeep" userId="S::sandverma@deloitte.com::d30842dc-0cf9-420b-8643-a509591151fe" providerId="AD" clId="Web-{CE288D4E-A439-6E19-1EA5-654391DE5B94}" dt="2023-06-12T19:19:45.859" v="47" actId="1076"/>
-          <ac:picMkLst>
-            <pc:docMk/>
-            <pc:sldMk cId="3140372417" sldId="887"/>
-            <ac:picMk id="2051" creationId="{6C5E666D-2DA6-4E51-AD16-B5FEA32AF34F}"/>
-          </ac:picMkLst>
-        </pc:picChg>
-        <pc:picChg chg="mod">
-          <ac:chgData name="Verma, Sandeep" userId="S::sandverma@deloitte.com::d30842dc-0cf9-420b-8643-a509591151fe" providerId="AD" clId="Web-{CE288D4E-A439-6E19-1EA5-654391DE5B94}" dt="2023-06-12T19:19:33.015" v="44" actId="14100"/>
-          <ac:picMkLst>
-            <pc:docMk/>
-            <pc:sldMk cId="3140372417" sldId="887"/>
-            <ac:picMk id="2055" creationId="{CC3F4D93-2505-4F32-AC88-C25537A6E3EE}"/>
-          </ac:picMkLst>
-        </pc:picChg>
-      </pc:sldChg>
-      <pc:sldChg chg="modSp">
-        <pc:chgData name="Verma, Sandeep" userId="S::sandverma@deloitte.com::d30842dc-0cf9-420b-8643-a509591151fe" providerId="AD" clId="Web-{CE288D4E-A439-6E19-1EA5-654391DE5B94}" dt="2023-06-12T19:15:46.989" v="23"/>
-        <pc:sldMkLst>
-          <pc:docMk/>
-          <pc:sldMk cId="1865761104" sldId="890"/>
-        </pc:sldMkLst>
-        <pc:graphicFrameChg chg="mod modGraphic">
-          <ac:chgData name="Verma, Sandeep" userId="S::sandverma@deloitte.com::d30842dc-0cf9-420b-8643-a509591151fe" providerId="AD" clId="Web-{CE288D4E-A439-6E19-1EA5-654391DE5B94}" dt="2023-06-12T19:15:46.989" v="23"/>
-          <ac:graphicFrameMkLst>
-            <pc:docMk/>
-            <pc:sldMk cId="1865761104" sldId="890"/>
-            <ac:graphicFrameMk id="2" creationId="{9EEFFC91-3B06-4A4E-8FAA-B6D9FE3DDCAD}"/>
-          </ac:graphicFrameMkLst>
-        </pc:graphicFrameChg>
-      </pc:sldChg>
-      <pc:sldChg chg="modSp">
-        <pc:chgData name="Verma, Sandeep" userId="S::sandverma@deloitte.com::d30842dc-0cf9-420b-8643-a509591151fe" providerId="AD" clId="Web-{CE288D4E-A439-6E19-1EA5-654391DE5B94}" dt="2023-06-12T19:17:28.931" v="39" actId="1076"/>
-        <pc:sldMkLst>
-          <pc:docMk/>
-          <pc:sldMk cId="1024736671" sldId="903"/>
-        </pc:sldMkLst>
-        <pc:spChg chg="mod">
-          <ac:chgData name="Verma, Sandeep" userId="S::sandverma@deloitte.com::d30842dc-0cf9-420b-8643-a509591151fe" providerId="AD" clId="Web-{CE288D4E-A439-6E19-1EA5-654391DE5B94}" dt="2023-06-12T19:17:28.931" v="39" actId="1076"/>
-          <ac:spMkLst>
-            <pc:docMk/>
-            <pc:sldMk cId="1024736671" sldId="903"/>
-            <ac:spMk id="3" creationId="{668A2922-3DDE-4F25-BFA0-6F9B83541997}"/>
-          </ac:spMkLst>
-        </pc:spChg>
-        <pc:spChg chg="mod">
-          <ac:chgData name="Verma, Sandeep" userId="S::sandverma@deloitte.com::d30842dc-0cf9-420b-8643-a509591151fe" providerId="AD" clId="Web-{CE288D4E-A439-6E19-1EA5-654391DE5B94}" dt="2023-06-12T19:17:18.712" v="37" actId="20577"/>
-          <ac:spMkLst>
-            <pc:docMk/>
-            <pc:sldMk cId="1024736671" sldId="903"/>
-            <ac:spMk id="4" creationId="{7E3B52AE-D736-43F6-82B0-7D63C9A40BFE}"/>
+            <pc:sldMk cId="1265867692" sldId="282"/>
+            <ac:spMk id="70" creationId="{00000000-0000-0000-0000-000000000000}"/>
           </ac:spMkLst>
         </pc:spChg>
       </pc:sldChg>
@@ -635,405 +806,6 @@
             <ac:graphicFrameMk id="2" creationId="{9EEFFC91-3B06-4A4E-8FAA-B6D9FE3DDCAD}"/>
           </ac:graphicFrameMkLst>
         </pc:graphicFrameChg>
-      </pc:sldChg>
-    </pc:docChg>
-  </pc:docChgLst>
-  <pc:docChgLst>
-    <pc:chgData name="Verma, Sandeep" userId="S::sandverma@deloitte.com::d30842dc-0cf9-420b-8643-a509591151fe" providerId="AD" clId="Web-{2E1A052E-845F-8751-AA9C-B583C495DDDA}"/>
-    <pc:docChg chg="addSld modSld">
-      <pc:chgData name="Verma, Sandeep" userId="S::sandverma@deloitte.com::d30842dc-0cf9-420b-8643-a509591151fe" providerId="AD" clId="Web-{2E1A052E-845F-8751-AA9C-B583C495DDDA}" dt="2023-06-13T10:04:28.371" v="3"/>
-      <pc:docMkLst>
-        <pc:docMk/>
-      </pc:docMkLst>
-      <pc:sldChg chg="delSp">
-        <pc:chgData name="Verma, Sandeep" userId="S::sandverma@deloitte.com::d30842dc-0cf9-420b-8643-a509591151fe" providerId="AD" clId="Web-{2E1A052E-845F-8751-AA9C-B583C495DDDA}" dt="2023-06-13T10:04:28.371" v="3"/>
-        <pc:sldMkLst>
-          <pc:docMk/>
-          <pc:sldMk cId="945300574" sldId="571"/>
-        </pc:sldMkLst>
-        <pc:picChg chg="del">
-          <ac:chgData name="Verma, Sandeep" userId="S::sandverma@deloitte.com::d30842dc-0cf9-420b-8643-a509591151fe" providerId="AD" clId="Web-{2E1A052E-845F-8751-AA9C-B583C495DDDA}" dt="2023-06-13T10:04:26.668" v="1"/>
-          <ac:picMkLst>
-            <pc:docMk/>
-            <pc:sldMk cId="945300574" sldId="571"/>
-            <ac:picMk id="17" creationId="{7C21FBD6-FD6A-4361-975B-DC12D4D3A762}"/>
-          </ac:picMkLst>
-        </pc:picChg>
-        <pc:picChg chg="del">
-          <ac:chgData name="Verma, Sandeep" userId="S::sandverma@deloitte.com::d30842dc-0cf9-420b-8643-a509591151fe" providerId="AD" clId="Web-{2E1A052E-845F-8751-AA9C-B583C495DDDA}" dt="2023-06-13T10:04:27.481" v="2"/>
-          <ac:picMkLst>
-            <pc:docMk/>
-            <pc:sldMk cId="945300574" sldId="571"/>
-            <ac:picMk id="19" creationId="{76749DC0-F6AA-469F-AC9C-31480996B272}"/>
-          </ac:picMkLst>
-        </pc:picChg>
-        <pc:picChg chg="del">
-          <ac:chgData name="Verma, Sandeep" userId="S::sandverma@deloitte.com::d30842dc-0cf9-420b-8643-a509591151fe" providerId="AD" clId="Web-{2E1A052E-845F-8751-AA9C-B583C495DDDA}" dt="2023-06-13T10:04:28.371" v="3"/>
-          <ac:picMkLst>
-            <pc:docMk/>
-            <pc:sldMk cId="945300574" sldId="571"/>
-            <ac:picMk id="20" creationId="{4F8BB1E9-28D5-4E8B-AEB0-E8B6ECCFB6C2}"/>
-          </ac:picMkLst>
-        </pc:picChg>
-      </pc:sldChg>
-      <pc:sldChg chg="add replId">
-        <pc:chgData name="Verma, Sandeep" userId="S::sandverma@deloitte.com::d30842dc-0cf9-420b-8643-a509591151fe" providerId="AD" clId="Web-{2E1A052E-845F-8751-AA9C-B583C495DDDA}" dt="2023-06-13T10:04:03.839" v="0"/>
-        <pc:sldMkLst>
-          <pc:docMk/>
-          <pc:sldMk cId="731864128" sldId="908"/>
-        </pc:sldMkLst>
-      </pc:sldChg>
-    </pc:docChg>
-  </pc:docChgLst>
-  <pc:docChgLst>
-    <pc:chgData name="Zakia, Ismat" userId="S::izakia@deloitte.com::285662d0-8c59-4ce6-b980-f579189dfa53" providerId="AD" clId="Web-{0E974B85-CE22-D783-A524-9F7E9127F49A}"/>
-    <pc:docChg chg="modSld">
-      <pc:chgData name="Zakia, Ismat" userId="S::izakia@deloitte.com::285662d0-8c59-4ce6-b980-f579189dfa53" providerId="AD" clId="Web-{0E974B85-CE22-D783-A524-9F7E9127F49A}" dt="2024-04-25T14:32:44.347" v="0" actId="20577"/>
-      <pc:docMkLst>
-        <pc:docMk/>
-      </pc:docMkLst>
-      <pc:sldChg chg="modSp">
-        <pc:chgData name="Zakia, Ismat" userId="S::izakia@deloitte.com::285662d0-8c59-4ce6-b980-f579189dfa53" providerId="AD" clId="Web-{0E974B85-CE22-D783-A524-9F7E9127F49A}" dt="2024-04-25T14:32:44.347" v="0" actId="20577"/>
-        <pc:sldMkLst>
-          <pc:docMk/>
-          <pc:sldMk cId="567236525" sldId="454"/>
-        </pc:sldMkLst>
-        <pc:spChg chg="mod">
-          <ac:chgData name="Zakia, Ismat" userId="S::izakia@deloitte.com::285662d0-8c59-4ce6-b980-f579189dfa53" providerId="AD" clId="Web-{0E974B85-CE22-D783-A524-9F7E9127F49A}" dt="2024-04-25T14:32:44.347" v="0" actId="20577"/>
-          <ac:spMkLst>
-            <pc:docMk/>
-            <pc:sldMk cId="567236525" sldId="454"/>
-            <ac:spMk id="2" creationId="{1B98E482-D930-7FDA-8F48-3C7212E821F1}"/>
-          </ac:spMkLst>
-        </pc:spChg>
-      </pc:sldChg>
-    </pc:docChg>
-  </pc:docChgLst>
-  <pc:docChgLst>
-    <pc:chgData name="Verma, Sandeep" userId="S::sandverma@deloitte.com::d30842dc-0cf9-420b-8643-a509591151fe" providerId="AD" clId="Web-{CB3B24C3-0CE0-9501-04BE-80FAD9FFB32F}"/>
-    <pc:docChg chg="modSld">
-      <pc:chgData name="Verma, Sandeep" userId="S::sandverma@deloitte.com::d30842dc-0cf9-420b-8643-a509591151fe" providerId="AD" clId="Web-{CB3B24C3-0CE0-9501-04BE-80FAD9FFB32F}" dt="2023-06-20T09:19:21.038" v="5" actId="1076"/>
-      <pc:docMkLst>
-        <pc:docMk/>
-      </pc:docMkLst>
-      <pc:sldChg chg="modSp">
-        <pc:chgData name="Verma, Sandeep" userId="S::sandverma@deloitte.com::d30842dc-0cf9-420b-8643-a509591151fe" providerId="AD" clId="Web-{CB3B24C3-0CE0-9501-04BE-80FAD9FFB32F}" dt="2023-06-20T09:19:21.038" v="5" actId="1076"/>
-        <pc:sldMkLst>
-          <pc:docMk/>
-          <pc:sldMk cId="1265867692" sldId="282"/>
-        </pc:sldMkLst>
-        <pc:spChg chg="mod">
-          <ac:chgData name="Verma, Sandeep" userId="S::sandverma@deloitte.com::d30842dc-0cf9-420b-8643-a509591151fe" providerId="AD" clId="Web-{CB3B24C3-0CE0-9501-04BE-80FAD9FFB32F}" dt="2023-06-20T09:19:11.225" v="3" actId="1076"/>
-          <ac:spMkLst>
-            <pc:docMk/>
-            <pc:sldMk cId="1265867692" sldId="282"/>
-            <ac:spMk id="54" creationId="{50848D64-FB64-429D-B5E6-9D84359772B7}"/>
-          </ac:spMkLst>
-        </pc:spChg>
-        <pc:spChg chg="mod">
-          <ac:chgData name="Verma, Sandeep" userId="S::sandverma@deloitte.com::d30842dc-0cf9-420b-8643-a509591151fe" providerId="AD" clId="Web-{CB3B24C3-0CE0-9501-04BE-80FAD9FFB32F}" dt="2023-06-20T09:19:17.241" v="4" actId="1076"/>
-          <ac:spMkLst>
-            <pc:docMk/>
-            <pc:sldMk cId="1265867692" sldId="282"/>
-            <ac:spMk id="60" creationId="{705B094B-759B-4752-A5E5-3BC6FB706E4F}"/>
-          </ac:spMkLst>
-        </pc:spChg>
-        <pc:spChg chg="mod">
-          <ac:chgData name="Verma, Sandeep" userId="S::sandverma@deloitte.com::d30842dc-0cf9-420b-8643-a509591151fe" providerId="AD" clId="Web-{CB3B24C3-0CE0-9501-04BE-80FAD9FFB32F}" dt="2023-06-20T09:19:02.037" v="1" actId="1076"/>
-          <ac:spMkLst>
-            <pc:docMk/>
-            <pc:sldMk cId="1265867692" sldId="282"/>
-            <ac:spMk id="67" creationId="{00000000-0000-0000-0000-000000000000}"/>
-          </ac:spMkLst>
-        </pc:spChg>
-        <pc:spChg chg="mod">
-          <ac:chgData name="Verma, Sandeep" userId="S::sandverma@deloitte.com::d30842dc-0cf9-420b-8643-a509591151fe" providerId="AD" clId="Web-{CB3B24C3-0CE0-9501-04BE-80FAD9FFB32F}" dt="2023-06-20T09:18:51.396" v="0" actId="1076"/>
-          <ac:spMkLst>
-            <pc:docMk/>
-            <pc:sldMk cId="1265867692" sldId="282"/>
-            <ac:spMk id="76" creationId="{55267C9B-D960-4607-A136-ECC9350F05C2}"/>
-          </ac:spMkLst>
-        </pc:spChg>
-        <pc:spChg chg="mod">
-          <ac:chgData name="Verma, Sandeep" userId="S::sandverma@deloitte.com::d30842dc-0cf9-420b-8643-a509591151fe" providerId="AD" clId="Web-{CB3B24C3-0CE0-9501-04BE-80FAD9FFB32F}" dt="2023-06-20T09:19:06.444" v="2" actId="1076"/>
-          <ac:spMkLst>
-            <pc:docMk/>
-            <pc:sldMk cId="1265867692" sldId="282"/>
-            <ac:spMk id="79" creationId="{00000000-0000-0000-0000-000000000000}"/>
-          </ac:spMkLst>
-        </pc:spChg>
-        <pc:spChg chg="mod">
-          <ac:chgData name="Verma, Sandeep" userId="S::sandverma@deloitte.com::d30842dc-0cf9-420b-8643-a509591151fe" providerId="AD" clId="Web-{CB3B24C3-0CE0-9501-04BE-80FAD9FFB32F}" dt="2023-06-20T09:19:21.038" v="5" actId="1076"/>
-          <ac:spMkLst>
-            <pc:docMk/>
-            <pc:sldMk cId="1265867692" sldId="282"/>
-            <ac:spMk id="80" creationId="{6ADDD7CA-9D33-4DD1-87C0-0D494C642B4E}"/>
-          </ac:spMkLst>
-        </pc:spChg>
-      </pc:sldChg>
-    </pc:docChg>
-  </pc:docChgLst>
-  <pc:docChgLst>
-    <pc:chgData name="Matam, Karthik Kumar" userId="8ba2ca17-c33e-470d-a951-4ec5d393c3c8" providerId="ADAL" clId="{296E2F37-18D7-4F50-8380-FF9BFE889343}"/>
-    <pc:docChg chg="addSld delSld modSld sldOrd">
-      <pc:chgData name="Matam, Karthik Kumar" userId="8ba2ca17-c33e-470d-a951-4ec5d393c3c8" providerId="ADAL" clId="{296E2F37-18D7-4F50-8380-FF9BFE889343}" dt="2023-06-13T13:06:33.149" v="5"/>
-      <pc:docMkLst>
-        <pc:docMk/>
-      </pc:docMkLst>
-      <pc:sldChg chg="add ord">
-        <pc:chgData name="Matam, Karthik Kumar" userId="8ba2ca17-c33e-470d-a951-4ec5d393c3c8" providerId="ADAL" clId="{296E2F37-18D7-4F50-8380-FF9BFE889343}" dt="2023-06-13T13:06:33.149" v="5"/>
-        <pc:sldMkLst>
-          <pc:docMk/>
-          <pc:sldMk cId="1717122797" sldId="797"/>
-        </pc:sldMkLst>
-      </pc:sldChg>
-      <pc:sldChg chg="del">
-        <pc:chgData name="Matam, Karthik Kumar" userId="8ba2ca17-c33e-470d-a951-4ec5d393c3c8" providerId="ADAL" clId="{296E2F37-18D7-4F50-8380-FF9BFE889343}" dt="2023-06-13T13:06:23.217" v="2" actId="2696"/>
-        <pc:sldMkLst>
-          <pc:docMk/>
-          <pc:sldMk cId="2964921621" sldId="797"/>
-        </pc:sldMkLst>
-      </pc:sldChg>
-      <pc:sldChg chg="del">
-        <pc:chgData name="Matam, Karthik Kumar" userId="8ba2ca17-c33e-470d-a951-4ec5d393c3c8" providerId="ADAL" clId="{296E2F37-18D7-4F50-8380-FF9BFE889343}" dt="2023-06-13T13:05:15.478" v="1" actId="47"/>
-        <pc:sldMkLst>
-          <pc:docMk/>
-          <pc:sldMk cId="1749771289" sldId="904"/>
-        </pc:sldMkLst>
-      </pc:sldChg>
-      <pc:sldChg chg="del">
-        <pc:chgData name="Matam, Karthik Kumar" userId="8ba2ca17-c33e-470d-a951-4ec5d393c3c8" providerId="ADAL" clId="{296E2F37-18D7-4F50-8380-FF9BFE889343}" dt="2023-06-13T13:05:04.024" v="0" actId="47"/>
-        <pc:sldMkLst>
-          <pc:docMk/>
-          <pc:sldMk cId="1032245967" sldId="906"/>
-        </pc:sldMkLst>
-      </pc:sldChg>
-      <pc:sldMasterChg chg="delSldLayout">
-        <pc:chgData name="Matam, Karthik Kumar" userId="8ba2ca17-c33e-470d-a951-4ec5d393c3c8" providerId="ADAL" clId="{296E2F37-18D7-4F50-8380-FF9BFE889343}" dt="2023-06-13T13:06:23.217" v="2" actId="2696"/>
-        <pc:sldMasterMkLst>
-          <pc:docMk/>
-          <pc:sldMasterMk cId="0" sldId="2147483648"/>
-        </pc:sldMasterMkLst>
-        <pc:sldLayoutChg chg="del">
-          <pc:chgData name="Matam, Karthik Kumar" userId="8ba2ca17-c33e-470d-a951-4ec5d393c3c8" providerId="ADAL" clId="{296E2F37-18D7-4F50-8380-FF9BFE889343}" dt="2023-06-13T13:06:23.217" v="2" actId="2696"/>
-          <pc:sldLayoutMkLst>
-            <pc:docMk/>
-            <pc:sldMasterMk cId="0" sldId="2147483648"/>
-            <pc:sldLayoutMk cId="3919608582" sldId="2147483763"/>
-          </pc:sldLayoutMkLst>
-        </pc:sldLayoutChg>
-      </pc:sldMasterChg>
-    </pc:docChg>
-  </pc:docChgLst>
-  <pc:docChgLst>
-    <pc:chgData name="Pandey, Divya" userId="S::divyapandey3@deloitte.com::f32c0b42-1b24-41e6-ac2b-9966af6e6075" providerId="AD" clId="Web-{A6AAD112-0D58-3934-9049-FB580C396535}"/>
-    <pc:docChg chg="addSld modSld sldOrd">
-      <pc:chgData name="Pandey, Divya" userId="S::divyapandey3@deloitte.com::f32c0b42-1b24-41e6-ac2b-9966af6e6075" providerId="AD" clId="Web-{A6AAD112-0D58-3934-9049-FB580C396535}" dt="2023-06-19T18:44:25.591" v="97" actId="14100"/>
-      <pc:docMkLst>
-        <pc:docMk/>
-      </pc:docMkLst>
-      <pc:sldChg chg="addSp delSp modSp">
-        <pc:chgData name="Pandey, Divya" userId="S::divyapandey3@deloitte.com::f32c0b42-1b24-41e6-ac2b-9966af6e6075" providerId="AD" clId="Web-{A6AAD112-0D58-3934-9049-FB580C396535}" dt="2023-06-19T18:43:47.152" v="89" actId="1076"/>
-        <pc:sldMkLst>
-          <pc:docMk/>
-          <pc:sldMk cId="3140372417" sldId="887"/>
-        </pc:sldMkLst>
-        <pc:spChg chg="add mod">
-          <ac:chgData name="Pandey, Divya" userId="S::divyapandey3@deloitte.com::f32c0b42-1b24-41e6-ac2b-9966af6e6075" providerId="AD" clId="Web-{A6AAD112-0D58-3934-9049-FB580C396535}" dt="2023-06-19T18:43:47.152" v="89" actId="1076"/>
-          <ac:spMkLst>
-            <pc:docMk/>
-            <pc:sldMk cId="3140372417" sldId="887"/>
-            <ac:spMk id="3" creationId="{8C518021-0B0F-D00E-66DB-C596A00988FD}"/>
-          </ac:spMkLst>
-        </pc:spChg>
-        <pc:spChg chg="mod">
-          <ac:chgData name="Pandey, Divya" userId="S::divyapandey3@deloitte.com::f32c0b42-1b24-41e6-ac2b-9966af6e6075" providerId="AD" clId="Web-{A6AAD112-0D58-3934-9049-FB580C396535}" dt="2023-06-19T18:10:10.348" v="3" actId="20577"/>
-          <ac:spMkLst>
-            <pc:docMk/>
-            <pc:sldMk cId="3140372417" sldId="887"/>
-            <ac:spMk id="6" creationId="{58D2BA1E-0A7F-48DE-94A8-EB9C89B8B228}"/>
-          </ac:spMkLst>
-        </pc:spChg>
-        <pc:spChg chg="mod">
-          <ac:chgData name="Pandey, Divya" userId="S::divyapandey3@deloitte.com::f32c0b42-1b24-41e6-ac2b-9966af6e6075" providerId="AD" clId="Web-{A6AAD112-0D58-3934-9049-FB580C396535}" dt="2023-06-19T18:15:09.512" v="80" actId="1076"/>
-          <ac:spMkLst>
-            <pc:docMk/>
-            <pc:sldMk cId="3140372417" sldId="887"/>
-            <ac:spMk id="9" creationId="{F007B35D-AD4A-4753-B787-6C6A21526FDF}"/>
-          </ac:spMkLst>
-        </pc:spChg>
-        <pc:spChg chg="mod">
-          <ac:chgData name="Pandey, Divya" userId="S::divyapandey3@deloitte.com::f32c0b42-1b24-41e6-ac2b-9966af6e6075" providerId="AD" clId="Web-{A6AAD112-0D58-3934-9049-FB580C396535}" dt="2023-06-19T18:15:25.919" v="82" actId="1076"/>
-          <ac:spMkLst>
-            <pc:docMk/>
-            <pc:sldMk cId="3140372417" sldId="887"/>
-            <ac:spMk id="13" creationId="{35646B25-4F0A-4174-BB22-F706A36E961F}"/>
-          </ac:spMkLst>
-        </pc:spChg>
-        <pc:spChg chg="del mod">
-          <ac:chgData name="Pandey, Divya" userId="S::divyapandey3@deloitte.com::f32c0b42-1b24-41e6-ac2b-9966af6e6075" providerId="AD" clId="Web-{A6AAD112-0D58-3934-9049-FB580C396535}" dt="2023-06-19T18:13:25.369" v="66"/>
-          <ac:spMkLst>
-            <pc:docMk/>
-            <pc:sldMk cId="3140372417" sldId="887"/>
-            <ac:spMk id="14" creationId="{99B0C0E5-9F9F-4546-A910-D9D9D238A8E5}"/>
-          </ac:spMkLst>
-        </pc:spChg>
-        <pc:picChg chg="mod">
-          <ac:chgData name="Pandey, Divya" userId="S::divyapandey3@deloitte.com::f32c0b42-1b24-41e6-ac2b-9966af6e6075" providerId="AD" clId="Web-{A6AAD112-0D58-3934-9049-FB580C396535}" dt="2023-06-19T18:43:32.060" v="86" actId="1076"/>
-          <ac:picMkLst>
-            <pc:docMk/>
-            <pc:sldMk cId="3140372417" sldId="887"/>
-            <ac:picMk id="7" creationId="{26EE033B-4071-4ECD-80DE-B0FB9EFBA73E}"/>
-          </ac:picMkLst>
-        </pc:picChg>
-        <pc:picChg chg="del">
-          <ac:chgData name="Pandey, Divya" userId="S::divyapandey3@deloitte.com::f32c0b42-1b24-41e6-ac2b-9966af6e6075" providerId="AD" clId="Web-{A6AAD112-0D58-3934-9049-FB580C396535}" dt="2023-06-19T18:12:33.336" v="56"/>
-          <ac:picMkLst>
-            <pc:docMk/>
-            <pc:sldMk cId="3140372417" sldId="887"/>
-            <ac:picMk id="17" creationId="{D844DBAB-FE84-415D-B08A-21C887779085}"/>
-          </ac:picMkLst>
-        </pc:picChg>
-        <pc:picChg chg="mod">
-          <ac:chgData name="Pandey, Divya" userId="S::divyapandey3@deloitte.com::f32c0b42-1b24-41e6-ac2b-9966af6e6075" providerId="AD" clId="Web-{A6AAD112-0D58-3934-9049-FB580C396535}" dt="2023-06-19T18:15:17.450" v="81" actId="14100"/>
-          <ac:picMkLst>
-            <pc:docMk/>
-            <pc:sldMk cId="3140372417" sldId="887"/>
-            <ac:picMk id="2051" creationId="{6C5E666D-2DA6-4E51-AD16-B5FEA32AF34F}"/>
-          </ac:picMkLst>
-        </pc:picChg>
-        <pc:picChg chg="mod">
-          <ac:chgData name="Pandey, Divya" userId="S::divyapandey3@deloitte.com::f32c0b42-1b24-41e6-ac2b-9966af6e6075" providerId="AD" clId="Web-{A6AAD112-0D58-3934-9049-FB580C396535}" dt="2023-06-19T18:43:42.761" v="88" actId="14100"/>
-          <ac:picMkLst>
-            <pc:docMk/>
-            <pc:sldMk cId="3140372417" sldId="887"/>
-            <ac:picMk id="2055" creationId="{CC3F4D93-2505-4F32-AC88-C25537A6E3EE}"/>
-          </ac:picMkLst>
-        </pc:picChg>
-      </pc:sldChg>
-      <pc:sldChg chg="delSp modSp add ord replId">
-        <pc:chgData name="Pandey, Divya" userId="S::divyapandey3@deloitte.com::f32c0b42-1b24-41e6-ac2b-9966af6e6075" providerId="AD" clId="Web-{A6AAD112-0D58-3934-9049-FB580C396535}" dt="2023-06-19T18:44:25.591" v="97" actId="14100"/>
-        <pc:sldMkLst>
-          <pc:docMk/>
-          <pc:sldMk cId="3534433074" sldId="904"/>
-        </pc:sldMkLst>
-        <pc:spChg chg="mod">
-          <ac:chgData name="Pandey, Divya" userId="S::divyapandey3@deloitte.com::f32c0b42-1b24-41e6-ac2b-9966af6e6075" providerId="AD" clId="Web-{A6AAD112-0D58-3934-9049-FB580C396535}" dt="2023-06-19T18:43:53.121" v="93" actId="20577"/>
-          <ac:spMkLst>
-            <pc:docMk/>
-            <pc:sldMk cId="3534433074" sldId="904"/>
-            <ac:spMk id="6" creationId="{58D2BA1E-0A7F-48DE-94A8-EB9C89B8B228}"/>
-          </ac:spMkLst>
-        </pc:spChg>
-        <pc:picChg chg="del">
-          <ac:chgData name="Pandey, Divya" userId="S::divyapandey3@deloitte.com::f32c0b42-1b24-41e6-ac2b-9966af6e6075" providerId="AD" clId="Web-{A6AAD112-0D58-3934-9049-FB580C396535}" dt="2023-06-19T18:10:19.754" v="6"/>
-          <ac:picMkLst>
-            <pc:docMk/>
-            <pc:sldMk cId="3534433074" sldId="904"/>
-            <ac:picMk id="7" creationId="{26EE033B-4071-4ECD-80DE-B0FB9EFBA73E}"/>
-          </ac:picMkLst>
-        </pc:picChg>
-        <pc:picChg chg="mod">
-          <ac:chgData name="Pandey, Divya" userId="S::divyapandey3@deloitte.com::f32c0b42-1b24-41e6-ac2b-9966af6e6075" providerId="AD" clId="Web-{A6AAD112-0D58-3934-9049-FB580C396535}" dt="2023-06-19T18:44:25.591" v="97" actId="14100"/>
-          <ac:picMkLst>
-            <pc:docMk/>
-            <pc:sldMk cId="3534433074" sldId="904"/>
-            <ac:picMk id="17" creationId="{D844DBAB-FE84-415D-B08A-21C887779085}"/>
-          </ac:picMkLst>
-        </pc:picChg>
-        <pc:picChg chg="del">
-          <ac:chgData name="Pandey, Divya" userId="S::divyapandey3@deloitte.com::f32c0b42-1b24-41e6-ac2b-9966af6e6075" providerId="AD" clId="Web-{A6AAD112-0D58-3934-9049-FB580C396535}" dt="2023-06-19T18:10:18.051" v="5"/>
-          <ac:picMkLst>
-            <pc:docMk/>
-            <pc:sldMk cId="3534433074" sldId="904"/>
-            <ac:picMk id="2051" creationId="{6C5E666D-2DA6-4E51-AD16-B5FEA32AF34F}"/>
-          </ac:picMkLst>
-        </pc:picChg>
-        <pc:picChg chg="del">
-          <ac:chgData name="Pandey, Divya" userId="S::divyapandey3@deloitte.com::f32c0b42-1b24-41e6-ac2b-9966af6e6075" providerId="AD" clId="Web-{A6AAD112-0D58-3934-9049-FB580C396535}" dt="2023-06-19T18:10:15.973" v="4"/>
-          <ac:picMkLst>
-            <pc:docMk/>
-            <pc:sldMk cId="3534433074" sldId="904"/>
-            <ac:picMk id="2055" creationId="{CC3F4D93-2505-4F32-AC88-C25537A6E3EE}"/>
-          </ac:picMkLst>
-        </pc:picChg>
-      </pc:sldChg>
-    </pc:docChg>
-  </pc:docChgLst>
-  <pc:docChgLst>
-    <pc:chgData name="Zakia, Ismat" userId="S::izakia@deloitte.com::285662d0-8c59-4ce6-b980-f579189dfa53" providerId="AD" clId="Web-{F0F7B942-E51F-0A5A-A26F-AA7119677B25}"/>
-    <pc:docChg chg="modSld">
-      <pc:chgData name="Zakia, Ismat" userId="S::izakia@deloitte.com::285662d0-8c59-4ce6-b980-f579189dfa53" providerId="AD" clId="Web-{F0F7B942-E51F-0A5A-A26F-AA7119677B25}" dt="2024-04-25T16:00:32.555" v="2" actId="20577"/>
-      <pc:docMkLst>
-        <pc:docMk/>
-      </pc:docMkLst>
-      <pc:sldChg chg="modSp">
-        <pc:chgData name="Zakia, Ismat" userId="S::izakia@deloitte.com::285662d0-8c59-4ce6-b980-f579189dfa53" providerId="AD" clId="Web-{F0F7B942-E51F-0A5A-A26F-AA7119677B25}" dt="2024-04-25T16:00:32.555" v="2" actId="20577"/>
-        <pc:sldMkLst>
-          <pc:docMk/>
-          <pc:sldMk cId="567236525" sldId="454"/>
-        </pc:sldMkLst>
-        <pc:spChg chg="mod">
-          <ac:chgData name="Zakia, Ismat" userId="S::izakia@deloitte.com::285662d0-8c59-4ce6-b980-f579189dfa53" providerId="AD" clId="Web-{F0F7B942-E51F-0A5A-A26F-AA7119677B25}" dt="2024-04-25T16:00:32.555" v="2" actId="20577"/>
-          <ac:spMkLst>
-            <pc:docMk/>
-            <pc:sldMk cId="567236525" sldId="454"/>
-            <ac:spMk id="2" creationId="{1B98E482-D930-7FDA-8F48-3C7212E821F1}"/>
-          </ac:spMkLst>
-        </pc:spChg>
-      </pc:sldChg>
-    </pc:docChg>
-  </pc:docChgLst>
-  <pc:docChgLst>
-    <pc:chgData name="Sravya, Chatrathi" userId="S::csravya@deloitte.com::58318501-927c-43d8-be10-860a31b3412c" providerId="AD" clId="Web-{C3BA253A-9B26-A7AA-B2EE-A0CD5C66D92E}"/>
-    <pc:docChg chg="addSld delSld modSld">
-      <pc:chgData name="Sravya, Chatrathi" userId="S::csravya@deloitte.com::58318501-927c-43d8-be10-860a31b3412c" providerId="AD" clId="Web-{C3BA253A-9B26-A7AA-B2EE-A0CD5C66D92E}" dt="2024-07-10T19:02:09.379" v="70" actId="20577"/>
-      <pc:docMkLst>
-        <pc:docMk/>
-      </pc:docMkLst>
-      <pc:sldChg chg="new del">
-        <pc:chgData name="Sravya, Chatrathi" userId="S::csravya@deloitte.com::58318501-927c-43d8-be10-860a31b3412c" providerId="AD" clId="Web-{C3BA253A-9B26-A7AA-B2EE-A0CD5C66D92E}" dt="2024-07-10T18:58:35.762" v="3"/>
-        <pc:sldMkLst>
-          <pc:docMk/>
-          <pc:sldMk cId="3720495260" sldId="899"/>
-        </pc:sldMkLst>
-      </pc:sldChg>
-      <pc:sldChg chg="addSp delSp modSp add">
-        <pc:chgData name="Sravya, Chatrathi" userId="S::csravya@deloitte.com::58318501-927c-43d8-be10-860a31b3412c" providerId="AD" clId="Web-{C3BA253A-9B26-A7AA-B2EE-A0CD5C66D92E}" dt="2024-07-10T19:02:09.379" v="70" actId="20577"/>
-        <pc:sldMkLst>
-          <pc:docMk/>
-          <pc:sldMk cId="3783592704" sldId="901"/>
-        </pc:sldMkLst>
-        <pc:spChg chg="mod">
-          <ac:chgData name="Sravya, Chatrathi" userId="S::csravya@deloitte.com::58318501-927c-43d8-be10-860a31b3412c" providerId="AD" clId="Web-{C3BA253A-9B26-A7AA-B2EE-A0CD5C66D92E}" dt="2024-07-10T19:02:09.379" v="70" actId="20577"/>
-          <ac:spMkLst>
-            <pc:docMk/>
-            <pc:sldMk cId="3783592704" sldId="901"/>
-            <ac:spMk id="8" creationId="{2B8429F9-21CB-4150-B166-DD678050EE26}"/>
-          </ac:spMkLst>
-        </pc:spChg>
-        <pc:picChg chg="add del mod">
-          <ac:chgData name="Sravya, Chatrathi" userId="S::csravya@deloitte.com::58318501-927c-43d8-be10-860a31b3412c" providerId="AD" clId="Web-{C3BA253A-9B26-A7AA-B2EE-A0CD5C66D92E}" dt="2024-07-10T18:59:17.076" v="6"/>
-          <ac:picMkLst>
-            <pc:docMk/>
-            <pc:sldMk cId="3783592704" sldId="901"/>
-            <ac:picMk id="2" creationId="{C4DD6681-3C2D-EF5C-1AB0-D8C69A78FA45}"/>
-          </ac:picMkLst>
-        </pc:picChg>
-      </pc:sldChg>
-      <pc:sldChg chg="add">
-        <pc:chgData name="Sravya, Chatrathi" userId="S::csravya@deloitte.com::58318501-927c-43d8-be10-860a31b3412c" providerId="AD" clId="Web-{C3BA253A-9B26-A7AA-B2EE-A0CD5C66D92E}" dt="2024-07-10T18:58:30.215" v="2"/>
-        <pc:sldMkLst>
-          <pc:docMk/>
-          <pc:sldMk cId="237721766" sldId="902"/>
-        </pc:sldMkLst>
-      </pc:sldChg>
-      <pc:sldChg chg="add">
-        <pc:chgData name="Sravya, Chatrathi" userId="S::csravya@deloitte.com::58318501-927c-43d8-be10-860a31b3412c" providerId="AD" clId="Web-{C3BA253A-9B26-A7AA-B2EE-A0CD5C66D92E}" dt="2024-07-10T18:58:50.700" v="4"/>
-        <pc:sldMkLst>
-          <pc:docMk/>
-          <pc:sldMk cId="1467623519" sldId="903"/>
-        </pc:sldMkLst>
       </pc:sldChg>
     </pc:docChg>
   </pc:docChgLst>
@@ -1348,325 +1120,252 @@
     </pc:docChg>
   </pc:docChgLst>
   <pc:docChgLst>
-    <pc:chgData name="Sravya, Chatrathi" userId="S::csravya@deloitte.com::58318501-927c-43d8-be10-860a31b3412c" providerId="AD" clId="Web-{2C18FCD7-3806-85EE-F87C-192EB5A780A5}"/>
-    <pc:docChg chg="delSld modSld">
-      <pc:chgData name="Sravya, Chatrathi" userId="S::csravya@deloitte.com::58318501-927c-43d8-be10-860a31b3412c" providerId="AD" clId="Web-{2C18FCD7-3806-85EE-F87C-192EB5A780A5}" dt="2024-07-10T19:08:19.816" v="85" actId="14100"/>
+    <pc:chgData name="Pandey, Divya" userId="S::divyapandey3@deloitte.com::f32c0b42-1b24-41e6-ac2b-9966af6e6075" providerId="AD" clId="Web-{A6AAD112-0D58-3934-9049-FB580C396535}"/>
+    <pc:docChg chg="addSld modSld sldOrd">
+      <pc:chgData name="Pandey, Divya" userId="S::divyapandey3@deloitte.com::f32c0b42-1b24-41e6-ac2b-9966af6e6075" providerId="AD" clId="Web-{A6AAD112-0D58-3934-9049-FB580C396535}" dt="2023-06-19T18:44:25.591" v="97" actId="14100"/>
+      <pc:docMkLst>
+        <pc:docMk/>
+      </pc:docMkLst>
+      <pc:sldChg chg="addSp delSp modSp">
+        <pc:chgData name="Pandey, Divya" userId="S::divyapandey3@deloitte.com::f32c0b42-1b24-41e6-ac2b-9966af6e6075" providerId="AD" clId="Web-{A6AAD112-0D58-3934-9049-FB580C396535}" dt="2023-06-19T18:43:47.152" v="89" actId="1076"/>
+        <pc:sldMkLst>
+          <pc:docMk/>
+          <pc:sldMk cId="3140372417" sldId="887"/>
+        </pc:sldMkLst>
+        <pc:spChg chg="add mod">
+          <ac:chgData name="Pandey, Divya" userId="S::divyapandey3@deloitte.com::f32c0b42-1b24-41e6-ac2b-9966af6e6075" providerId="AD" clId="Web-{A6AAD112-0D58-3934-9049-FB580C396535}" dt="2023-06-19T18:43:47.152" v="89" actId="1076"/>
+          <ac:spMkLst>
+            <pc:docMk/>
+            <pc:sldMk cId="3140372417" sldId="887"/>
+            <ac:spMk id="3" creationId="{8C518021-0B0F-D00E-66DB-C596A00988FD}"/>
+          </ac:spMkLst>
+        </pc:spChg>
+        <pc:spChg chg="mod">
+          <ac:chgData name="Pandey, Divya" userId="S::divyapandey3@deloitte.com::f32c0b42-1b24-41e6-ac2b-9966af6e6075" providerId="AD" clId="Web-{A6AAD112-0D58-3934-9049-FB580C396535}" dt="2023-06-19T18:10:10.348" v="3" actId="20577"/>
+          <ac:spMkLst>
+            <pc:docMk/>
+            <pc:sldMk cId="3140372417" sldId="887"/>
+            <ac:spMk id="6" creationId="{58D2BA1E-0A7F-48DE-94A8-EB9C89B8B228}"/>
+          </ac:spMkLst>
+        </pc:spChg>
+        <pc:spChg chg="mod">
+          <ac:chgData name="Pandey, Divya" userId="S::divyapandey3@deloitte.com::f32c0b42-1b24-41e6-ac2b-9966af6e6075" providerId="AD" clId="Web-{A6AAD112-0D58-3934-9049-FB580C396535}" dt="2023-06-19T18:15:09.512" v="80" actId="1076"/>
+          <ac:spMkLst>
+            <pc:docMk/>
+            <pc:sldMk cId="3140372417" sldId="887"/>
+            <ac:spMk id="9" creationId="{F007B35D-AD4A-4753-B787-6C6A21526FDF}"/>
+          </ac:spMkLst>
+        </pc:spChg>
+        <pc:spChg chg="mod">
+          <ac:chgData name="Pandey, Divya" userId="S::divyapandey3@deloitte.com::f32c0b42-1b24-41e6-ac2b-9966af6e6075" providerId="AD" clId="Web-{A6AAD112-0D58-3934-9049-FB580C396535}" dt="2023-06-19T18:15:25.919" v="82" actId="1076"/>
+          <ac:spMkLst>
+            <pc:docMk/>
+            <pc:sldMk cId="3140372417" sldId="887"/>
+            <ac:spMk id="13" creationId="{35646B25-4F0A-4174-BB22-F706A36E961F}"/>
+          </ac:spMkLst>
+        </pc:spChg>
+        <pc:spChg chg="del mod">
+          <ac:chgData name="Pandey, Divya" userId="S::divyapandey3@deloitte.com::f32c0b42-1b24-41e6-ac2b-9966af6e6075" providerId="AD" clId="Web-{A6AAD112-0D58-3934-9049-FB580C396535}" dt="2023-06-19T18:13:25.369" v="66"/>
+          <ac:spMkLst>
+            <pc:docMk/>
+            <pc:sldMk cId="3140372417" sldId="887"/>
+            <ac:spMk id="14" creationId="{99B0C0E5-9F9F-4546-A910-D9D9D238A8E5}"/>
+          </ac:spMkLst>
+        </pc:spChg>
+        <pc:picChg chg="mod">
+          <ac:chgData name="Pandey, Divya" userId="S::divyapandey3@deloitte.com::f32c0b42-1b24-41e6-ac2b-9966af6e6075" providerId="AD" clId="Web-{A6AAD112-0D58-3934-9049-FB580C396535}" dt="2023-06-19T18:43:32.060" v="86" actId="1076"/>
+          <ac:picMkLst>
+            <pc:docMk/>
+            <pc:sldMk cId="3140372417" sldId="887"/>
+            <ac:picMk id="7" creationId="{26EE033B-4071-4ECD-80DE-B0FB9EFBA73E}"/>
+          </ac:picMkLst>
+        </pc:picChg>
+        <pc:picChg chg="del">
+          <ac:chgData name="Pandey, Divya" userId="S::divyapandey3@deloitte.com::f32c0b42-1b24-41e6-ac2b-9966af6e6075" providerId="AD" clId="Web-{A6AAD112-0D58-3934-9049-FB580C396535}" dt="2023-06-19T18:12:33.336" v="56"/>
+          <ac:picMkLst>
+            <pc:docMk/>
+            <pc:sldMk cId="3140372417" sldId="887"/>
+            <ac:picMk id="17" creationId="{D844DBAB-FE84-415D-B08A-21C887779085}"/>
+          </ac:picMkLst>
+        </pc:picChg>
+        <pc:picChg chg="mod">
+          <ac:chgData name="Pandey, Divya" userId="S::divyapandey3@deloitte.com::f32c0b42-1b24-41e6-ac2b-9966af6e6075" providerId="AD" clId="Web-{A6AAD112-0D58-3934-9049-FB580C396535}" dt="2023-06-19T18:15:17.450" v="81" actId="14100"/>
+          <ac:picMkLst>
+            <pc:docMk/>
+            <pc:sldMk cId="3140372417" sldId="887"/>
+            <ac:picMk id="2051" creationId="{6C5E666D-2DA6-4E51-AD16-B5FEA32AF34F}"/>
+          </ac:picMkLst>
+        </pc:picChg>
+        <pc:picChg chg="mod">
+          <ac:chgData name="Pandey, Divya" userId="S::divyapandey3@deloitte.com::f32c0b42-1b24-41e6-ac2b-9966af6e6075" providerId="AD" clId="Web-{A6AAD112-0D58-3934-9049-FB580C396535}" dt="2023-06-19T18:43:42.761" v="88" actId="14100"/>
+          <ac:picMkLst>
+            <pc:docMk/>
+            <pc:sldMk cId="3140372417" sldId="887"/>
+            <ac:picMk id="2055" creationId="{CC3F4D93-2505-4F32-AC88-C25537A6E3EE}"/>
+          </ac:picMkLst>
+        </pc:picChg>
+      </pc:sldChg>
+      <pc:sldChg chg="delSp modSp add ord replId">
+        <pc:chgData name="Pandey, Divya" userId="S::divyapandey3@deloitte.com::f32c0b42-1b24-41e6-ac2b-9966af6e6075" providerId="AD" clId="Web-{A6AAD112-0D58-3934-9049-FB580C396535}" dt="2023-06-19T18:44:25.591" v="97" actId="14100"/>
+        <pc:sldMkLst>
+          <pc:docMk/>
+          <pc:sldMk cId="3534433074" sldId="904"/>
+        </pc:sldMkLst>
+        <pc:spChg chg="mod">
+          <ac:chgData name="Pandey, Divya" userId="S::divyapandey3@deloitte.com::f32c0b42-1b24-41e6-ac2b-9966af6e6075" providerId="AD" clId="Web-{A6AAD112-0D58-3934-9049-FB580C396535}" dt="2023-06-19T18:43:53.121" v="93" actId="20577"/>
+          <ac:spMkLst>
+            <pc:docMk/>
+            <pc:sldMk cId="3534433074" sldId="904"/>
+            <ac:spMk id="6" creationId="{58D2BA1E-0A7F-48DE-94A8-EB9C89B8B228}"/>
+          </ac:spMkLst>
+        </pc:spChg>
+        <pc:picChg chg="del">
+          <ac:chgData name="Pandey, Divya" userId="S::divyapandey3@deloitte.com::f32c0b42-1b24-41e6-ac2b-9966af6e6075" providerId="AD" clId="Web-{A6AAD112-0D58-3934-9049-FB580C396535}" dt="2023-06-19T18:10:19.754" v="6"/>
+          <ac:picMkLst>
+            <pc:docMk/>
+            <pc:sldMk cId="3534433074" sldId="904"/>
+            <ac:picMk id="7" creationId="{26EE033B-4071-4ECD-80DE-B0FB9EFBA73E}"/>
+          </ac:picMkLst>
+        </pc:picChg>
+        <pc:picChg chg="mod">
+          <ac:chgData name="Pandey, Divya" userId="S::divyapandey3@deloitte.com::f32c0b42-1b24-41e6-ac2b-9966af6e6075" providerId="AD" clId="Web-{A6AAD112-0D58-3934-9049-FB580C396535}" dt="2023-06-19T18:44:25.591" v="97" actId="14100"/>
+          <ac:picMkLst>
+            <pc:docMk/>
+            <pc:sldMk cId="3534433074" sldId="904"/>
+            <ac:picMk id="17" creationId="{D844DBAB-FE84-415D-B08A-21C887779085}"/>
+          </ac:picMkLst>
+        </pc:picChg>
+        <pc:picChg chg="del">
+          <ac:chgData name="Pandey, Divya" userId="S::divyapandey3@deloitte.com::f32c0b42-1b24-41e6-ac2b-9966af6e6075" providerId="AD" clId="Web-{A6AAD112-0D58-3934-9049-FB580C396535}" dt="2023-06-19T18:10:18.051" v="5"/>
+          <ac:picMkLst>
+            <pc:docMk/>
+            <pc:sldMk cId="3534433074" sldId="904"/>
+            <ac:picMk id="2051" creationId="{6C5E666D-2DA6-4E51-AD16-B5FEA32AF34F}"/>
+          </ac:picMkLst>
+        </pc:picChg>
+        <pc:picChg chg="del">
+          <ac:chgData name="Pandey, Divya" userId="S::divyapandey3@deloitte.com::f32c0b42-1b24-41e6-ac2b-9966af6e6075" providerId="AD" clId="Web-{A6AAD112-0D58-3934-9049-FB580C396535}" dt="2023-06-19T18:10:15.973" v="4"/>
+          <ac:picMkLst>
+            <pc:docMk/>
+            <pc:sldMk cId="3534433074" sldId="904"/>
+            <ac:picMk id="2055" creationId="{CC3F4D93-2505-4F32-AC88-C25537A6E3EE}"/>
+          </ac:picMkLst>
+        </pc:picChg>
+      </pc:sldChg>
+    </pc:docChg>
+  </pc:docChgLst>
+  <pc:docChgLst>
+    <pc:chgData name="Verma, Sandeep" userId="S::sandverma@deloitte.com::d30842dc-0cf9-420b-8643-a509591151fe" providerId="AD" clId="Web-{CE288D4E-A439-6E19-1EA5-654391DE5B94}"/>
+    <pc:docChg chg="modSld">
+      <pc:chgData name="Verma, Sandeep" userId="S::sandverma@deloitte.com::d30842dc-0cf9-420b-8643-a509591151fe" providerId="AD" clId="Web-{CE288D4E-A439-6E19-1EA5-654391DE5B94}" dt="2023-06-12T19:19:54.641" v="49" actId="1076"/>
       <pc:docMkLst>
         <pc:docMk/>
       </pc:docMkLst>
       <pc:sldChg chg="modSp">
-        <pc:chgData name="Sravya, Chatrathi" userId="S::csravya@deloitte.com::58318501-927c-43d8-be10-860a31b3412c" providerId="AD" clId="Web-{2C18FCD7-3806-85EE-F87C-192EB5A780A5}" dt="2024-07-10T19:08:08.456" v="82" actId="20577"/>
+        <pc:chgData name="Verma, Sandeep" userId="S::sandverma@deloitte.com::d30842dc-0cf9-420b-8643-a509591151fe" providerId="AD" clId="Web-{CE288D4E-A439-6E19-1EA5-654391DE5B94}" dt="2023-06-12T19:18:41.169" v="40" actId="20577"/>
         <pc:sldMkLst>
           <pc:docMk/>
-          <pc:sldMk cId="3783592704" sldId="901"/>
+          <pc:sldMk cId="1257336563" sldId="573"/>
         </pc:sldMkLst>
         <pc:spChg chg="mod">
-          <ac:chgData name="Sravya, Chatrathi" userId="S::csravya@deloitte.com::58318501-927c-43d8-be10-860a31b3412c" providerId="AD" clId="Web-{2C18FCD7-3806-85EE-F87C-192EB5A780A5}" dt="2024-07-10T19:07:02.454" v="64" actId="20577"/>
+          <ac:chgData name="Verma, Sandeep" userId="S::sandverma@deloitte.com::d30842dc-0cf9-420b-8643-a509591151fe" providerId="AD" clId="Web-{CE288D4E-A439-6E19-1EA5-654391DE5B94}" dt="2023-06-12T19:18:41.169" v="40" actId="20577"/>
           <ac:spMkLst>
             <pc:docMk/>
-            <pc:sldMk cId="3783592704" sldId="901"/>
-            <ac:spMk id="3" creationId="{F50552E9-F2F0-4944-9EDE-45F57AC7300D}"/>
+            <pc:sldMk cId="1257336563" sldId="573"/>
+            <ac:spMk id="29" creationId="{1FB1CE05-F2BE-4BA7-820C-09F457EC9757}"/>
+          </ac:spMkLst>
+        </pc:spChg>
+      </pc:sldChg>
+      <pc:sldChg chg="modSp">
+        <pc:chgData name="Verma, Sandeep" userId="S::sandverma@deloitte.com::d30842dc-0cf9-420b-8643-a509591151fe" providerId="AD" clId="Web-{CE288D4E-A439-6E19-1EA5-654391DE5B94}" dt="2023-06-12T19:19:54.641" v="49" actId="1076"/>
+        <pc:sldMkLst>
+          <pc:docMk/>
+          <pc:sldMk cId="3140372417" sldId="887"/>
+        </pc:sldMkLst>
+        <pc:spChg chg="mod">
+          <ac:chgData name="Verma, Sandeep" userId="S::sandverma@deloitte.com::d30842dc-0cf9-420b-8643-a509591151fe" providerId="AD" clId="Web-{CE288D4E-A439-6E19-1EA5-654391DE5B94}" dt="2023-06-12T19:19:54.641" v="49" actId="1076"/>
+          <ac:spMkLst>
+            <pc:docMk/>
+            <pc:sldMk cId="3140372417" sldId="887"/>
+            <ac:spMk id="13" creationId="{35646B25-4F0A-4174-BB22-F706A36E961F}"/>
           </ac:spMkLst>
         </pc:spChg>
         <pc:spChg chg="mod">
-          <ac:chgData name="Sravya, Chatrathi" userId="S::csravya@deloitte.com::58318501-927c-43d8-be10-860a31b3412c" providerId="AD" clId="Web-{2C18FCD7-3806-85EE-F87C-192EB5A780A5}" dt="2024-07-10T19:08:08.456" v="82" actId="20577"/>
+          <ac:chgData name="Verma, Sandeep" userId="S::sandverma@deloitte.com::d30842dc-0cf9-420b-8643-a509591151fe" providerId="AD" clId="Web-{CE288D4E-A439-6E19-1EA5-654391DE5B94}" dt="2023-06-12T19:19:37.609" v="45" actId="1076"/>
           <ac:spMkLst>
             <pc:docMk/>
-            <pc:sldMk cId="3783592704" sldId="901"/>
-            <ac:spMk id="8" creationId="{2B8429F9-21CB-4150-B166-DD678050EE26}"/>
+            <pc:sldMk cId="3140372417" sldId="887"/>
+            <ac:spMk id="14" creationId="{99B0C0E5-9F9F-4546-A910-D9D9D238A8E5}"/>
           </ac:spMkLst>
         </pc:spChg>
-      </pc:sldChg>
-      <pc:sldChg chg="del">
-        <pc:chgData name="Sravya, Chatrathi" userId="S::csravya@deloitte.com::58318501-927c-43d8-be10-860a31b3412c" providerId="AD" clId="Web-{2C18FCD7-3806-85EE-F87C-192EB5A780A5}" dt="2024-07-10T19:04:03.213" v="0"/>
-        <pc:sldMkLst>
-          <pc:docMk/>
-          <pc:sldMk cId="237721766" sldId="902"/>
-        </pc:sldMkLst>
+        <pc:picChg chg="mod">
+          <ac:chgData name="Verma, Sandeep" userId="S::sandverma@deloitte.com::d30842dc-0cf9-420b-8643-a509591151fe" providerId="AD" clId="Web-{CE288D4E-A439-6E19-1EA5-654391DE5B94}" dt="2023-06-12T19:19:51.016" v="48" actId="1076"/>
+          <ac:picMkLst>
+            <pc:docMk/>
+            <pc:sldMk cId="3140372417" sldId="887"/>
+            <ac:picMk id="7" creationId="{26EE033B-4071-4ECD-80DE-B0FB9EFBA73E}"/>
+          </ac:picMkLst>
+        </pc:picChg>
+        <pc:picChg chg="mod">
+          <ac:chgData name="Verma, Sandeep" userId="S::sandverma@deloitte.com::d30842dc-0cf9-420b-8643-a509591151fe" providerId="AD" clId="Web-{CE288D4E-A439-6E19-1EA5-654391DE5B94}" dt="2023-06-12T19:19:23.249" v="42" actId="1076"/>
+          <ac:picMkLst>
+            <pc:docMk/>
+            <pc:sldMk cId="3140372417" sldId="887"/>
+            <ac:picMk id="17" creationId="{D844DBAB-FE84-415D-B08A-21C887779085}"/>
+          </ac:picMkLst>
+        </pc:picChg>
+        <pc:picChg chg="mod">
+          <ac:chgData name="Verma, Sandeep" userId="S::sandverma@deloitte.com::d30842dc-0cf9-420b-8643-a509591151fe" providerId="AD" clId="Web-{CE288D4E-A439-6E19-1EA5-654391DE5B94}" dt="2023-06-12T19:19:45.859" v="47" actId="1076"/>
+          <ac:picMkLst>
+            <pc:docMk/>
+            <pc:sldMk cId="3140372417" sldId="887"/>
+            <ac:picMk id="2051" creationId="{6C5E666D-2DA6-4E51-AD16-B5FEA32AF34F}"/>
+          </ac:picMkLst>
+        </pc:picChg>
+        <pc:picChg chg="mod">
+          <ac:chgData name="Verma, Sandeep" userId="S::sandverma@deloitte.com::d30842dc-0cf9-420b-8643-a509591151fe" providerId="AD" clId="Web-{CE288D4E-A439-6E19-1EA5-654391DE5B94}" dt="2023-06-12T19:19:33.015" v="44" actId="14100"/>
+          <ac:picMkLst>
+            <pc:docMk/>
+            <pc:sldMk cId="3140372417" sldId="887"/>
+            <ac:picMk id="2055" creationId="{CC3F4D93-2505-4F32-AC88-C25537A6E3EE}"/>
+          </ac:picMkLst>
+        </pc:picChg>
       </pc:sldChg>
       <pc:sldChg chg="modSp">
-        <pc:chgData name="Sravya, Chatrathi" userId="S::csravya@deloitte.com::58318501-927c-43d8-be10-860a31b3412c" providerId="AD" clId="Web-{2C18FCD7-3806-85EE-F87C-192EB5A780A5}" dt="2024-07-10T19:08:19.816" v="85" actId="14100"/>
-        <pc:sldMkLst>
-          <pc:docMk/>
-          <pc:sldMk cId="1467623519" sldId="903"/>
-        </pc:sldMkLst>
-        <pc:spChg chg="mod">
-          <ac:chgData name="Sravya, Chatrathi" userId="S::csravya@deloitte.com::58318501-927c-43d8-be10-860a31b3412c" providerId="AD" clId="Web-{2C18FCD7-3806-85EE-F87C-192EB5A780A5}" dt="2024-07-10T19:07:14.189" v="65" actId="20577"/>
-          <ac:spMkLst>
-            <pc:docMk/>
-            <pc:sldMk cId="1467623519" sldId="903"/>
-            <ac:spMk id="3" creationId="{F50552E9-F2F0-4944-9EDE-45F57AC7300D}"/>
-          </ac:spMkLst>
-        </pc:spChg>
-        <pc:spChg chg="mod">
-          <ac:chgData name="Sravya, Chatrathi" userId="S::csravya@deloitte.com::58318501-927c-43d8-be10-860a31b3412c" providerId="AD" clId="Web-{2C18FCD7-3806-85EE-F87C-192EB5A780A5}" dt="2024-07-10T19:08:19.816" v="85" actId="14100"/>
-          <ac:spMkLst>
-            <pc:docMk/>
-            <pc:sldMk cId="1467623519" sldId="903"/>
-            <ac:spMk id="8" creationId="{2B8429F9-21CB-4150-B166-DD678050EE26}"/>
-          </ac:spMkLst>
-        </pc:spChg>
-      </pc:sldChg>
-    </pc:docChg>
-  </pc:docChgLst>
-  <pc:docChgLst>
-    <pc:chgData name="Sravya, Chatrathi" userId="S::csravya@deloitte.com::58318501-927c-43d8-be10-860a31b3412c" providerId="AD" clId="Web-{12023ED9-08AB-8A3F-B92B-EB5DA125BB91}"/>
-    <pc:docChg chg="addSld delSld">
-      <pc:chgData name="Sravya, Chatrathi" userId="S::csravya@deloitte.com::58318501-927c-43d8-be10-860a31b3412c" providerId="AD" clId="Web-{12023ED9-08AB-8A3F-B92B-EB5DA125BB91}" dt="2024-06-03T09:36:43.499" v="1"/>
-      <pc:docMkLst>
-        <pc:docMk/>
-      </pc:docMkLst>
-      <pc:sldChg chg="new del">
-        <pc:chgData name="Sravya, Chatrathi" userId="S::csravya@deloitte.com::58318501-927c-43d8-be10-860a31b3412c" providerId="AD" clId="Web-{12023ED9-08AB-8A3F-B92B-EB5DA125BB91}" dt="2024-06-03T09:36:43.499" v="1"/>
-        <pc:sldMkLst>
-          <pc:docMk/>
-          <pc:sldMk cId="228248603" sldId="899"/>
-        </pc:sldMkLst>
-      </pc:sldChg>
-    </pc:docChg>
-  </pc:docChgLst>
-  <pc:docChgLst>
-    <pc:chgData name="Matam, Karthik Kumar" userId="8ba2ca17-c33e-470d-a951-4ec5d393c3c8" providerId="ADAL" clId="{4E30B0BE-69A9-4053-9F9A-D887C4963FD9}"/>
-    <pc:docChg chg="custSel delSld modSld">
-      <pc:chgData name="Matam, Karthik Kumar" userId="8ba2ca17-c33e-470d-a951-4ec5d393c3c8" providerId="ADAL" clId="{4E30B0BE-69A9-4053-9F9A-D887C4963FD9}" dt="2023-06-07T09:39:35.060" v="30" actId="14734"/>
-      <pc:docMkLst>
-        <pc:docMk/>
-      </pc:docMkLst>
-      <pc:sldChg chg="del">
-        <pc:chgData name="Matam, Karthik Kumar" userId="8ba2ca17-c33e-470d-a951-4ec5d393c3c8" providerId="ADAL" clId="{4E30B0BE-69A9-4053-9F9A-D887C4963FD9}" dt="2023-06-07T09:32:50.124" v="3" actId="47"/>
-        <pc:sldMkLst>
-          <pc:docMk/>
-          <pc:sldMk cId="4233707550" sldId="864"/>
-        </pc:sldMkLst>
-      </pc:sldChg>
-      <pc:sldChg chg="del">
-        <pc:chgData name="Matam, Karthik Kumar" userId="8ba2ca17-c33e-470d-a951-4ec5d393c3c8" providerId="ADAL" clId="{4E30B0BE-69A9-4053-9F9A-D887C4963FD9}" dt="2023-06-07T09:32:56.226" v="7" actId="47"/>
-        <pc:sldMkLst>
-          <pc:docMk/>
-          <pc:sldMk cId="3892241365" sldId="865"/>
-        </pc:sldMkLst>
-      </pc:sldChg>
-      <pc:sldChg chg="del">
-        <pc:chgData name="Matam, Karthik Kumar" userId="8ba2ca17-c33e-470d-a951-4ec5d393c3c8" providerId="ADAL" clId="{4E30B0BE-69A9-4053-9F9A-D887C4963FD9}" dt="2023-06-07T09:32:57.989" v="8" actId="47"/>
-        <pc:sldMkLst>
-          <pc:docMk/>
-          <pc:sldMk cId="277403518" sldId="866"/>
-        </pc:sldMkLst>
-      </pc:sldChg>
-      <pc:sldChg chg="del">
-        <pc:chgData name="Matam, Karthik Kumar" userId="8ba2ca17-c33e-470d-a951-4ec5d393c3c8" providerId="ADAL" clId="{4E30B0BE-69A9-4053-9F9A-D887C4963FD9}" dt="2023-06-07T09:32:51.601" v="5" actId="47"/>
-        <pc:sldMkLst>
-          <pc:docMk/>
-          <pc:sldMk cId="3708139478" sldId="867"/>
-        </pc:sldMkLst>
-      </pc:sldChg>
-      <pc:sldChg chg="del">
-        <pc:chgData name="Matam, Karthik Kumar" userId="8ba2ca17-c33e-470d-a951-4ec5d393c3c8" providerId="ADAL" clId="{4E30B0BE-69A9-4053-9F9A-D887C4963FD9}" dt="2023-06-07T09:32:49.579" v="2" actId="47"/>
-        <pc:sldMkLst>
-          <pc:docMk/>
-          <pc:sldMk cId="2044743389" sldId="868"/>
-        </pc:sldMkLst>
-      </pc:sldChg>
-      <pc:sldChg chg="del">
-        <pc:chgData name="Matam, Karthik Kumar" userId="8ba2ca17-c33e-470d-a951-4ec5d393c3c8" providerId="ADAL" clId="{4E30B0BE-69A9-4053-9F9A-D887C4963FD9}" dt="2023-06-07T09:33:02.411" v="10" actId="47"/>
-        <pc:sldMkLst>
-          <pc:docMk/>
-          <pc:sldMk cId="979310763" sldId="869"/>
-        </pc:sldMkLst>
-      </pc:sldChg>
-      <pc:sldChg chg="del">
-        <pc:chgData name="Matam, Karthik Kumar" userId="8ba2ca17-c33e-470d-a951-4ec5d393c3c8" providerId="ADAL" clId="{4E30B0BE-69A9-4053-9F9A-D887C4963FD9}" dt="2023-06-07T09:33:01.510" v="9" actId="47"/>
-        <pc:sldMkLst>
-          <pc:docMk/>
-          <pc:sldMk cId="101569031" sldId="871"/>
-        </pc:sldMkLst>
-      </pc:sldChg>
-      <pc:sldChg chg="modSp mod">
-        <pc:chgData name="Matam, Karthik Kumar" userId="8ba2ca17-c33e-470d-a951-4ec5d393c3c8" providerId="ADAL" clId="{4E30B0BE-69A9-4053-9F9A-D887C4963FD9}" dt="2023-06-07T09:34:36.271" v="21" actId="20577"/>
-        <pc:sldMkLst>
-          <pc:docMk/>
-          <pc:sldMk cId="1259888063" sldId="889"/>
-        </pc:sldMkLst>
-        <pc:spChg chg="mod">
-          <ac:chgData name="Matam, Karthik Kumar" userId="8ba2ca17-c33e-470d-a951-4ec5d393c3c8" providerId="ADAL" clId="{4E30B0BE-69A9-4053-9F9A-D887C4963FD9}" dt="2023-06-07T09:34:36.271" v="21" actId="20577"/>
-          <ac:spMkLst>
-            <pc:docMk/>
-            <pc:sldMk cId="1259888063" sldId="889"/>
-            <ac:spMk id="6" creationId="{9A40E202-D37F-4FA8-82FB-20DA95C2575A}"/>
-          </ac:spMkLst>
-        </pc:spChg>
-      </pc:sldChg>
-      <pc:sldChg chg="delSp modSp mod">
-        <pc:chgData name="Matam, Karthik Kumar" userId="8ba2ca17-c33e-470d-a951-4ec5d393c3c8" providerId="ADAL" clId="{4E30B0BE-69A9-4053-9F9A-D887C4963FD9}" dt="2023-06-07T09:39:35.060" v="30" actId="14734"/>
+        <pc:chgData name="Verma, Sandeep" userId="S::sandverma@deloitte.com::d30842dc-0cf9-420b-8643-a509591151fe" providerId="AD" clId="Web-{CE288D4E-A439-6E19-1EA5-654391DE5B94}" dt="2023-06-12T19:15:46.989" v="23"/>
         <pc:sldMkLst>
           <pc:docMk/>
           <pc:sldMk cId="1865761104" sldId="890"/>
         </pc:sldMkLst>
-        <pc:spChg chg="mod">
-          <ac:chgData name="Matam, Karthik Kumar" userId="8ba2ca17-c33e-470d-a951-4ec5d393c3c8" providerId="ADAL" clId="{4E30B0BE-69A9-4053-9F9A-D887C4963FD9}" dt="2023-06-07T09:35:13.782" v="26" actId="14100"/>
-          <ac:spMkLst>
-            <pc:docMk/>
-            <pc:sldMk cId="1865761104" sldId="890"/>
-            <ac:spMk id="8" creationId="{00000000-0000-0000-0000-000000000000}"/>
-          </ac:spMkLst>
-        </pc:spChg>
         <pc:graphicFrameChg chg="mod modGraphic">
-          <ac:chgData name="Matam, Karthik Kumar" userId="8ba2ca17-c33e-470d-a951-4ec5d393c3c8" providerId="ADAL" clId="{4E30B0BE-69A9-4053-9F9A-D887C4963FD9}" dt="2023-06-07T09:39:35.060" v="30" actId="14734"/>
+          <ac:chgData name="Verma, Sandeep" userId="S::sandverma@deloitte.com::d30842dc-0cf9-420b-8643-a509591151fe" providerId="AD" clId="Web-{CE288D4E-A439-6E19-1EA5-654391DE5B94}" dt="2023-06-12T19:15:46.989" v="23"/>
           <ac:graphicFrameMkLst>
             <pc:docMk/>
             <pc:sldMk cId="1865761104" sldId="890"/>
             <ac:graphicFrameMk id="2" creationId="{9EEFFC91-3B06-4A4E-8FAA-B6D9FE3DDCAD}"/>
           </ac:graphicFrameMkLst>
         </pc:graphicFrameChg>
-        <pc:inkChg chg="del">
-          <ac:chgData name="Matam, Karthik Kumar" userId="8ba2ca17-c33e-470d-a951-4ec5d393c3c8" providerId="ADAL" clId="{4E30B0BE-69A9-4053-9F9A-D887C4963FD9}" dt="2023-06-07T09:35:03.196" v="23" actId="478"/>
-          <ac:inkMkLst>
-            <pc:docMk/>
-            <pc:sldMk cId="1865761104" sldId="890"/>
-            <ac:inkMk id="3" creationId="{BB29B3B0-FDE2-4614-9A8E-110448D5AC6C}"/>
-          </ac:inkMkLst>
-        </pc:inkChg>
-        <pc:inkChg chg="del">
-          <ac:chgData name="Matam, Karthik Kumar" userId="8ba2ca17-c33e-470d-a951-4ec5d393c3c8" providerId="ADAL" clId="{4E30B0BE-69A9-4053-9F9A-D887C4963FD9}" dt="2023-06-07T09:35:05.306" v="24" actId="478"/>
-          <ac:inkMkLst>
-            <pc:docMk/>
-            <pc:sldMk cId="1865761104" sldId="890"/>
-            <ac:inkMk id="6" creationId="{51DC5748-BF3C-40AD-A1CA-67C51F485FFC}"/>
-          </ac:inkMkLst>
-        </pc:inkChg>
-      </pc:sldChg>
-      <pc:sldChg chg="del">
-        <pc:chgData name="Matam, Karthik Kumar" userId="8ba2ca17-c33e-470d-a951-4ec5d393c3c8" providerId="ADAL" clId="{4E30B0BE-69A9-4053-9F9A-D887C4963FD9}" dt="2023-06-07T09:32:48.859" v="1" actId="47"/>
-        <pc:sldMkLst>
-          <pc:docMk/>
-          <pc:sldMk cId="3625284588" sldId="891"/>
-        </pc:sldMkLst>
-      </pc:sldChg>
-      <pc:sldChg chg="del">
-        <pc:chgData name="Matam, Karthik Kumar" userId="8ba2ca17-c33e-470d-a951-4ec5d393c3c8" providerId="ADAL" clId="{4E30B0BE-69A9-4053-9F9A-D887C4963FD9}" dt="2023-06-07T09:32:50.809" v="4" actId="47"/>
-        <pc:sldMkLst>
-          <pc:docMk/>
-          <pc:sldMk cId="669540159" sldId="892"/>
-        </pc:sldMkLst>
-      </pc:sldChg>
-      <pc:sldChg chg="del">
-        <pc:chgData name="Matam, Karthik Kumar" userId="8ba2ca17-c33e-470d-a951-4ec5d393c3c8" providerId="ADAL" clId="{4E30B0BE-69A9-4053-9F9A-D887C4963FD9}" dt="2023-06-07T09:32:52.443" v="6" actId="47"/>
-        <pc:sldMkLst>
-          <pc:docMk/>
-          <pc:sldMk cId="1345464040" sldId="893"/>
-        </pc:sldMkLst>
-      </pc:sldChg>
-      <pc:sldChg chg="del">
-        <pc:chgData name="Matam, Karthik Kumar" userId="8ba2ca17-c33e-470d-a951-4ec5d393c3c8" providerId="ADAL" clId="{4E30B0BE-69A9-4053-9F9A-D887C4963FD9}" dt="2023-06-07T09:33:03.239" v="11" actId="47"/>
-        <pc:sldMkLst>
-          <pc:docMk/>
-          <pc:sldMk cId="455663281" sldId="894"/>
-        </pc:sldMkLst>
-      </pc:sldChg>
-      <pc:sldChg chg="del">
-        <pc:chgData name="Matam, Karthik Kumar" userId="8ba2ca17-c33e-470d-a951-4ec5d393c3c8" providerId="ADAL" clId="{4E30B0BE-69A9-4053-9F9A-D887C4963FD9}" dt="2023-06-07T09:33:23.984" v="12" actId="47"/>
-        <pc:sldMkLst>
-          <pc:docMk/>
-          <pc:sldMk cId="1116644027" sldId="899"/>
-        </pc:sldMkLst>
-      </pc:sldChg>
-      <pc:sldChg chg="del">
-        <pc:chgData name="Matam, Karthik Kumar" userId="8ba2ca17-c33e-470d-a951-4ec5d393c3c8" providerId="ADAL" clId="{4E30B0BE-69A9-4053-9F9A-D887C4963FD9}" dt="2023-06-07T09:33:26.101" v="13" actId="47"/>
-        <pc:sldMkLst>
-          <pc:docMk/>
-          <pc:sldMk cId="142933786" sldId="900"/>
-        </pc:sldMkLst>
-      </pc:sldChg>
-      <pc:sldChg chg="del">
-        <pc:chgData name="Matam, Karthik Kumar" userId="8ba2ca17-c33e-470d-a951-4ec5d393c3c8" providerId="ADAL" clId="{4E30B0BE-69A9-4053-9F9A-D887C4963FD9}" dt="2023-06-07T09:33:35.534" v="14" actId="47"/>
-        <pc:sldMkLst>
-          <pc:docMk/>
-          <pc:sldMk cId="661034062" sldId="901"/>
-        </pc:sldMkLst>
-      </pc:sldChg>
-    </pc:docChg>
-  </pc:docChgLst>
-  <pc:docChgLst>
-    <pc:chgData name="Pandey, Divya" userId="S::divyapandey3@deloitte.com::f32c0b42-1b24-41e6-ac2b-9966af6e6075" providerId="AD" clId="Web-{1DBC473F-0E99-029A-0BB9-8988050CC67C}"/>
-    <pc:docChg chg="delSld modSld">
-      <pc:chgData name="Pandey, Divya" userId="S::divyapandey3@deloitte.com::f32c0b42-1b24-41e6-ac2b-9966af6e6075" providerId="AD" clId="Web-{1DBC473F-0E99-029A-0BB9-8988050CC67C}" dt="2023-06-21T08:34:19.016" v="13" actId="1076"/>
-      <pc:docMkLst>
-        <pc:docMk/>
-      </pc:docMkLst>
-      <pc:sldChg chg="modSp">
-        <pc:chgData name="Pandey, Divya" userId="S::divyapandey3@deloitte.com::f32c0b42-1b24-41e6-ac2b-9966af6e6075" providerId="AD" clId="Web-{1DBC473F-0E99-029A-0BB9-8988050CC67C}" dt="2023-06-21T08:33:00.623" v="12" actId="20577"/>
-        <pc:sldMkLst>
-          <pc:docMk/>
-          <pc:sldMk cId="1257336563" sldId="573"/>
-        </pc:sldMkLst>
-        <pc:spChg chg="mod">
-          <ac:chgData name="Pandey, Divya" userId="S::divyapandey3@deloitte.com::f32c0b42-1b24-41e6-ac2b-9966af6e6075" providerId="AD" clId="Web-{1DBC473F-0E99-029A-0BB9-8988050CC67C}" dt="2023-06-21T08:33:00.623" v="12" actId="20577"/>
-          <ac:spMkLst>
-            <pc:docMk/>
-            <pc:sldMk cId="1257336563" sldId="573"/>
-            <ac:spMk id="52" creationId="{883BF4F0-1B5D-48E8-A2AA-9FC5239516D7}"/>
-          </ac:spMkLst>
-        </pc:spChg>
       </pc:sldChg>
       <pc:sldChg chg="modSp">
-        <pc:chgData name="Pandey, Divya" userId="S::divyapandey3@deloitte.com::f32c0b42-1b24-41e6-ac2b-9966af6e6075" providerId="AD" clId="Web-{1DBC473F-0E99-029A-0BB9-8988050CC67C}" dt="2023-06-21T08:34:19.016" v="13" actId="1076"/>
-        <pc:sldMkLst>
-          <pc:docMk/>
-          <pc:sldMk cId="3140372417" sldId="887"/>
-        </pc:sldMkLst>
-        <pc:spChg chg="mod">
-          <ac:chgData name="Pandey, Divya" userId="S::divyapandey3@deloitte.com::f32c0b42-1b24-41e6-ac2b-9966af6e6075" providerId="AD" clId="Web-{1DBC473F-0E99-029A-0BB9-8988050CC67C}" dt="2023-06-21T08:34:19.016" v="13" actId="1076"/>
-          <ac:spMkLst>
-            <pc:docMk/>
-            <pc:sldMk cId="3140372417" sldId="887"/>
-            <ac:spMk id="9" creationId="{F007B35D-AD4A-4753-B787-6C6A21526FDF}"/>
-          </ac:spMkLst>
-        </pc:spChg>
-      </pc:sldChg>
-      <pc:sldChg chg="delSp modSp del">
-        <pc:chgData name="Pandey, Divya" userId="S::divyapandey3@deloitte.com::f32c0b42-1b24-41e6-ac2b-9966af6e6075" providerId="AD" clId="Web-{1DBC473F-0E99-029A-0BB9-8988050CC67C}" dt="2023-06-21T08:31:21.855" v="2"/>
+        <pc:chgData name="Verma, Sandeep" userId="S::sandverma@deloitte.com::d30842dc-0cf9-420b-8643-a509591151fe" providerId="AD" clId="Web-{CE288D4E-A439-6E19-1EA5-654391DE5B94}" dt="2023-06-12T19:17:28.931" v="39" actId="1076"/>
         <pc:sldMkLst>
           <pc:docMk/>
           <pc:sldMk cId="1024736671" sldId="903"/>
         </pc:sldMkLst>
-        <pc:spChg chg="del mod">
-          <ac:chgData name="Pandey, Divya" userId="S::divyapandey3@deloitte.com::f32c0b42-1b24-41e6-ac2b-9966af6e6075" providerId="AD" clId="Web-{1DBC473F-0E99-029A-0BB9-8988050CC67C}" dt="2023-06-21T08:31:19.027" v="1"/>
+        <pc:spChg chg="mod">
+          <ac:chgData name="Verma, Sandeep" userId="S::sandverma@deloitte.com::d30842dc-0cf9-420b-8643-a509591151fe" providerId="AD" clId="Web-{CE288D4E-A439-6E19-1EA5-654391DE5B94}" dt="2023-06-12T19:17:28.931" v="39" actId="1076"/>
+          <ac:spMkLst>
+            <pc:docMk/>
+            <pc:sldMk cId="1024736671" sldId="903"/>
+            <ac:spMk id="3" creationId="{668A2922-3DDE-4F25-BFA0-6F9B83541997}"/>
+          </ac:spMkLst>
+        </pc:spChg>
+        <pc:spChg chg="mod">
+          <ac:chgData name="Verma, Sandeep" userId="S::sandverma@deloitte.com::d30842dc-0cf9-420b-8643-a509591151fe" providerId="AD" clId="Web-{CE288D4E-A439-6E19-1EA5-654391DE5B94}" dt="2023-06-12T19:17:18.712" v="37" actId="20577"/>
           <ac:spMkLst>
             <pc:docMk/>
             <pc:sldMk cId="1024736671" sldId="903"/>
             <ac:spMk id="4" creationId="{7E3B52AE-D736-43F6-82B0-7D63C9A40BFE}"/>
-          </ac:spMkLst>
-        </pc:spChg>
-      </pc:sldChg>
-    </pc:docChg>
-  </pc:docChgLst>
-  <pc:docChgLst>
-    <pc:chgData name="Verma, Sandeep" userId="S::sandverma@deloitte.com::d30842dc-0cf9-420b-8643-a509591151fe" providerId="AD" clId="Web-{CD3E3580-98B4-D402-BE03-B05F3D57162B}"/>
-    <pc:docChg chg="modSld sldOrd">
-      <pc:chgData name="Verma, Sandeep" userId="S::sandverma@deloitte.com::d30842dc-0cf9-420b-8643-a509591151fe" providerId="AD" clId="Web-{CD3E3580-98B4-D402-BE03-B05F3D57162B}" dt="2023-07-04T13:06:32.038" v="3" actId="1076"/>
-      <pc:docMkLst>
-        <pc:docMk/>
-      </pc:docMkLst>
-      <pc:sldChg chg="modSp ord">
-        <pc:chgData name="Verma, Sandeep" userId="S::sandverma@deloitte.com::d30842dc-0cf9-420b-8643-a509591151fe" providerId="AD" clId="Web-{CD3E3580-98B4-D402-BE03-B05F3D57162B}" dt="2023-07-04T13:06:32.038" v="3" actId="1076"/>
-        <pc:sldMkLst>
-          <pc:docMk/>
-          <pc:sldMk cId="1265867692" sldId="282"/>
-        </pc:sldMkLst>
-        <pc:spChg chg="mod">
-          <ac:chgData name="Verma, Sandeep" userId="S::sandverma@deloitte.com::d30842dc-0cf9-420b-8643-a509591151fe" providerId="AD" clId="Web-{CD3E3580-98B4-D402-BE03-B05F3D57162B}" dt="2023-07-04T13:06:28.866" v="2" actId="1076"/>
-          <ac:spMkLst>
-            <pc:docMk/>
-            <pc:sldMk cId="1265867692" sldId="282"/>
-            <ac:spMk id="63" creationId="{00000000-0000-0000-0000-000000000000}"/>
-          </ac:spMkLst>
-        </pc:spChg>
-        <pc:spChg chg="mod">
-          <ac:chgData name="Verma, Sandeep" userId="S::sandverma@deloitte.com::d30842dc-0cf9-420b-8643-a509591151fe" providerId="AD" clId="Web-{CD3E3580-98B4-D402-BE03-B05F3D57162B}" dt="2023-07-04T13:06:32.038" v="3" actId="1076"/>
-          <ac:spMkLst>
-            <pc:docMk/>
-            <pc:sldMk cId="1265867692" sldId="282"/>
-            <ac:spMk id="70" creationId="{00000000-0000-0000-0000-000000000000}"/>
           </ac:spMkLst>
         </pc:spChg>
       </pc:sldChg>
@@ -1761,7 +1460,7 @@
               <a:rPr lang="en-US" smtClean="0">
                 <a:latin typeface="Arial" panose="020B0604020202020204" pitchFamily="34" charset="0"/>
               </a:rPr>
-              <a:t>7/18/2024</a:t>
+              <a:t>8/1/2023</a:t>
             </a:fld>
             <a:endParaRPr lang="en-US">
               <a:latin typeface="Arial" panose="020B0604020202020204" pitchFamily="34" charset="0"/>
@@ -1940,7 +1639,7 @@
             <a:fld id="{0BA5BBE4-AEA3-489A-A28E-0C2FAF2506E3}" type="datetimeFigureOut">
               <a:rPr lang="en-US" smtClean="0"/>
               <a:pPr/>
-              <a:t>7/18/2024</a:t>
+              <a:t>8/1/2023</a:t>
             </a:fld>
             <a:endParaRPr lang="en-US"/>
           </a:p>
@@ -2426,7 +2125,7 @@
           </a:bodyPr>
           <a:lstStyle/>
           <a:p>
-            <a:endParaRPr lang="en-US"/>
+            <a:endParaRPr lang="en-US" dirty="0"/>
           </a:p>
         </p:txBody>
       </p:sp>
@@ -2492,7 +2191,7 @@
           <a:bodyPr/>
           <a:lstStyle/>
           <a:p>
-            <a:endParaRPr lang="en-US"/>
+            <a:endParaRPr lang="en-US" dirty="0"/>
           </a:p>
         </p:txBody>
       </p:sp>
@@ -2521,7 +2220,7 @@
               </a:pPr>
               <a:t>4</a:t>
             </a:fld>
-            <a:endParaRPr lang="en-US"/>
+            <a:endParaRPr lang="en-US" dirty="0"/>
           </a:p>
         </p:txBody>
       </p:sp>
@@ -2589,7 +2288,7 @@
           </a:bodyPr>
           <a:lstStyle/>
           <a:p>
-            <a:endParaRPr lang="en-US"/>
+            <a:endParaRPr lang="en-US" dirty="0"/>
           </a:p>
         </p:txBody>
       </p:sp>
@@ -2657,7 +2356,7 @@
           </a:bodyPr>
           <a:lstStyle/>
           <a:p>
-            <a:endParaRPr lang="en-US"/>
+            <a:endParaRPr lang="en-US" dirty="0"/>
           </a:p>
         </p:txBody>
       </p:sp>
@@ -2723,7 +2422,7 @@
           <a:bodyPr/>
           <a:lstStyle/>
           <a:p>
-            <a:endParaRPr lang="en-US"/>
+            <a:endParaRPr lang="en-US" dirty="0"/>
           </a:p>
         </p:txBody>
       </p:sp>
@@ -2752,7 +2451,7 @@
               </a:pPr>
               <a:t>7</a:t>
             </a:fld>
-            <a:endParaRPr lang="en-US"/>
+            <a:endParaRPr lang="en-US" dirty="0"/>
           </a:p>
         </p:txBody>
       </p:sp>
@@ -2818,7 +2517,7 @@
           <a:bodyPr/>
           <a:lstStyle/>
           <a:p>
-            <a:endParaRPr lang="en-US"/>
+            <a:endParaRPr lang="en-US" dirty="0"/>
           </a:p>
         </p:txBody>
       </p:sp>
@@ -2847,7 +2546,7 @@
               </a:pPr>
               <a:t>8</a:t>
             </a:fld>
-            <a:endParaRPr lang="en-US"/>
+            <a:endParaRPr lang="en-US" dirty="0"/>
           </a:p>
         </p:txBody>
       </p:sp>
@@ -23927,7 +23626,7 @@
           <a:p>
             <a:fld id="{1D8BD707-D9CF-40AE-B4C6-C98DA3205C09}" type="datetimeFigureOut">
               <a:rPr lang="en-US"/>
-              <a:t>7/18/2024</a:t>
+              <a:t>8/1/2023</a:t>
             </a:fld>
             <a:endParaRPr lang="en-US"/>
           </a:p>
@@ -24308,7 +24007,7 @@
               </a:spcBef>
             </a:pPr>
             <a:r>
-              <a:rPr lang="en-US" sz="1200">
+              <a:rPr lang="en-US" sz="1200" dirty="0">
                 <a:solidFill>
                   <a:schemeClr val="bg1"/>
                 </a:solidFill>
@@ -24316,14 +24015,14 @@
               <a:t>Co-brand</a:t>
             </a:r>
             <a:br>
-              <a:rPr lang="en-US" sz="1200">
+              <a:rPr lang="en-US" sz="1200" dirty="0">
                 <a:solidFill>
                   <a:schemeClr val="bg1"/>
                 </a:solidFill>
               </a:rPr>
             </a:br>
             <a:r>
-              <a:rPr lang="en-US" sz="1200">
+              <a:rPr lang="en-US" sz="1200" dirty="0">
                 <a:solidFill>
                   <a:schemeClr val="bg1"/>
                 </a:solidFill>
@@ -24332,7 +24031,7 @@
             </a:r>
           </a:p>
           <a:p>
-            <a:endParaRPr lang="en-GB"/>
+            <a:endParaRPr lang="en-GB" dirty="0"/>
           </a:p>
         </p:txBody>
       </p:sp>
@@ -24380,7 +24079,7 @@
               </a:spcBef>
             </a:pPr>
             <a:r>
-              <a:rPr lang="en-US" sz="1200">
+              <a:rPr lang="en-US" sz="1200" dirty="0">
                 <a:solidFill>
                   <a:schemeClr val="bg1"/>
                 </a:solidFill>
@@ -24388,14 +24087,14 @@
               <a:t>Co-brand</a:t>
             </a:r>
             <a:br>
-              <a:rPr lang="en-US" sz="1200">
+              <a:rPr lang="en-US" sz="1200" dirty="0">
                 <a:solidFill>
                   <a:schemeClr val="bg1"/>
                 </a:solidFill>
               </a:rPr>
             </a:br>
             <a:r>
-              <a:rPr lang="en-US" sz="1200">
+              <a:rPr lang="en-US" sz="1200" dirty="0">
                 <a:solidFill>
                   <a:schemeClr val="bg1"/>
                 </a:solidFill>
@@ -24404,7 +24103,7 @@
             </a:r>
           </a:p>
           <a:p>
-            <a:endParaRPr lang="en-GB"/>
+            <a:endParaRPr lang="en-GB" dirty="0"/>
           </a:p>
         </p:txBody>
       </p:sp>
@@ -24452,7 +24151,7 @@
               </a:spcBef>
             </a:pPr>
             <a:r>
-              <a:rPr lang="en-US" sz="1200">
+              <a:rPr lang="en-US" sz="1200" dirty="0">
                 <a:solidFill>
                   <a:schemeClr val="bg1"/>
                 </a:solidFill>
@@ -24460,14 +24159,14 @@
               <a:t>Co-brand</a:t>
             </a:r>
             <a:br>
-              <a:rPr lang="en-US" sz="1200">
+              <a:rPr lang="en-US" sz="1200" dirty="0">
                 <a:solidFill>
                   <a:schemeClr val="bg1"/>
                 </a:solidFill>
               </a:rPr>
             </a:br>
             <a:r>
-              <a:rPr lang="en-US" sz="1200">
+              <a:rPr lang="en-US" sz="1200" dirty="0">
                 <a:solidFill>
                   <a:schemeClr val="bg1"/>
                 </a:solidFill>
@@ -24476,7 +24175,7 @@
             </a:r>
           </a:p>
           <a:p>
-            <a:endParaRPr lang="en-GB"/>
+            <a:endParaRPr lang="en-GB" dirty="0"/>
           </a:p>
         </p:txBody>
       </p:sp>
@@ -24516,7 +24215,7 @@
           <a:p>
             <a:pPr lvl="0"/>
             <a:r>
-              <a:rPr lang="en-US"/>
+              <a:rPr lang="en-US" dirty="0"/>
               <a:t>Click to add subtitle</a:t>
             </a:r>
           </a:p>
@@ -24566,7 +24265,7 @@
               </a:spcBef>
             </a:pPr>
             <a:r>
-              <a:rPr lang="en-US" sz="1200">
+              <a:rPr lang="en-US" sz="1200" dirty="0">
                 <a:solidFill>
                   <a:schemeClr val="bg1"/>
                 </a:solidFill>
@@ -24574,14 +24273,14 @@
               <a:t>Co-brand</a:t>
             </a:r>
             <a:br>
-              <a:rPr lang="en-US" sz="1200">
+              <a:rPr lang="en-US" sz="1200" dirty="0">
                 <a:solidFill>
                   <a:schemeClr val="bg1"/>
                 </a:solidFill>
               </a:rPr>
             </a:br>
             <a:r>
-              <a:rPr lang="en-US" sz="1200">
+              <a:rPr lang="en-US" sz="1200" dirty="0">
                 <a:solidFill>
                   <a:schemeClr val="bg1"/>
                 </a:solidFill>
@@ -24590,7 +24289,7 @@
             </a:r>
           </a:p>
           <a:p>
-            <a:endParaRPr lang="en-GB"/>
+            <a:endParaRPr lang="en-GB" dirty="0"/>
           </a:p>
         </p:txBody>
       </p:sp>
@@ -24668,7 +24367,7 @@
           <a:p>
             <a:pPr lvl="0"/>
             <a:r>
-              <a:rPr lang="en-US"/>
+              <a:rPr lang="en-US" dirty="0"/>
               <a:t>Click to add subtitle</a:t>
             </a:r>
           </a:p>
@@ -24704,7 +24403,7 @@
           </a:lstStyle>
           <a:p>
             <a:r>
-              <a:rPr lang="en-US"/>
+              <a:rPr lang="en-US" dirty="0"/>
               <a:t>Click to add title</a:t>
             </a:r>
           </a:p>
@@ -24796,7 +24495,7 @@
               <a:rPr lang="en-US"/>
               <a:t>Fifth level</a:t>
             </a:r>
-            <a:endParaRPr lang="en-GB"/>
+            <a:endParaRPr lang="en-GB" dirty="0"/>
           </a:p>
         </p:txBody>
       </p:sp>
@@ -24846,7 +24545,7 @@
               </a:pPr>
               <a:t>‹#›</a:t>
             </a:fld>
-            <a:endParaRPr lang="en-US" sz="650" noProof="0">
+            <a:endParaRPr lang="en-US" sz="650" noProof="0" dirty="0">
               <a:solidFill>
                 <a:schemeClr val="tx1"/>
               </a:solidFill>
@@ -27548,20 +27247,20 @@
           <a:p>
             <a:pPr algn="ctr"/>
             <a:r>
-              <a:rPr lang="en-US" sz="3200">
+              <a:rPr lang="en-US" sz="3200" dirty="0">
                 <a:latin typeface="Calibri" panose="020F0502020204030204" pitchFamily="34" charset="0"/>
                 <a:cs typeface="Calibri" panose="020F0502020204030204" pitchFamily="34" charset="0"/>
               </a:rPr>
               <a:t>SAP Build Process Automation</a:t>
             </a:r>
             <a:br>
-              <a:rPr lang="en-US" sz="3200">
+              <a:rPr lang="en-US" sz="3200" dirty="0">
                 <a:latin typeface="Calibri" panose="020F0502020204030204" pitchFamily="34" charset="0"/>
                 <a:cs typeface="Calibri" panose="020F0502020204030204" pitchFamily="34" charset="0"/>
               </a:rPr>
             </a:br>
             <a:r>
-              <a:rPr lang="en-US" sz="3200">
+              <a:rPr lang="en-US" sz="3200" dirty="0">
                 <a:latin typeface="Calibri" panose="020F0502020204030204" pitchFamily="34" charset="0"/>
                 <a:cs typeface="Calibri" panose="020F0502020204030204" pitchFamily="34" charset="0"/>
               </a:rPr>
@@ -27641,717 +27340,6 @@
 </p:sld>
 </file>
 
-<file path=ppt/slides/slide10.xml><?xml version="1.0" encoding="utf-8"?>
-<p:sld xmlns:a="http://schemas.openxmlformats.org/drawingml/2006/main" xmlns:r="http://schemas.openxmlformats.org/officeDocument/2006/relationships" xmlns:p="http://schemas.openxmlformats.org/presentationml/2006/main">
-  <p:cSld>
-    <p:bg>
-      <p:bgPr>
-        <a:solidFill>
-          <a:schemeClr val="tx1"/>
-        </a:solidFill>
-        <a:effectLst/>
-      </p:bgPr>
-    </p:bg>
-    <p:spTree>
-      <p:nvGrpSpPr>
-        <p:cNvPr id="1" name=""/>
-        <p:cNvGrpSpPr/>
-        <p:nvPr/>
-      </p:nvGrpSpPr>
-      <p:grpSpPr>
-        <a:xfrm>
-          <a:off x="0" y="0"/>
-          <a:ext cx="0" cy="0"/>
-          <a:chOff x="0" y="0"/>
-          <a:chExt cx="0" cy="0"/>
-        </a:xfrm>
-      </p:grpSpPr>
-      <p:sp>
-        <p:nvSpPr>
-          <p:cNvPr id="3" name="TextBox 2">
-            <a:extLst>
-              <a:ext uri="{FF2B5EF4-FFF2-40B4-BE49-F238E27FC236}">
-                <a16:creationId xmlns:a16="http://schemas.microsoft.com/office/drawing/2014/main" id="{F50552E9-F2F0-4944-9EDE-45F57AC7300D}"/>
-              </a:ext>
-            </a:extLst>
-          </p:cNvPr>
-          <p:cNvSpPr txBox="1"/>
-          <p:nvPr/>
-        </p:nvSpPr>
-        <p:spPr bwMode="gray">
-          <a:xfrm>
-            <a:off x="0" y="0"/>
-            <a:ext cx="12192000" cy="523220"/>
-          </a:xfrm>
-          <a:prstGeom prst="rect">
-            <a:avLst/>
-          </a:prstGeom>
-          <a:noFill/>
-        </p:spPr>
-        <p:txBody>
-          <a:bodyPr wrap="square" lIns="91440" tIns="45720" rIns="91440" bIns="45720" anchor="t">
-            <a:spAutoFit/>
-          </a:bodyPr>
-          <a:lstStyle/>
-          <a:p>
-            <a:pPr marR="0" lvl="0" algn="ctr" defTabSz="1219170" rtl="0" eaLnBrk="1" fontAlgn="auto" latinLnBrk="0" hangingPunct="1">
-              <a:lnSpc>
-                <a:spcPct val="100000"/>
-              </a:lnSpc>
-              <a:spcBef>
-                <a:spcPts val="0"/>
-              </a:spcBef>
-              <a:spcAft>
-                <a:spcPts val="0"/>
-              </a:spcAft>
-              <a:buClrTx/>
-              <a:buSzTx/>
-              <a:tabLst/>
-              <a:defRPr/>
-            </a:pPr>
-            <a:r>
-              <a:rPr lang="en-US" sz="2800" b="1" kern="1200" dirty="0">
-                <a:solidFill>
-                  <a:schemeClr val="bg1"/>
-                </a:solidFill>
-                <a:latin typeface="Verdana"/>
-                <a:ea typeface="Verdana"/>
-                <a:cs typeface="Calibri"/>
-              </a:rPr>
-              <a:t>Build Process Automation </a:t>
-            </a:r>
-            <a:r>
-              <a:rPr lang="en-US" sz="2800" b="1" dirty="0">
-                <a:solidFill>
-                  <a:schemeClr val="bg1"/>
-                </a:solidFill>
-                <a:latin typeface="Verdana"/>
-                <a:ea typeface="Verdana"/>
-                <a:cs typeface="Calibri"/>
-              </a:rPr>
-              <a:t>Use Case</a:t>
-            </a:r>
-            <a:endParaRPr lang="en-US" sz="2800" b="1" kern="1200" dirty="0">
-              <a:solidFill>
-                <a:schemeClr val="bg1"/>
-              </a:solidFill>
-              <a:latin typeface="Verdana"/>
-              <a:ea typeface="Verdana"/>
-              <a:cs typeface="Calibri"/>
-            </a:endParaRPr>
-          </a:p>
-        </p:txBody>
-      </p:sp>
-      <p:sp>
-        <p:nvSpPr>
-          <p:cNvPr id="8" name="TextBox 7">
-            <a:extLst>
-              <a:ext uri="{FF2B5EF4-FFF2-40B4-BE49-F238E27FC236}">
-                <a16:creationId xmlns:a16="http://schemas.microsoft.com/office/drawing/2014/main" id="{2B8429F9-21CB-4150-B166-DD678050EE26}"/>
-              </a:ext>
-            </a:extLst>
-          </p:cNvPr>
-          <p:cNvSpPr txBox="1"/>
-          <p:nvPr/>
-        </p:nvSpPr>
-        <p:spPr bwMode="gray">
-          <a:xfrm>
-            <a:off x="140047" y="743949"/>
-            <a:ext cx="12192000" cy="5509200"/>
-          </a:xfrm>
-          <a:prstGeom prst="rect">
-            <a:avLst/>
-          </a:prstGeom>
-          <a:noFill/>
-        </p:spPr>
-        <p:txBody>
-          <a:bodyPr wrap="square" lIns="91440" tIns="45720" rIns="91440" bIns="45720" anchor="t">
-            <a:spAutoFit/>
-          </a:bodyPr>
-          <a:lstStyle/>
-          <a:p>
-            <a:r>
-              <a:rPr lang="en-US" sz="1600" b="1" dirty="0">
-                <a:solidFill>
-                  <a:schemeClr val="bg1"/>
-                </a:solidFill>
-                <a:latin typeface="Verdana"/>
-                <a:ea typeface="Calibri"/>
-                <a:cs typeface="Calibri"/>
-              </a:rPr>
-              <a:t>                  GRC Audit Log Archiving process</a:t>
-            </a:r>
-          </a:p>
-          <a:p>
-            <a:endParaRPr lang="en-US" sz="1600" dirty="0">
-              <a:solidFill>
-                <a:schemeClr val="bg1"/>
-              </a:solidFill>
-              <a:latin typeface="Verdana"/>
-              <a:ea typeface="Verdana"/>
-              <a:cs typeface="Calibri" panose="020F0502020204030204" pitchFamily="34" charset="0"/>
-            </a:endParaRPr>
-          </a:p>
-          <a:p>
-            <a:r>
-              <a:rPr lang="en-US" sz="1600" b="1" u="sng" dirty="0">
-                <a:solidFill>
-                  <a:schemeClr val="bg1"/>
-                </a:solidFill>
-                <a:latin typeface="Verdana"/>
-                <a:ea typeface="Calibri"/>
-                <a:cs typeface="Calibri"/>
-              </a:rPr>
-              <a:t>Problem Statement:</a:t>
-            </a:r>
-            <a:r>
-              <a:rPr lang="en-US" sz="1600" b="1" dirty="0">
-                <a:solidFill>
-                  <a:schemeClr val="bg1"/>
-                </a:solidFill>
-                <a:latin typeface="Verdana"/>
-                <a:ea typeface="Calibri"/>
-                <a:cs typeface="Calibri"/>
-              </a:rPr>
-              <a:t> </a:t>
-            </a:r>
-            <a:endParaRPr lang="en-US" sz="1600" b="1" dirty="0">
-              <a:solidFill>
-                <a:schemeClr val="bg1"/>
-              </a:solidFill>
-              <a:latin typeface="Verdana"/>
-              <a:ea typeface="Calibri"/>
-              <a:cs typeface="Calibri" panose="020F0502020204030204" pitchFamily="34" charset="0"/>
-            </a:endParaRPr>
-          </a:p>
-          <a:p>
-            <a:endParaRPr lang="en-US" sz="1600" dirty="0">
-              <a:solidFill>
-                <a:schemeClr val="bg1"/>
-              </a:solidFill>
-              <a:latin typeface="Verdana"/>
-              <a:ea typeface="Verdana"/>
-              <a:cs typeface="Calibri" panose="020F0502020204030204" pitchFamily="34" charset="0"/>
-            </a:endParaRPr>
-          </a:p>
-          <a:p>
-            <a:r>
-              <a:rPr lang="en-US" sz="1600" dirty="0">
-                <a:solidFill>
-                  <a:schemeClr val="bg1"/>
-                </a:solidFill>
-                <a:latin typeface="Verdana"/>
-                <a:ea typeface="Calibri"/>
-                <a:cs typeface="Calibri"/>
-              </a:rPr>
-              <a:t>When a new user is being generated in the GRC system or an existing user is updated in current role, an Audit Log is generated to capture the logs of all the changes done for that user. These logs are an essential source of information during the Audit cycles and hence needs to be archived. During migration process from one system to another, these logs gets lost and are not available in the new system.</a:t>
-            </a:r>
-          </a:p>
-          <a:p>
-            <a:endParaRPr lang="en-US" sz="1600" dirty="0">
-              <a:solidFill>
-                <a:schemeClr val="bg1"/>
-              </a:solidFill>
-              <a:latin typeface="Verdana"/>
-              <a:ea typeface="Verdana"/>
-              <a:cs typeface="Calibri" panose="020F0502020204030204" pitchFamily="34" charset="0"/>
-            </a:endParaRPr>
-          </a:p>
-          <a:p>
-            <a:r>
-              <a:rPr lang="en-US" sz="1600" b="1" u="sng" dirty="0">
-                <a:solidFill>
-                  <a:schemeClr val="bg1"/>
-                </a:solidFill>
-                <a:latin typeface="Verdana"/>
-                <a:ea typeface="Calibri"/>
-                <a:cs typeface="Calibri"/>
-              </a:rPr>
-              <a:t>Solution: </a:t>
-            </a:r>
-            <a:endParaRPr lang="en-US" sz="1600" b="1" u="sng" dirty="0">
-              <a:solidFill>
-                <a:schemeClr val="bg1"/>
-              </a:solidFill>
-              <a:latin typeface="Verdana"/>
-              <a:ea typeface="Calibri"/>
-              <a:cs typeface="Calibri" panose="020F0502020204030204" pitchFamily="34" charset="0"/>
-            </a:endParaRPr>
-          </a:p>
-          <a:p>
-            <a:endParaRPr lang="en-US" sz="1600" dirty="0">
-              <a:solidFill>
-                <a:schemeClr val="bg1"/>
-              </a:solidFill>
-              <a:latin typeface="Verdana"/>
-              <a:ea typeface="Verdana"/>
-              <a:cs typeface="Calibri" panose="020F0502020204030204" pitchFamily="34" charset="0"/>
-            </a:endParaRPr>
-          </a:p>
-          <a:p>
-            <a:r>
-              <a:rPr lang="en-US" sz="1600" dirty="0">
-                <a:solidFill>
-                  <a:schemeClr val="bg1"/>
-                </a:solidFill>
-                <a:latin typeface="Verdana"/>
-                <a:ea typeface="Calibri"/>
-                <a:cs typeface="Calibri"/>
-              </a:rPr>
-              <a:t>To solve this problem, we utilized the automation bot  to fetch all the logs and upload it in the desired folder for future reference. This bot was given an excel sheet as an input file and its own credentials to log in into the SAP system, and then it used to iterate over every user id present in the excel sheet and save the pdf file in the desired location.</a:t>
-            </a:r>
-          </a:p>
-          <a:p>
-            <a:endParaRPr lang="en-US" sz="1600" dirty="0">
-              <a:solidFill>
-                <a:schemeClr val="bg1"/>
-              </a:solidFill>
-              <a:latin typeface="Verdana"/>
-              <a:ea typeface="Verdana"/>
-              <a:cs typeface="Calibri" panose="020F0502020204030204" pitchFamily="34" charset="0"/>
-            </a:endParaRPr>
-          </a:p>
-          <a:p>
-            <a:endParaRPr lang="en-US" sz="1600" dirty="0">
-              <a:solidFill>
-                <a:schemeClr val="bg1"/>
-              </a:solidFill>
-              <a:latin typeface="Verdana"/>
-              <a:ea typeface="Verdana"/>
-              <a:cs typeface="Calibri" panose="020F0502020204030204" pitchFamily="34" charset="0"/>
-            </a:endParaRPr>
-          </a:p>
-          <a:p>
-            <a:r>
-              <a:rPr lang="en-US" sz="1600" b="1" u="sng" dirty="0">
-                <a:solidFill>
-                  <a:schemeClr val="bg1"/>
-                </a:solidFill>
-                <a:latin typeface="Verdana"/>
-                <a:ea typeface="Calibri"/>
-                <a:cs typeface="Calibri"/>
-              </a:rPr>
-              <a:t>Merits:</a:t>
-            </a:r>
-          </a:p>
-          <a:p>
-            <a:endParaRPr lang="en-US" sz="1600" dirty="0">
-              <a:solidFill>
-                <a:schemeClr val="bg1"/>
-              </a:solidFill>
-              <a:latin typeface="Verdana"/>
-              <a:ea typeface="Verdana"/>
-              <a:cs typeface="Calibri" panose="020F0502020204030204" pitchFamily="34" charset="0"/>
-            </a:endParaRPr>
-          </a:p>
-          <a:p>
-            <a:r>
-              <a:rPr lang="en-US" sz="1600" dirty="0">
-                <a:solidFill>
-                  <a:schemeClr val="bg1"/>
-                </a:solidFill>
-                <a:latin typeface="Verdana"/>
-                <a:ea typeface="Verdana"/>
-                <a:cs typeface="Calibri"/>
-              </a:rPr>
-              <a:t>Saved 200 Hours of manual human efforts.</a:t>
-            </a:r>
-          </a:p>
-          <a:p>
-            <a:r>
-              <a:rPr lang="en-US" sz="1600" dirty="0">
-                <a:solidFill>
-                  <a:schemeClr val="bg1"/>
-                </a:solidFill>
-                <a:latin typeface="Verdana"/>
-                <a:ea typeface="Verdana"/>
-                <a:cs typeface="Calibri"/>
-              </a:rPr>
-              <a:t>Reduced the errors while entering the data.</a:t>
-            </a:r>
-          </a:p>
-          <a:p>
-            <a:r>
-              <a:rPr lang="en-US" sz="1600" dirty="0">
-                <a:solidFill>
-                  <a:schemeClr val="bg1"/>
-                </a:solidFill>
-                <a:latin typeface="Verdana"/>
-                <a:ea typeface="Verdana"/>
-                <a:cs typeface="Calibri"/>
-              </a:rPr>
-              <a:t>Efficiency of the process was increased significantly.</a:t>
-            </a:r>
-          </a:p>
-        </p:txBody>
-      </p:sp>
-    </p:spTree>
-    <p:extLst>
-      <p:ext uri="{BB962C8B-B14F-4D97-AF65-F5344CB8AC3E}">
-        <p14:creationId xmlns:p14="http://schemas.microsoft.com/office/powerpoint/2010/main" val="3783592704"/>
-      </p:ext>
-    </p:extLst>
-  </p:cSld>
-  <p:clrMapOvr>
-    <a:masterClrMapping/>
-  </p:clrMapOvr>
-  <p:transition>
-    <p:fade/>
-  </p:transition>
-</p:sld>
-</file>
-
-<file path=ppt/slides/slide11.xml><?xml version="1.0" encoding="utf-8"?>
-<p:sld xmlns:a="http://schemas.openxmlformats.org/drawingml/2006/main" xmlns:r="http://schemas.openxmlformats.org/officeDocument/2006/relationships" xmlns:p="http://schemas.openxmlformats.org/presentationml/2006/main">
-  <p:cSld>
-    <p:bg>
-      <p:bgPr>
-        <a:solidFill>
-          <a:schemeClr val="tx1"/>
-        </a:solidFill>
-        <a:effectLst/>
-      </p:bgPr>
-    </p:bg>
-    <p:spTree>
-      <p:nvGrpSpPr>
-        <p:cNvPr id="1" name=""/>
-        <p:cNvGrpSpPr/>
-        <p:nvPr/>
-      </p:nvGrpSpPr>
-      <p:grpSpPr>
-        <a:xfrm>
-          <a:off x="0" y="0"/>
-          <a:ext cx="0" cy="0"/>
-          <a:chOff x="0" y="0"/>
-          <a:chExt cx="0" cy="0"/>
-        </a:xfrm>
-      </p:grpSpPr>
-      <p:sp>
-        <p:nvSpPr>
-          <p:cNvPr id="3" name="TextBox 2">
-            <a:extLst>
-              <a:ext uri="{FF2B5EF4-FFF2-40B4-BE49-F238E27FC236}">
-                <a16:creationId xmlns:a16="http://schemas.microsoft.com/office/drawing/2014/main" id="{F50552E9-F2F0-4944-9EDE-45F57AC7300D}"/>
-              </a:ext>
-            </a:extLst>
-          </p:cNvPr>
-          <p:cNvSpPr txBox="1"/>
-          <p:nvPr/>
-        </p:nvSpPr>
-        <p:spPr bwMode="gray">
-          <a:xfrm>
-            <a:off x="0" y="0"/>
-            <a:ext cx="12192000" cy="523220"/>
-          </a:xfrm>
-          <a:prstGeom prst="rect">
-            <a:avLst/>
-          </a:prstGeom>
-          <a:noFill/>
-        </p:spPr>
-        <p:txBody>
-          <a:bodyPr wrap="square" lIns="91440" tIns="45720" rIns="91440" bIns="45720" anchor="t">
-            <a:spAutoFit/>
-          </a:bodyPr>
-          <a:lstStyle/>
-          <a:p>
-            <a:pPr algn="ctr">
-              <a:defRPr/>
-            </a:pPr>
-            <a:r>
-              <a:rPr lang="en-US" sz="2800" b="1" dirty="0">
-                <a:solidFill>
-                  <a:schemeClr val="bg1"/>
-                </a:solidFill>
-                <a:latin typeface="Verdana"/>
-                <a:ea typeface="Calibri"/>
-                <a:cs typeface="Calibri"/>
-              </a:rPr>
-              <a:t>BPA Workflow Use Case</a:t>
-            </a:r>
-            <a:endParaRPr lang="en-US" sz="2800" b="1" kern="1200" dirty="0">
-              <a:solidFill>
-                <a:schemeClr val="bg1"/>
-              </a:solidFill>
-              <a:latin typeface="Verdana"/>
-              <a:ea typeface="Calibri"/>
-              <a:cs typeface="Calibri"/>
-            </a:endParaRPr>
-          </a:p>
-        </p:txBody>
-      </p:sp>
-      <p:sp>
-        <p:nvSpPr>
-          <p:cNvPr id="8" name="TextBox 7">
-            <a:extLst>
-              <a:ext uri="{FF2B5EF4-FFF2-40B4-BE49-F238E27FC236}">
-                <a16:creationId xmlns:a16="http://schemas.microsoft.com/office/drawing/2014/main" id="{2B8429F9-21CB-4150-B166-DD678050EE26}"/>
-              </a:ext>
-            </a:extLst>
-          </p:cNvPr>
-          <p:cNvSpPr txBox="1"/>
-          <p:nvPr/>
-        </p:nvSpPr>
-        <p:spPr bwMode="gray">
-          <a:xfrm>
-            <a:off x="140047" y="743949"/>
-            <a:ext cx="12192000" cy="5016758"/>
-          </a:xfrm>
-          <a:prstGeom prst="rect">
-            <a:avLst/>
-          </a:prstGeom>
-          <a:noFill/>
-        </p:spPr>
-        <p:txBody>
-          <a:bodyPr wrap="square" lIns="91440" tIns="45720" rIns="91440" bIns="45720" anchor="t">
-            <a:spAutoFit/>
-          </a:bodyPr>
-          <a:lstStyle/>
-          <a:p>
-            <a:r>
-              <a:rPr lang="en-US" sz="1600" b="1" u="sng" dirty="0">
-                <a:solidFill>
-                  <a:schemeClr val="bg1"/>
-                </a:solidFill>
-              </a:rPr>
-              <a:t>Problem Statement :</a:t>
-            </a:r>
-          </a:p>
-          <a:p>
-            <a:r>
-              <a:rPr lang="en-US" sz="1600" dirty="0">
-                <a:solidFill>
-                  <a:schemeClr val="bg1"/>
-                </a:solidFill>
-              </a:rPr>
-              <a:t>A Material Master governance tool is required to request and create new materials and the modify existing materials with following features.</a:t>
-            </a:r>
-            <a:br>
-              <a:rPr lang="en-US" sz="1600" dirty="0"/>
-            </a:br>
-            <a:r>
-              <a:rPr lang="en-US" sz="1600" dirty="0">
-                <a:solidFill>
-                  <a:schemeClr val="bg1"/>
-                </a:solidFill>
-              </a:rPr>
-              <a:t>1.Request and approval of creation and modification of multiple &amp; single material.</a:t>
-            </a:r>
-            <a:endParaRPr lang="en-US" sz="1600" dirty="0">
-              <a:solidFill>
-                <a:schemeClr val="bg1"/>
-              </a:solidFill>
-              <a:ea typeface="Verdana"/>
-            </a:endParaRPr>
-          </a:p>
-          <a:p>
-            <a:r>
-              <a:rPr lang="en-US" sz="1600" dirty="0">
-                <a:solidFill>
-                  <a:schemeClr val="bg1"/>
-                </a:solidFill>
-              </a:rPr>
-              <a:t>2.Monitoring the status of material creation and modification requests  </a:t>
-            </a:r>
-            <a:br>
-              <a:rPr lang="en-US" sz="1600" dirty="0"/>
-            </a:br>
-            <a:r>
-              <a:rPr lang="en-US" sz="1600" dirty="0">
-                <a:solidFill>
-                  <a:schemeClr val="bg1"/>
-                </a:solidFill>
-              </a:rPr>
-              <a:t>3.Dynamic multilevel approvals on requests. </a:t>
-            </a:r>
-            <a:br>
-              <a:rPr lang="en-US" sz="1600" dirty="0"/>
-            </a:br>
-            <a:r>
-              <a:rPr lang="en-US" sz="1600" dirty="0">
-                <a:solidFill>
-                  <a:schemeClr val="bg1"/>
-                </a:solidFill>
-              </a:rPr>
-              <a:t>4.Creation and modification of materials in SAP (single and multiple)  </a:t>
-            </a:r>
-            <a:br>
-              <a:rPr lang="en-US" sz="1600" dirty="0"/>
-            </a:br>
-            <a:r>
-              <a:rPr lang="en-US" sz="1600" dirty="0">
-                <a:solidFill>
-                  <a:schemeClr val="bg1"/>
-                </a:solidFill>
-              </a:rPr>
-              <a:t>5.Reporting of requests and materials </a:t>
-            </a:r>
-            <a:endParaRPr lang="en-US" sz="1600" dirty="0">
-              <a:solidFill>
-                <a:schemeClr val="bg1"/>
-              </a:solidFill>
-              <a:ea typeface="Verdana"/>
-            </a:endParaRPr>
-          </a:p>
-          <a:p>
-            <a:endParaRPr lang="en-US" sz="1600" dirty="0">
-              <a:solidFill>
-                <a:schemeClr val="bg1"/>
-              </a:solidFill>
-            </a:endParaRPr>
-          </a:p>
-          <a:p>
-            <a:r>
-              <a:rPr lang="en-US" sz="1600" b="1" u="sng" dirty="0">
-                <a:solidFill>
-                  <a:schemeClr val="bg1"/>
-                </a:solidFill>
-              </a:rPr>
-              <a:t>Solution:</a:t>
-            </a:r>
-            <a:br>
-              <a:rPr lang="en-US" sz="1600" b="1" dirty="0">
-                <a:solidFill>
-                  <a:schemeClr val="bg1"/>
-                </a:solidFill>
-                <a:ea typeface="Verdana"/>
-              </a:rPr>
-            </a:br>
-            <a:r>
-              <a:rPr lang="en-US" sz="1600" dirty="0">
-                <a:solidFill>
-                  <a:schemeClr val="bg1"/>
-                </a:solidFill>
-              </a:rPr>
-              <a:t>BPA workflow -</a:t>
-            </a:r>
-            <a:endParaRPr lang="en-US" sz="1600" b="1" dirty="0">
-              <a:solidFill>
-                <a:schemeClr val="bg1"/>
-              </a:solidFill>
-              <a:ea typeface="Verdana"/>
-            </a:endParaRPr>
-          </a:p>
-          <a:p>
-            <a:r>
-              <a:rPr lang="en-US" sz="1600" dirty="0">
-                <a:solidFill>
-                  <a:schemeClr val="bg1"/>
-                </a:solidFill>
-              </a:rPr>
-              <a:t>    1. For dynamic multilevel approvals on requests.</a:t>
-            </a:r>
-            <a:br>
-              <a:rPr lang="en-US" sz="1600" dirty="0">
-                <a:solidFill>
-                  <a:schemeClr val="bg1"/>
-                </a:solidFill>
-                <a:ea typeface="Verdana"/>
-              </a:rPr>
-            </a:br>
-            <a:r>
-              <a:rPr lang="en-US" sz="1600" dirty="0">
-                <a:solidFill>
-                  <a:schemeClr val="bg1"/>
-                </a:solidFill>
-              </a:rPr>
-              <a:t>    2. For updating request details to HANA DB.</a:t>
-            </a:r>
-          </a:p>
-          <a:p>
-            <a:r>
-              <a:rPr lang="en-US" sz="1600" dirty="0">
-                <a:solidFill>
-                  <a:schemeClr val="bg1"/>
-                </a:solidFill>
-                <a:ea typeface="Verdana"/>
-              </a:rPr>
-              <a:t>    3. For Creating/Updating Materials in S4.</a:t>
-            </a:r>
-            <a:br>
-              <a:rPr lang="en-US" sz="1600" dirty="0"/>
-            </a:br>
-            <a:endParaRPr lang="en-US" sz="1600" dirty="0">
-              <a:solidFill>
-                <a:schemeClr val="bg1"/>
-              </a:solidFill>
-              <a:ea typeface="Verdana"/>
-            </a:endParaRPr>
-          </a:p>
-          <a:p>
-            <a:r>
-              <a:rPr lang="en-US" sz="1600" b="1" u="sng" dirty="0">
-                <a:solidFill>
-                  <a:schemeClr val="bg1"/>
-                </a:solidFill>
-              </a:rPr>
-              <a:t>Merits:</a:t>
-            </a:r>
-            <a:br>
-              <a:rPr lang="en-US" sz="1600" dirty="0"/>
-            </a:br>
-            <a:r>
-              <a:rPr lang="en-US" sz="1600" dirty="0">
-                <a:solidFill>
-                  <a:schemeClr val="bg1"/>
-                </a:solidFill>
-              </a:rPr>
-              <a:t>1)Facilitates bulk operations, which is particularly useful for large-scale changes.</a:t>
-            </a:r>
-            <a:br>
-              <a:rPr lang="en-US" sz="1600" dirty="0">
-                <a:solidFill>
-                  <a:schemeClr val="bg1"/>
-                </a:solidFill>
-              </a:rPr>
-            </a:br>
-            <a:r>
-              <a:rPr lang="en-US" sz="1600" dirty="0">
-                <a:solidFill>
-                  <a:schemeClr val="bg1"/>
-                </a:solidFill>
-              </a:rPr>
-              <a:t>2)Utilizing SAP for these operations leverages its robust architecture, ensuring reliability and stability in the handling of material data.</a:t>
-            </a:r>
-            <a:br>
-              <a:rPr lang="en-US" sz="1600" dirty="0">
-                <a:solidFill>
-                  <a:schemeClr val="bg1"/>
-                </a:solidFill>
-              </a:rPr>
-            </a:br>
-            <a:r>
-              <a:rPr lang="en-US" sz="1600" dirty="0">
-                <a:solidFill>
-                  <a:schemeClr val="bg1"/>
-                </a:solidFill>
-              </a:rPr>
-              <a:t>3)Streamlines processes related to material management, saving time and reducing errors.</a:t>
-            </a:r>
-            <a:endParaRPr lang="en-US" sz="1600" dirty="0">
-              <a:solidFill>
-                <a:schemeClr val="bg1"/>
-              </a:solidFill>
-              <a:ea typeface="Verdana"/>
-            </a:endParaRPr>
-          </a:p>
-        </p:txBody>
-      </p:sp>
-    </p:spTree>
-    <p:extLst>
-      <p:ext uri="{BB962C8B-B14F-4D97-AF65-F5344CB8AC3E}">
-        <p14:creationId xmlns:p14="http://schemas.microsoft.com/office/powerpoint/2010/main" val="1467623519"/>
-      </p:ext>
-    </p:extLst>
-  </p:cSld>
-  <p:clrMapOvr>
-    <a:masterClrMapping/>
-  </p:clrMapOvr>
-  <p:transition>
-    <p:fade/>
-  </p:transition>
-</p:sld>
-</file>
-
 <file path=ppt/slides/slide2.xml><?xml version="1.0" encoding="utf-8"?>
 <p:sld xmlns:a="http://schemas.openxmlformats.org/drawingml/2006/main" xmlns:r="http://schemas.openxmlformats.org/officeDocument/2006/relationships" xmlns:p="http://schemas.openxmlformats.org/presentationml/2006/main">
   <p:cSld>
@@ -28385,7 +27373,7 @@
           <a:lstStyle/>
           <a:p>
             <a:r>
-              <a:rPr lang="en-US" sz="3200" b="1">
+              <a:rPr lang="en-US" sz="3200" b="1" dirty="0">
                 <a:latin typeface="Calibri" panose="020F0502020204030204" pitchFamily="34" charset="0"/>
                 <a:cs typeface="Calibri" panose="020F0502020204030204" pitchFamily="34" charset="0"/>
               </a:rPr>
@@ -28408,8 +27396,8 @@
         </p:nvSpPr>
         <p:spPr bwMode="gray">
           <a:xfrm>
-            <a:off x="466426" y="2519331"/>
-            <a:ext cx="3678240" cy="674794"/>
+            <a:off x="487593" y="2847415"/>
+            <a:ext cx="3678240" cy="822960"/>
           </a:xfrm>
           <a:prstGeom prst="homePlate">
             <a:avLst/>
@@ -28442,7 +27430,7 @@
           <a:lstStyle/>
           <a:p>
             <a:r>
-              <a:rPr lang="en-US" sz="1300"/>
+              <a:rPr lang="en-US" sz="1300" dirty="0"/>
               <a:t>Workflows/Business Process in SAP BPA</a:t>
             </a:r>
           </a:p>
@@ -28462,8 +27450,8 @@
         </p:nvSpPr>
         <p:spPr bwMode="gray">
           <a:xfrm>
-            <a:off x="466426" y="3514959"/>
-            <a:ext cx="3678240" cy="685377"/>
+            <a:off x="487593" y="4001792"/>
+            <a:ext cx="3678240" cy="822960"/>
           </a:xfrm>
           <a:prstGeom prst="homePlate">
             <a:avLst/>
@@ -28496,7 +27484,7 @@
           <a:lstStyle/>
           <a:p>
             <a:r>
-              <a:rPr lang="en-US" sz="1300"/>
+              <a:rPr lang="en-US" sz="1300" dirty="0"/>
               <a:t>Process Automation</a:t>
             </a:r>
           </a:p>
@@ -28516,8 +27504,8 @@
         </p:nvSpPr>
         <p:spPr bwMode="gray">
           <a:xfrm>
-            <a:off x="466426" y="4595394"/>
-            <a:ext cx="3678240" cy="685377"/>
+            <a:off x="487593" y="5145727"/>
+            <a:ext cx="3678240" cy="822960"/>
           </a:xfrm>
           <a:prstGeom prst="homePlate">
             <a:avLst/>
@@ -28550,7 +27538,7 @@
           <a:lstStyle/>
           <a:p>
             <a:r>
-              <a:rPr lang="en-US" sz="1300"/>
+              <a:rPr lang="en-US" sz="1300" dirty="0"/>
               <a:t>Trigger and Monitor</a:t>
             </a:r>
           </a:p>
@@ -28570,8 +27558,8 @@
         </p:nvSpPr>
         <p:spPr bwMode="gray">
           <a:xfrm>
-            <a:off x="491038" y="1407371"/>
-            <a:ext cx="3508907" cy="685377"/>
+            <a:off x="469872" y="1661371"/>
+            <a:ext cx="3678240" cy="822960"/>
           </a:xfrm>
           <a:prstGeom prst="homePlate">
             <a:avLst/>
@@ -28604,7 +27592,7 @@
           <a:lstStyle/>
           <a:p>
             <a:r>
-              <a:rPr lang="en-US" sz="1300"/>
+              <a:rPr lang="en-US" sz="1300" dirty="0"/>
               <a:t>Desktop Agent</a:t>
             </a:r>
           </a:p>
@@ -28640,62 +27628,6 @@
           </a:prstGeom>
         </p:spPr>
       </p:pic>
-      <p:sp>
-        <p:nvSpPr>
-          <p:cNvPr id="2" name="Pentagon 27">
-            <a:extLst>
-              <a:ext uri="{FF2B5EF4-FFF2-40B4-BE49-F238E27FC236}">
-                <a16:creationId xmlns:a16="http://schemas.microsoft.com/office/drawing/2014/main" id="{1B98E482-D930-7FDA-8F48-3C7212E821F1}"/>
-              </a:ext>
-            </a:extLst>
-          </p:cNvPr>
-          <p:cNvSpPr/>
-          <p:nvPr/>
-        </p:nvSpPr>
-        <p:spPr bwMode="gray">
-          <a:xfrm>
-            <a:off x="466425" y="5653726"/>
-            <a:ext cx="3678240" cy="685377"/>
-          </a:xfrm>
-          <a:prstGeom prst="homePlate">
-            <a:avLst/>
-          </a:prstGeom>
-          <a:solidFill>
-            <a:schemeClr val="accent1"/>
-          </a:solidFill>
-          <a:ln>
-            <a:noFill/>
-          </a:ln>
-        </p:spPr>
-        <p:style>
-          <a:lnRef idx="2">
-            <a:schemeClr val="accent1">
-              <a:shade val="50000"/>
-            </a:schemeClr>
-          </a:lnRef>
-          <a:fillRef idx="1">
-            <a:schemeClr val="accent1"/>
-          </a:fillRef>
-          <a:effectRef idx="0">
-            <a:schemeClr val="accent1"/>
-          </a:effectRef>
-          <a:fontRef idx="minor">
-            <a:schemeClr val="lt1"/>
-          </a:fontRef>
-        </p:style>
-        <p:txBody>
-          <a:bodyPr lIns="144000" tIns="88900" rIns="88900" bIns="88900" rtlCol="0" anchor="ctr"/>
-          <a:lstStyle/>
-          <a:p>
-            <a:r>
-              <a:rPr lang="en-US" sz="1300" dirty="0">
-                <a:ea typeface="Verdana"/>
-              </a:rPr>
-              <a:t>Work Zone</a:t>
-            </a:r>
-          </a:p>
-        </p:txBody>
-      </p:sp>
     </p:spTree>
     <p:extLst>
       <p:ext uri="{BB962C8B-B14F-4D97-AF65-F5344CB8AC3E}">
@@ -28750,7 +27682,7 @@
           <a:lstStyle/>
           <a:p>
             <a:r>
-              <a:rPr lang="en-GB" sz="1800"/>
+              <a:rPr lang="en-GB" sz="1800" dirty="0"/>
               <a:t>Desktop Agent will be used to connect SAP BTP account to the machine to run and monitor the BOTs developed.</a:t>
             </a:r>
           </a:p>
@@ -28772,7 +27704,7 @@
           <a:lstStyle/>
           <a:p>
             <a:r>
-              <a:rPr lang="en-GB" sz="3200" b="1">
+              <a:rPr lang="en-GB" sz="3200" b="1" dirty="0">
                 <a:latin typeface="Calibri" panose="020F0502020204030204" pitchFamily="34" charset="0"/>
                 <a:cs typeface="Calibri" panose="020F0502020204030204" pitchFamily="34" charset="0"/>
               </a:rPr>
@@ -28804,7 +27736,7 @@
           <a:lstStyle/>
           <a:p>
             <a:r>
-              <a:rPr lang="en-GB" sz="1100" b="1">
+              <a:rPr lang="en-GB" sz="1100" b="1" dirty="0">
                 <a:solidFill>
                   <a:schemeClr val="accent3"/>
                 </a:solidFill>
@@ -28814,7 +27746,7 @@
           </a:p>
           <a:p>
             <a:br>
-              <a:rPr lang="en-US" sz="1000">
+              <a:rPr lang="en-US" sz="1000" dirty="0">
                 <a:solidFill>
                   <a:srgbClr val="00A3E0"/>
                 </a:solidFill>
@@ -28828,7 +27760,7 @@
               </a:rPr>
             </a:br>
             <a:r>
-              <a:rPr lang="en-US" sz="1000">
+              <a:rPr lang="en-US" sz="1000" dirty="0">
                 <a:hlinkClick r:id="rId2">
                   <a:extLst>
                     <a:ext uri="{A12FA001-AC4F-418D-AE19-62706E023703}">
@@ -28839,7 +27771,7 @@
               </a:rPr>
               <a:t>SAP Development Tools (ondemand.com)</a:t>
             </a:r>
-            <a:endParaRPr lang="en-GB" sz="1100"/>
+            <a:endParaRPr lang="en-GB" sz="1100" dirty="0"/>
           </a:p>
         </p:txBody>
       </p:sp>
@@ -28872,7 +27804,7 @@
               <a:buSzPct val="100000"/>
             </a:pPr>
             <a:r>
-              <a:rPr lang="en-GB" sz="3200">
+              <a:rPr lang="en-GB" sz="3200" dirty="0">
                 <a:solidFill>
                   <a:schemeClr val="accent6">
                     <a:lumMod val="60000"/>
@@ -28914,7 +27846,7 @@
               <a:buSzPct val="100000"/>
             </a:pPr>
             <a:r>
-              <a:rPr lang="en-GB" sz="3200">
+              <a:rPr lang="en-GB" sz="3200" dirty="0">
                 <a:solidFill>
                   <a:schemeClr val="accent3"/>
                 </a:solidFill>
@@ -28953,7 +27885,7 @@
               <a:buSzPct val="100000"/>
             </a:pPr>
             <a:r>
-              <a:rPr lang="en-GB" sz="3200">
+              <a:rPr lang="en-GB" sz="3200" dirty="0">
                 <a:solidFill>
                   <a:schemeClr val="accent1">
                     <a:lumMod val="75000"/>
@@ -28988,7 +27920,7 @@
           <a:lstStyle/>
           <a:p>
             <a:r>
-              <a:rPr lang="en-GB" sz="1100" b="1">
+              <a:rPr lang="en-GB" sz="1100" b="1" dirty="0">
                 <a:solidFill>
                   <a:schemeClr val="accent6">
                     <a:lumMod val="60000"/>
@@ -29000,7 +27932,7 @@
             </a:r>
           </a:p>
           <a:p>
-            <a:endParaRPr lang="en-GB" sz="1100" b="1">
+            <a:endParaRPr lang="en-GB" sz="1100" b="1" dirty="0">
               <a:solidFill>
                 <a:schemeClr val="accent2"/>
               </a:solidFill>
@@ -29008,7 +27940,7 @@
           </a:p>
           <a:p>
             <a:r>
-              <a:rPr lang="en-GB" sz="1100">
+              <a:rPr lang="en-GB" sz="1100" dirty="0">
                 <a:solidFill>
                   <a:srgbClr val="53565A"/>
                 </a:solidFill>
@@ -29016,13 +27948,13 @@
               <a:t>Follow the steps in this </a:t>
             </a:r>
             <a:r>
-              <a:rPr lang="en-US" sz="1000">
+              <a:rPr lang="en-US" sz="1000" dirty="0">
                 <a:hlinkClick r:id="rId3"/>
               </a:rPr>
               <a:t>TUTORIAL</a:t>
             </a:r>
             <a:r>
-              <a:rPr lang="en-GB" sz="1100">
+              <a:rPr lang="en-GB" sz="1100" dirty="0">
                 <a:solidFill>
                   <a:srgbClr val="53565A"/>
                 </a:solidFill>
@@ -29055,7 +27987,7 @@
           <a:lstStyle/>
           <a:p>
             <a:r>
-              <a:rPr lang="en-GB" sz="1100" b="1">
+              <a:rPr lang="en-GB" sz="1100" b="1" dirty="0">
                 <a:solidFill>
                   <a:schemeClr val="accent1"/>
                 </a:solidFill>
@@ -29064,7 +27996,7 @@
             </a:r>
           </a:p>
           <a:p>
-            <a:endParaRPr lang="en-GB" sz="1100" b="1">
+            <a:endParaRPr lang="en-GB" sz="1100" b="1" dirty="0">
               <a:solidFill>
                 <a:schemeClr val="accent1"/>
               </a:solidFill>
@@ -29072,7 +28004,7 @@
           </a:p>
           <a:p>
             <a:r>
-              <a:rPr lang="en-GB" sz="1100">
+              <a:rPr lang="en-GB" sz="1100" dirty="0">
                 <a:solidFill>
                   <a:srgbClr val="53565A"/>
                 </a:solidFill>
@@ -29217,7 +28149,7 @@
               <a:buFont typeface="Wingdings 2" pitchFamily="18" charset="2"/>
               <a:buNone/>
             </a:pPr>
-            <a:endParaRPr lang="en-US" sz="1600" b="1">
+            <a:endParaRPr lang="en-US" sz="1600" b="1" dirty="0">
               <a:solidFill>
                 <a:schemeClr val="bg1"/>
               </a:solidFill>
@@ -29266,7 +28198,7 @@
               <a:buFont typeface="Wingdings 2" pitchFamily="18" charset="2"/>
               <a:buNone/>
             </a:pPr>
-            <a:endParaRPr lang="en-US" sz="1600" b="1">
+            <a:endParaRPr lang="en-US" sz="1600" b="1" dirty="0">
               <a:solidFill>
                 <a:schemeClr val="bg1"/>
               </a:solidFill>
@@ -29307,7 +28239,7 @@
               </a:lnSpc>
             </a:pPr>
             <a:r>
-              <a:rPr lang="en-US" sz="2000" b="1">
+              <a:rPr lang="en-US" sz="2000" b="1" dirty="0">
                 <a:solidFill>
                   <a:schemeClr val="tx1"/>
                 </a:solidFill>
@@ -29435,7 +28367,7 @@
           <a:lstStyle/>
           <a:p>
             <a:r>
-              <a:rPr lang="en-US" sz="3200" b="1">
+              <a:rPr lang="en-US" sz="3200" b="1" dirty="0">
                 <a:latin typeface="Calibri" panose="020F0502020204030204" pitchFamily="34" charset="0"/>
                 <a:cs typeface="Calibri" panose="020F0502020204030204" pitchFamily="34" charset="0"/>
               </a:rPr>
@@ -29602,7 +28534,7 @@
               <a:defRPr/>
             </a:pPr>
             <a:r>
-              <a:rPr lang="en-US" altLang="ja-JP" sz="2400">
+              <a:rPr lang="en-US" altLang="ja-JP" sz="2400" dirty="0">
                 <a:solidFill>
                   <a:schemeClr val="bg1"/>
                 </a:solidFill>
@@ -29647,7 +28579,7 @@
               <a:defRPr/>
             </a:pPr>
             <a:r>
-              <a:rPr lang="en-US" altLang="ja-JP">
+              <a:rPr lang="en-US" altLang="ja-JP" dirty="0">
                 <a:solidFill>
                   <a:schemeClr val="accent2"/>
                 </a:solidFill>
@@ -29692,7 +28624,7 @@
               <a:defRPr/>
             </a:pPr>
             <a:r>
-              <a:rPr lang="en-US" altLang="ja-JP">
+              <a:rPr lang="en-US" altLang="ja-JP" dirty="0">
                 <a:solidFill>
                   <a:schemeClr val="accent2"/>
                 </a:solidFill>
@@ -29737,7 +28669,7 @@
               <a:defRPr/>
             </a:pPr>
             <a:r>
-              <a:rPr lang="en-US" altLang="ja-JP">
+              <a:rPr lang="en-US" altLang="ja-JP" dirty="0">
                 <a:solidFill>
                   <a:schemeClr val="accent2"/>
                 </a:solidFill>
@@ -29782,7 +28714,7 @@
               <a:defRPr/>
             </a:pPr>
             <a:r>
-              <a:rPr lang="en-US" altLang="ja-JP">
+              <a:rPr lang="en-US" altLang="ja-JP" dirty="0">
                 <a:solidFill>
                   <a:schemeClr val="accent2"/>
                 </a:solidFill>
@@ -29991,7 +28923,7 @@
           <a:lstStyle/>
           <a:p>
             <a:r>
-              <a:rPr lang="en-US"/>
+              <a:rPr lang="en-US" dirty="0"/>
               <a:t>Tools available for Workflow Business Processes</a:t>
             </a:r>
           </a:p>
@@ -30018,7 +28950,7 @@
           <a:lstStyle/>
           <a:p>
             <a:r>
-              <a:rPr lang="en-US"/>
+              <a:rPr lang="en-US" dirty="0"/>
               <a:t>For any Automation/Process below tools can be utilized to enhance the workflow/process.</a:t>
             </a:r>
           </a:p>
@@ -30087,7 +29019,7 @@
                         <a:defRPr/>
                       </a:pPr>
                       <a:r>
-                        <a:rPr kumimoji="0" lang="en-US" sz="1600" b="1" i="0" u="none" strike="noStrike" kern="1200" cap="none" spc="0" normalizeH="0" baseline="0" noProof="0">
+                        <a:rPr kumimoji="0" lang="en-US" sz="1600" b="1" i="0" u="none" strike="noStrike" kern="1200" cap="none" spc="0" normalizeH="0" baseline="0" noProof="0" dirty="0">
                           <a:ln>
                             <a:noFill/>
                           </a:ln>
@@ -30123,7 +29055,7 @@
                         <a:defRPr/>
                       </a:pPr>
                       <a:r>
-                        <a:rPr kumimoji="0" lang="en-US" sz="1300" b="0" i="0" u="none" strike="noStrike" kern="1200" cap="none" spc="0" normalizeH="0" baseline="0" noProof="0">
+                        <a:rPr kumimoji="0" lang="en-US" sz="1300" b="0" i="0" u="none" strike="noStrike" kern="1200" cap="none" spc="0" normalizeH="0" baseline="0" noProof="0" dirty="0">
                           <a:ln>
                             <a:noFill/>
                           </a:ln>
@@ -30159,7 +29091,7 @@
                         <a:defRPr/>
                       </a:pPr>
                       <a:r>
-                        <a:rPr kumimoji="0" lang="en-US" sz="1300" b="1" i="0" u="none" strike="noStrike" kern="1200" cap="none" spc="0" normalizeH="0" baseline="0" noProof="0">
+                        <a:rPr kumimoji="0" lang="en-US" sz="1300" b="1" i="0" u="none" strike="noStrike" kern="1200" cap="none" spc="0" normalizeH="0" baseline="0" noProof="0" dirty="0">
                           <a:ln>
                             <a:noFill/>
                           </a:ln>
@@ -30195,7 +29127,7 @@
                         <a:defRPr/>
                       </a:pPr>
                       <a:r>
-                        <a:rPr kumimoji="0" lang="en-US" sz="1300" b="0" i="0" u="none" strike="noStrike" kern="1200" cap="none" spc="0" normalizeH="0" baseline="0" noProof="0">
+                        <a:rPr kumimoji="0" lang="en-US" sz="1300" b="0" i="0" u="none" strike="noStrike" kern="1200" cap="none" spc="0" normalizeH="0" baseline="0" noProof="0" dirty="0">
                           <a:ln>
                             <a:noFill/>
                           </a:ln>
@@ -30231,7 +29163,7 @@
                         <a:defRPr/>
                       </a:pPr>
                       <a:r>
-                        <a:rPr kumimoji="0" lang="en-US" sz="1300" b="0" i="0" u="none" strike="noStrike" kern="1200" cap="none" spc="0" normalizeH="0" baseline="0" noProof="0">
+                        <a:rPr kumimoji="0" lang="en-US" sz="1300" b="0" i="0" u="none" strike="noStrike" kern="1200" cap="none" spc="0" normalizeH="0" baseline="0" noProof="0" dirty="0">
                           <a:ln>
                             <a:noFill/>
                           </a:ln>
@@ -30247,7 +29179,7 @@
                         </a:rPr>
                         <a:t>Can be debugged on the way by viewing the timeline</a:t>
                       </a:r>
-                      <a:endParaRPr kumimoji="0" lang="en-US" sz="1300" b="1" i="0" u="none" strike="noStrike" kern="1200" cap="none" spc="0" normalizeH="0" baseline="0" noProof="0">
+                      <a:endParaRPr kumimoji="0" lang="en-US" sz="1300" b="1" i="0" u="none" strike="noStrike" kern="1200" cap="none" spc="0" normalizeH="0" baseline="0" noProof="0" dirty="0">
                         <a:ln>
                           <a:noFill/>
                         </a:ln>
@@ -30370,7 +29302,7 @@
                         <a:defRPr/>
                       </a:pPr>
                       <a:r>
-                        <a:rPr kumimoji="0" lang="en-US" sz="1600" b="1" i="0" u="none" strike="noStrike" kern="1200" cap="none" spc="0" normalizeH="0" baseline="0" noProof="0">
+                        <a:rPr kumimoji="0" lang="en-US" sz="1600" b="1" i="0" u="none" strike="noStrike" kern="1200" cap="none" spc="0" normalizeH="0" baseline="0" noProof="0" dirty="0">
                           <a:ln>
                             <a:noFill/>
                           </a:ln>
@@ -30406,7 +29338,7 @@
                         <a:defRPr/>
                       </a:pPr>
                       <a:r>
-                        <a:rPr kumimoji="0" lang="en-US" sz="1300" b="0" i="0" u="none" strike="noStrike" kern="1200" cap="none" spc="0" normalizeH="0" baseline="0" noProof="0">
+                        <a:rPr kumimoji="0" lang="en-US" sz="1300" b="0" i="0" u="none" strike="noStrike" kern="1200" cap="none" spc="0" normalizeH="0" baseline="0" noProof="0" dirty="0">
                           <a:ln>
                             <a:noFill/>
                           </a:ln>
@@ -30442,7 +29374,7 @@
                         <a:defRPr/>
                       </a:pPr>
                       <a:r>
-                        <a:rPr kumimoji="0" lang="en-US" sz="1300" b="1" i="0" u="none" strike="noStrike" kern="1200" cap="none" spc="0" normalizeH="0" baseline="0" noProof="0">
+                        <a:rPr kumimoji="0" lang="en-US" sz="1300" b="1" i="0" u="none" strike="noStrike" kern="1200" cap="none" spc="0" normalizeH="0" baseline="0" noProof="0" dirty="0">
                           <a:ln>
                             <a:noFill/>
                           </a:ln>
@@ -30478,7 +29410,7 @@
                         <a:defRPr/>
                       </a:pPr>
                       <a:r>
-                        <a:rPr kumimoji="0" lang="en-US" sz="1300" b="0" i="0" u="none" strike="noStrike" kern="1200" cap="none" spc="0" normalizeH="0" baseline="0" noProof="0">
+                        <a:rPr kumimoji="0" lang="en-US" sz="1300" b="0" i="0" u="none" strike="noStrike" kern="1200" cap="none" spc="0" normalizeH="0" baseline="0" noProof="0" dirty="0">
                           <a:ln>
                             <a:noFill/>
                           </a:ln>
@@ -30514,7 +29446,7 @@
                         <a:defRPr/>
                       </a:pPr>
                       <a:r>
-                        <a:rPr kumimoji="0" lang="en-US" sz="1300" b="0" i="0" u="none" strike="noStrike" kern="1200" cap="none" spc="0" normalizeH="0" baseline="0" noProof="0">
+                        <a:rPr kumimoji="0" lang="en-US" sz="1300" b="0" i="0" u="none" strike="noStrike" kern="1200" cap="none" spc="0" normalizeH="0" baseline="0" noProof="0" dirty="0">
                           <a:ln>
                             <a:noFill/>
                           </a:ln>
@@ -30550,7 +29482,7 @@
                         <a:defRPr/>
                       </a:pPr>
                       <a:r>
-                        <a:rPr kumimoji="0" lang="en-US" sz="1300" b="0" i="0" u="none" strike="noStrike" kern="1200" cap="none" spc="0" normalizeH="0" baseline="0" noProof="0">
+                        <a:rPr kumimoji="0" lang="en-US" sz="1300" b="0" i="0" u="none" strike="noStrike" kern="1200" cap="none" spc="0" normalizeH="0" baseline="0" noProof="0" dirty="0">
                           <a:ln>
                             <a:noFill/>
                           </a:ln>
@@ -30566,7 +29498,7 @@
                         </a:rPr>
                         <a:t>Used to trigger different flow as per approval/rejection</a:t>
                       </a:r>
-                      <a:endParaRPr kumimoji="0" lang="en-US" sz="1300" b="1" i="0" u="none" strike="noStrike" kern="1200" cap="none" spc="0" normalizeH="0" baseline="0" noProof="0">
+                      <a:endParaRPr kumimoji="0" lang="en-US" sz="1300" b="1" i="0" u="none" strike="noStrike" kern="1200" cap="none" spc="0" normalizeH="0" baseline="0" noProof="0" dirty="0">
                         <a:ln>
                           <a:noFill/>
                         </a:ln>
@@ -30689,7 +29621,7 @@
                         <a:defRPr/>
                       </a:pPr>
                       <a:r>
-                        <a:rPr kumimoji="0" lang="en-US" sz="1600" b="1" i="0" u="none" strike="noStrike" kern="1200" cap="none" spc="0" normalizeH="0" baseline="0" noProof="0">
+                        <a:rPr kumimoji="0" lang="en-US" sz="1600" b="1" i="0" u="none" strike="noStrike" kern="1200" cap="none" spc="0" normalizeH="0" baseline="0" noProof="0" dirty="0">
                           <a:ln>
                             <a:noFill/>
                           </a:ln>
@@ -30725,7 +29657,7 @@
                         <a:defRPr/>
                       </a:pPr>
                       <a:r>
-                        <a:rPr kumimoji="0" lang="en-US" sz="1300" b="0" i="0" u="none" strike="noStrike" kern="1200" cap="none" spc="0" normalizeH="0" baseline="0" noProof="0">
+                        <a:rPr kumimoji="0" lang="en-US" sz="1300" b="0" i="0" u="none" strike="noStrike" kern="1200" cap="none" spc="0" normalizeH="0" baseline="0" noProof="0" dirty="0">
                           <a:ln>
                             <a:noFill/>
                           </a:ln>
@@ -30761,7 +29693,7 @@
                         <a:defRPr/>
                       </a:pPr>
                       <a:r>
-                        <a:rPr kumimoji="0" lang="en-US" sz="1300" b="1" i="0" u="none" strike="noStrike" kern="1200" cap="none" spc="0" normalizeH="0" baseline="0" noProof="0">
+                        <a:rPr kumimoji="0" lang="en-US" sz="1300" b="1" i="0" u="none" strike="noStrike" kern="1200" cap="none" spc="0" normalizeH="0" baseline="0" noProof="0" dirty="0">
                           <a:ln>
                             <a:noFill/>
                           </a:ln>
@@ -30797,7 +29729,7 @@
                         <a:defRPr/>
                       </a:pPr>
                       <a:r>
-                        <a:rPr kumimoji="0" lang="en-US" sz="1300" b="0" i="0" u="none" strike="noStrike" kern="1200" cap="none" spc="0" normalizeH="0" baseline="0" noProof="0">
+                        <a:rPr kumimoji="0" lang="en-US" sz="1300" b="0" i="0" u="none" strike="noStrike" kern="1200" cap="none" spc="0" normalizeH="0" baseline="0" noProof="0" dirty="0">
                           <a:ln>
                             <a:noFill/>
                           </a:ln>
@@ -30833,7 +29765,7 @@
                         <a:defRPr/>
                       </a:pPr>
                       <a:r>
-                        <a:rPr kumimoji="0" lang="en-US" sz="1300" b="0" i="0" u="none" strike="noStrike" kern="1200" cap="none" spc="0" normalizeH="0" baseline="0">
+                        <a:rPr kumimoji="0" lang="en-US" sz="1300" b="0" i="0" u="none" strike="noStrike" kern="1200" cap="none" spc="0" normalizeH="0" baseline="0" dirty="0">
                           <a:ln>
                             <a:noFill/>
                           </a:ln>
@@ -30850,7 +29782,7 @@
                         <a:t>Create a decision to determine approvers who will be authorized to approve sales order based on complex rules.</a:t>
                       </a:r>
                       <a:r>
-                        <a:rPr kumimoji="0" lang="en-US" sz="1300" b="0" i="0" u="none" strike="noStrike" kern="1200" cap="none" spc="0" normalizeH="0" baseline="0" noProof="0">
+                        <a:rPr kumimoji="0" lang="en-US" sz="1300" b="0" i="0" u="none" strike="noStrike" kern="1200" cap="none" spc="0" normalizeH="0" baseline="0" noProof="0" dirty="0">
                           <a:ln>
                             <a:noFill/>
                           </a:ln>
@@ -30866,7 +29798,7 @@
                         </a:rPr>
                         <a:t> </a:t>
                       </a:r>
-                      <a:endParaRPr kumimoji="0" lang="en-US" sz="1300" b="1" i="0" u="none" strike="noStrike" kern="1200" cap="none" spc="0" normalizeH="0" baseline="0" noProof="0">
+                      <a:endParaRPr kumimoji="0" lang="en-US" sz="1300" b="1" i="0" u="none" strike="noStrike" kern="1200" cap="none" spc="0" normalizeH="0" baseline="0" noProof="0" dirty="0">
                         <a:ln>
                           <a:noFill/>
                         </a:ln>
@@ -30989,7 +29921,7 @@
                         <a:defRPr/>
                       </a:pPr>
                       <a:r>
-                        <a:rPr kumimoji="0" lang="en-US" sz="1600" b="1" i="0" u="none" strike="noStrike" kern="1200" cap="none" spc="0" normalizeH="0" baseline="0" noProof="0">
+                        <a:rPr kumimoji="0" lang="en-US" sz="1600" b="1" i="0" u="none" strike="noStrike" kern="1200" cap="none" spc="0" normalizeH="0" baseline="0" noProof="0" dirty="0">
                           <a:ln>
                             <a:noFill/>
                           </a:ln>
@@ -31025,7 +29957,7 @@
                         <a:defRPr/>
                       </a:pPr>
                       <a:r>
-                        <a:rPr kumimoji="0" lang="en-US" sz="1300" b="0" i="0" u="none" strike="noStrike" kern="1200" cap="none" spc="0" normalizeH="0" baseline="0" noProof="0">
+                        <a:rPr kumimoji="0" lang="en-US" sz="1300" b="0" i="0" u="none" strike="noStrike" kern="1200" cap="none" spc="0" normalizeH="0" baseline="0" noProof="0" dirty="0">
                           <a:ln>
                             <a:noFill/>
                           </a:ln>
@@ -31061,7 +29993,7 @@
                         <a:defRPr/>
                       </a:pPr>
                       <a:r>
-                        <a:rPr kumimoji="0" lang="en-US" sz="1300" b="1" i="0" u="none" strike="noStrike" kern="1200" cap="none" spc="0" normalizeH="0" baseline="0" noProof="0">
+                        <a:rPr kumimoji="0" lang="en-US" sz="1300" b="1" i="0" u="none" strike="noStrike" kern="1200" cap="none" spc="0" normalizeH="0" baseline="0" noProof="0" dirty="0">
                           <a:ln>
                             <a:noFill/>
                           </a:ln>
@@ -31097,7 +30029,7 @@
                         <a:defRPr/>
                       </a:pPr>
                       <a:r>
-                        <a:rPr kumimoji="0" lang="en-US" sz="1300" b="0" i="0" u="none" strike="noStrike" kern="1200" cap="none" spc="0" normalizeH="0" baseline="0" noProof="0">
+                        <a:rPr kumimoji="0" lang="en-US" sz="1300" b="0" i="0" u="none" strike="noStrike" kern="1200" cap="none" spc="0" normalizeH="0" baseline="0" noProof="0" dirty="0">
                           <a:ln>
                             <a:noFill/>
                           </a:ln>
@@ -31133,7 +30065,7 @@
                         <a:defRPr/>
                       </a:pPr>
                       <a:r>
-                        <a:rPr kumimoji="0" lang="en-US" sz="1300" b="0" i="0" u="none" strike="noStrike" kern="1200" cap="none" spc="0" normalizeH="0" baseline="0" noProof="0">
+                        <a:rPr kumimoji="0" lang="en-US" sz="1300" b="0" i="0" u="none" strike="noStrike" kern="1200" cap="none" spc="0" normalizeH="0" baseline="0" noProof="0" dirty="0">
                           <a:ln>
                             <a:noFill/>
                           </a:ln>
@@ -31169,7 +30101,7 @@
                         <a:defRPr/>
                       </a:pPr>
                       <a:r>
-                        <a:rPr kumimoji="0" lang="en-US" sz="1300" b="0" i="0" u="none" strike="noStrike" kern="1200" cap="none" spc="0" normalizeH="0" baseline="0" noProof="0">
+                        <a:rPr kumimoji="0" lang="en-US" sz="1300" b="0" i="0" u="none" strike="noStrike" kern="1200" cap="none" spc="0" normalizeH="0" baseline="0" noProof="0" dirty="0">
                           <a:ln>
                             <a:noFill/>
                           </a:ln>
@@ -31205,7 +30137,7 @@
                         <a:defRPr/>
                       </a:pPr>
                       <a:r>
-                        <a:rPr kumimoji="0" lang="en-US" sz="1300" b="0" i="0" u="none" strike="noStrike" kern="1200" cap="none" spc="0" normalizeH="0" baseline="0" noProof="0">
+                        <a:rPr kumimoji="0" lang="en-US" sz="1300" b="0" i="0" u="none" strike="noStrike" kern="1200" cap="none" spc="0" normalizeH="0" baseline="0" noProof="0" dirty="0">
                           <a:ln>
                             <a:noFill/>
                           </a:ln>
@@ -31240,7 +30172,7 @@
                         <a:tabLst/>
                         <a:defRPr/>
                       </a:pPr>
-                      <a:endParaRPr kumimoji="0" lang="en-US" sz="1300" b="1" i="0" u="none" strike="noStrike" kern="1200" cap="none" spc="0" normalizeH="0" baseline="0" noProof="0">
+                      <a:endParaRPr kumimoji="0" lang="en-US" sz="1300" b="1" i="0" u="none" strike="noStrike" kern="1200" cap="none" spc="0" normalizeH="0" baseline="0" noProof="0" dirty="0">
                         <a:ln>
                           <a:noFill/>
                         </a:ln>
@@ -31354,7 +30286,7 @@
           <a:lstStyle/>
           <a:p>
             <a:r>
-              <a:rPr lang="en-US"/>
+              <a:rPr lang="en-US" dirty="0"/>
               <a:t>Tools available for Workflow Business Processes</a:t>
             </a:r>
           </a:p>
@@ -31381,11 +30313,11 @@
           <a:lstStyle/>
           <a:p>
             <a:r>
-              <a:rPr lang="en-US" err="1"/>
+              <a:rPr lang="en-US" dirty="0" err="1"/>
               <a:t>Contd</a:t>
             </a:r>
             <a:r>
-              <a:rPr lang="en-US"/>
+              <a:rPr lang="en-US" dirty="0"/>
               <a:t>….</a:t>
             </a:r>
           </a:p>
@@ -31454,7 +30386,7 @@
                         <a:defRPr/>
                       </a:pPr>
                       <a:r>
-                        <a:rPr kumimoji="0" lang="en-US" sz="1600" b="1" i="0" u="none" strike="noStrike" kern="1200" cap="none" spc="0" normalizeH="0" baseline="0" noProof="0">
+                        <a:rPr kumimoji="0" lang="en-US" sz="1600" b="1" i="0" u="none" strike="noStrike" kern="1200" cap="none" spc="0" normalizeH="0" baseline="0" noProof="0" dirty="0">
                           <a:ln>
                             <a:noFill/>
                           </a:ln>
@@ -31490,7 +30422,7 @@
                         <a:defRPr/>
                       </a:pPr>
                       <a:r>
-                        <a:rPr kumimoji="0" lang="en-US" sz="1300" b="1" i="0" u="none" strike="noStrike" kern="1200" cap="none" spc="0" normalizeH="0" baseline="0" noProof="0">
+                        <a:rPr kumimoji="0" lang="en-US" sz="1300" b="1" i="0" u="none" strike="noStrike" kern="1200" cap="none" spc="0" normalizeH="0" baseline="0" noProof="0" dirty="0">
                           <a:ln>
                             <a:noFill/>
                           </a:ln>
@@ -31526,7 +30458,7 @@
                         <a:defRPr/>
                       </a:pPr>
                       <a:r>
-                        <a:rPr kumimoji="0" lang="en-US" sz="1300" b="0" i="0" u="none" strike="noStrike" kern="1200" cap="none" spc="0" normalizeH="0" baseline="0" noProof="0">
+                        <a:rPr kumimoji="0" lang="en-US" sz="1300" b="0" i="0" u="none" strike="noStrike" kern="1200" cap="none" spc="0" normalizeH="0" baseline="0" noProof="0" dirty="0">
                           <a:ln>
                             <a:noFill/>
                           </a:ln>
@@ -31562,7 +30494,7 @@
                         <a:defRPr/>
                       </a:pPr>
                       <a:r>
-                        <a:rPr kumimoji="0" lang="en-US" sz="1300" b="0" i="0" u="none" strike="noStrike" kern="1200" cap="none" spc="0" normalizeH="0" baseline="0" noProof="0">
+                        <a:rPr kumimoji="0" lang="en-US" sz="1300" b="0" i="0" u="none" strike="noStrike" kern="1200" cap="none" spc="0" normalizeH="0" baseline="0" noProof="0" dirty="0">
                           <a:ln>
                             <a:noFill/>
                           </a:ln>
@@ -31598,7 +30530,7 @@
                         <a:defRPr/>
                       </a:pPr>
                       <a:r>
-                        <a:rPr kumimoji="0" lang="en-US" sz="1300" b="0" i="0" u="none" strike="noStrike" kern="1200" cap="none" spc="0" normalizeH="0" baseline="0" noProof="0">
+                        <a:rPr kumimoji="0" lang="en-US" sz="1300" b="0" i="0" u="none" strike="noStrike" kern="1200" cap="none" spc="0" normalizeH="0" baseline="0" noProof="0" dirty="0">
                           <a:ln>
                             <a:noFill/>
                           </a:ln>
@@ -31614,7 +30546,7 @@
                         </a:rPr>
                         <a:t>Wait</a:t>
                       </a:r>
-                      <a:endParaRPr kumimoji="0" lang="en-US" sz="1300" b="1" i="0" u="none" strike="noStrike" kern="1200" cap="none" spc="0" normalizeH="0" baseline="0" noProof="0">
+                      <a:endParaRPr kumimoji="0" lang="en-US" sz="1300" b="1" i="0" u="none" strike="noStrike" kern="1200" cap="none" spc="0" normalizeH="0" baseline="0" noProof="0" dirty="0">
                         <a:ln>
                           <a:noFill/>
                         </a:ln>
@@ -31737,7 +30669,7 @@
                         <a:defRPr/>
                       </a:pPr>
                       <a:r>
-                        <a:rPr kumimoji="0" lang="en-US" sz="1600" b="1" i="0" u="none" strike="noStrike" kern="1200" cap="none" spc="0" normalizeH="0" baseline="0" noProof="0">
+                        <a:rPr kumimoji="0" lang="en-US" sz="1600" b="1" i="0" u="none" strike="noStrike" kern="1200" cap="none" spc="0" normalizeH="0" baseline="0" noProof="0" dirty="0">
                           <a:ln>
                             <a:noFill/>
                           </a:ln>
@@ -31773,7 +30705,7 @@
                         <a:defRPr/>
                       </a:pPr>
                       <a:r>
-                        <a:rPr kumimoji="0" lang="en-US" sz="1300" b="0" i="0" u="none" strike="noStrike" kern="1200" cap="none" spc="0" normalizeH="0" baseline="0" noProof="0">
+                        <a:rPr kumimoji="0" lang="en-US" sz="1300" b="0" i="0" u="none" strike="noStrike" kern="1200" cap="none" spc="0" normalizeH="0" baseline="0" noProof="0" dirty="0">
                           <a:ln>
                             <a:noFill/>
                           </a:ln>
@@ -31790,7 +30722,7 @@
                         <a:t>T</a:t>
                       </a:r>
                       <a:r>
-                        <a:rPr kumimoji="0" lang="en-US" sz="1300" b="0" i="0" u="none" strike="noStrike" kern="1200" cap="none" spc="0" normalizeH="0" baseline="0">
+                        <a:rPr kumimoji="0" lang="en-US" sz="1300" b="0" i="0" u="none" strike="noStrike" kern="1200" cap="none" spc="0" normalizeH="0" baseline="0" dirty="0">
                           <a:ln>
                             <a:noFill/>
                           </a:ln>
@@ -31806,7 +30738,7 @@
                         </a:rPr>
                         <a:t>o measure success and improvements.</a:t>
                       </a:r>
-                      <a:endParaRPr kumimoji="0" lang="en-US" sz="1300" b="0" i="0" u="none" strike="noStrike" kern="1200" cap="none" spc="0" normalizeH="0" baseline="0" noProof="0">
+                      <a:endParaRPr kumimoji="0" lang="en-US" sz="1300" b="0" i="0" u="none" strike="noStrike" kern="1200" cap="none" spc="0" normalizeH="0" baseline="0" noProof="0" dirty="0">
                         <a:ln>
                           <a:noFill/>
                         </a:ln>
@@ -31840,7 +30772,7 @@
                         <a:defRPr/>
                       </a:pPr>
                       <a:r>
-                        <a:rPr kumimoji="0" lang="en-US" sz="1300" b="1" i="0" u="none" strike="noStrike" kern="1200" cap="none" spc="0" normalizeH="0" baseline="0" noProof="0">
+                        <a:rPr kumimoji="0" lang="en-US" sz="1300" b="1" i="0" u="none" strike="noStrike" kern="1200" cap="none" spc="0" normalizeH="0" baseline="0" noProof="0" dirty="0">
                           <a:ln>
                             <a:noFill/>
                           </a:ln>
@@ -31856,7 +30788,7 @@
                         </a:rPr>
                         <a:t>Can be used with track down the execution and improve accordingly</a:t>
                       </a:r>
-                      <a:endParaRPr kumimoji="0" lang="en-US" sz="1300" b="1" i="0" u="none" strike="noStrike" kern="1200" cap="none" spc="0" normalizeH="0" baseline="0" noProof="0">
+                      <a:endParaRPr kumimoji="0" lang="en-US" sz="1300" b="1" i="0" u="none" strike="noStrike" kern="1200" cap="none" spc="0" normalizeH="0" baseline="0" noProof="0" dirty="0">
                         <a:ln>
                           <a:noFill/>
                         </a:ln>
@@ -31979,7 +30911,7 @@
                         <a:defRPr/>
                       </a:pPr>
                       <a:r>
-                        <a:rPr kumimoji="0" lang="en-US" sz="1600" b="1" i="0" u="none" strike="noStrike" kern="1200" cap="none" spc="0" normalizeH="0" baseline="0" noProof="0">
+                        <a:rPr kumimoji="0" lang="en-US" sz="1600" b="1" i="0" u="none" strike="noStrike" kern="1200" cap="none" spc="0" normalizeH="0" baseline="0" noProof="0" dirty="0">
                           <a:ln>
                             <a:noFill/>
                           </a:ln>
@@ -32015,7 +30947,7 @@
                         <a:defRPr/>
                       </a:pPr>
                       <a:r>
-                        <a:rPr kumimoji="0" lang="en-US" sz="1300" b="0" i="0" u="none" strike="noStrike" kern="1200" cap="none" spc="0" normalizeH="0" baseline="0" noProof="0">
+                        <a:rPr kumimoji="0" lang="en-US" sz="1300" b="0" i="0" u="none" strike="noStrike" kern="1200" cap="none" spc="0" normalizeH="0" baseline="0" noProof="0" dirty="0">
                           <a:ln>
                             <a:noFill/>
                           </a:ln>
@@ -32031,7 +30963,7 @@
                         </a:rPr>
                         <a:t>APIs can directly be used within the business process workflows.</a:t>
                       </a:r>
-                      <a:endParaRPr kumimoji="0" lang="en-US" sz="1300" b="1" i="0" u="none" strike="noStrike" kern="1200" cap="none" spc="0" normalizeH="0" baseline="0" noProof="0">
+                      <a:endParaRPr kumimoji="0" lang="en-US" sz="1300" b="1" i="0" u="none" strike="noStrike" kern="1200" cap="none" spc="0" normalizeH="0" baseline="0" noProof="0" dirty="0">
                         <a:ln>
                           <a:noFill/>
                         </a:ln>
@@ -32154,7 +31086,7 @@
                         <a:defRPr/>
                       </a:pPr>
                       <a:r>
-                        <a:rPr kumimoji="0" lang="en-US" sz="1600" b="1" i="0" u="none" strike="noStrike" kern="1200" cap="none" spc="0" normalizeH="0" baseline="0" noProof="0">
+                        <a:rPr kumimoji="0" lang="en-US" sz="1600" b="1" i="0" u="none" strike="noStrike" kern="1200" cap="none" spc="0" normalizeH="0" baseline="0" noProof="0" dirty="0">
                           <a:ln>
                             <a:noFill/>
                           </a:ln>
@@ -32190,7 +31122,7 @@
                         <a:defRPr/>
                       </a:pPr>
                       <a:r>
-                        <a:rPr kumimoji="0" lang="en-US" sz="1300" b="0" i="0" u="none" strike="noStrike" kern="1200" cap="none" spc="0" normalizeH="0" baseline="0" noProof="0">
+                        <a:rPr kumimoji="0" lang="en-US" sz="1300" b="0" i="0" u="none" strike="noStrike" kern="1200" cap="none" spc="0" normalizeH="0" baseline="0" noProof="0" dirty="0">
                           <a:ln>
                             <a:noFill/>
                           </a:ln>
@@ -32226,7 +31158,7 @@
                         <a:defRPr/>
                       </a:pPr>
                       <a:r>
-                        <a:rPr kumimoji="0" lang="en-US" sz="1300" b="1" i="0" u="none" strike="noStrike" kern="1200" cap="none" spc="0" normalizeH="0" baseline="0" noProof="0">
+                        <a:rPr kumimoji="0" lang="en-US" sz="1300" b="1" i="0" u="none" strike="noStrike" kern="1200" cap="none" spc="0" normalizeH="0" baseline="0" noProof="0" dirty="0">
                           <a:ln>
                             <a:noFill/>
                           </a:ln>
@@ -32262,7 +31194,7 @@
                         <a:defRPr/>
                       </a:pPr>
                       <a:r>
-                        <a:rPr kumimoji="0" lang="en-US" sz="1300" b="0" i="0" u="none" strike="noStrike" kern="1200" cap="none" spc="0" normalizeH="0" baseline="0" noProof="0">
+                        <a:rPr kumimoji="0" lang="en-US" sz="1300" b="0" i="0" u="none" strike="noStrike" kern="1200" cap="none" spc="0" normalizeH="0" baseline="0" noProof="0" dirty="0">
                           <a:ln>
                             <a:noFill/>
                           </a:ln>
@@ -32298,7 +31230,7 @@
                         <a:defRPr/>
                       </a:pPr>
                       <a:r>
-                        <a:rPr kumimoji="0" lang="en-US" sz="1300" b="0" i="0" u="none" strike="noStrike" kern="1200" cap="none" spc="0" normalizeH="0" baseline="0" noProof="0">
+                        <a:rPr kumimoji="0" lang="en-US" sz="1300" b="0" i="0" u="none" strike="noStrike" kern="1200" cap="none" spc="0" normalizeH="0" baseline="0" noProof="0" dirty="0">
                           <a:ln>
                             <a:noFill/>
                           </a:ln>
@@ -32314,7 +31246,7 @@
                         </a:rPr>
                         <a:t>CC, BCC users can directly be added.</a:t>
                       </a:r>
-                      <a:endParaRPr kumimoji="0" lang="en-US" sz="1300" b="1" i="0" u="none" strike="noStrike" kern="1200" cap="none" spc="0" normalizeH="0" baseline="0" noProof="0">
+                      <a:endParaRPr kumimoji="0" lang="en-US" sz="1300" b="1" i="0" u="none" strike="noStrike" kern="1200" cap="none" spc="0" normalizeH="0" baseline="0" noProof="0" dirty="0">
                         <a:ln>
                           <a:noFill/>
                         </a:ln>
@@ -32430,7 +31362,7 @@
           <a:lstStyle/>
           <a:p>
             <a:r>
-              <a:rPr lang="en-US"/>
+              <a:rPr lang="en-US" dirty="0"/>
               <a:t>It helps to automate repetitive or tasks that involve higher volume of manual efforts</a:t>
             </a:r>
           </a:p>
@@ -32457,7 +31389,7 @@
           <a:lstStyle/>
           <a:p>
             <a:r>
-              <a:rPr lang="en-US" sz="3200" b="1">
+              <a:rPr lang="en-US" sz="3200" b="1" dirty="0">
                 <a:latin typeface="Calibri" panose="020F0502020204030204" pitchFamily="34" charset="0"/>
                 <a:cs typeface="Calibri" panose="020F0502020204030204" pitchFamily="34" charset="0"/>
               </a:rPr>
@@ -32488,35 +31420,35 @@
           <a:p>
             <a:pPr lvl="2"/>
             <a:r>
-              <a:rPr lang="en-GB"/>
+              <a:rPr lang="en-GB" dirty="0"/>
               <a:t>Select your agent version when creating new Automation</a:t>
             </a:r>
           </a:p>
           <a:p>
             <a:pPr lvl="2"/>
             <a:r>
-              <a:rPr lang="en-GB"/>
+              <a:rPr lang="en-GB" dirty="0"/>
               <a:t>Give name and description for the Automation project</a:t>
             </a:r>
           </a:p>
           <a:p>
             <a:pPr lvl="2"/>
             <a:r>
-              <a:rPr lang="en-GB"/>
+              <a:rPr lang="en-GB" dirty="0"/>
               <a:t>Selection Trigger as API</a:t>
             </a:r>
           </a:p>
           <a:p>
             <a:pPr lvl="2"/>
             <a:r>
-              <a:rPr lang="en-GB"/>
+              <a:rPr lang="en-GB" dirty="0"/>
               <a:t>Configure your inputs to build the API inputs</a:t>
             </a:r>
           </a:p>
           <a:p>
             <a:pPr lvl="2"/>
             <a:r>
-              <a:rPr lang="en-GB"/>
+              <a:rPr lang="en-GB" dirty="0"/>
               <a:t>Go ahead to use drag and drop features for the Automation design.</a:t>
             </a:r>
           </a:p>
@@ -32998,7 +31930,7 @@
                   <a:spcPct val="20000"/>
                 </a:spcBef>
               </a:pPr>
-              <a:endParaRPr lang="en-GB" sz="1600">
+              <a:endParaRPr lang="en-GB" sz="1600" dirty="0">
                 <a:cs typeface="Arial" pitchFamily="34" charset="0"/>
               </a:endParaRPr>
             </a:p>
@@ -33463,7 +32395,7 @@
                   <a:spcPct val="20000"/>
                 </a:spcBef>
               </a:pPr>
-              <a:endParaRPr lang="en-GB" sz="1600">
+              <a:endParaRPr lang="en-GB" sz="1600" dirty="0">
                 <a:cs typeface="Arial" pitchFamily="34" charset="0"/>
               </a:endParaRPr>
             </a:p>
@@ -33919,7 +32851,7 @@
                   <a:spcPct val="20000"/>
                 </a:spcBef>
               </a:pPr>
-              <a:endParaRPr lang="en-GB" sz="1600">
+              <a:endParaRPr lang="en-GB" sz="1600" dirty="0">
                 <a:cs typeface="Arial" pitchFamily="34" charset="0"/>
               </a:endParaRPr>
             </a:p>
@@ -34375,7 +33307,7 @@
                   <a:spcPct val="20000"/>
                 </a:spcBef>
               </a:pPr>
-              <a:endParaRPr lang="en-GB" sz="1600">
+              <a:endParaRPr lang="en-GB" sz="1600" dirty="0">
                 <a:cs typeface="Arial" pitchFamily="34" charset="0"/>
               </a:endParaRPr>
             </a:p>
@@ -34418,7 +33350,7 @@
                   <a:spcPct val="20000"/>
                 </a:spcBef>
               </a:pPr>
-              <a:endParaRPr lang="en-GB" sz="1600">
+              <a:endParaRPr lang="en-GB" sz="1600" dirty="0">
                 <a:cs typeface="Arial" pitchFamily="34" charset="0"/>
               </a:endParaRPr>
             </a:p>
@@ -34466,7 +33398,7 @@
                 </a:buClr>
               </a:pPr>
               <a:r>
-                <a:rPr lang="en-GB" sz="1400">
+                <a:rPr lang="en-GB" sz="1400" dirty="0">
                   <a:cs typeface="Arial" pitchFamily="34" charset="0"/>
                 </a:rPr>
                 <a:t>Manual Task</a:t>
@@ -34516,7 +33448,7 @@
                 </a:buClr>
               </a:pPr>
               <a:r>
-                <a:rPr lang="en-GB" sz="1400">
+                <a:rPr lang="en-GB" sz="1400" dirty="0">
                   <a:cs typeface="Arial" pitchFamily="34" charset="0"/>
                 </a:rPr>
                 <a:t>Drag &amp; Drop</a:t>
@@ -34566,7 +33498,7 @@
                 </a:buClr>
               </a:pPr>
               <a:r>
-                <a:rPr lang="en-GB" sz="1400">
+                <a:rPr lang="en-GB" sz="1400" dirty="0">
                   <a:cs typeface="Arial" pitchFamily="34" charset="0"/>
                 </a:rPr>
                 <a:t>Error Free Run</a:t>
@@ -34616,7 +33548,7 @@
                 </a:buClr>
               </a:pPr>
               <a:r>
-                <a:rPr lang="en-GB" sz="1400">
+                <a:rPr lang="en-GB" sz="1400" dirty="0">
                   <a:cs typeface="Arial" pitchFamily="34" charset="0"/>
                 </a:rPr>
                 <a:t>Repetitive</a:t>
@@ -34819,7 +33751,7 @@
             </a:lvl9pPr>
           </a:lstStyle>
           <a:p>
-            <a:endParaRPr lang="en-GB" sz="1300"/>
+            <a:endParaRPr lang="en-GB" sz="1300" dirty="0"/>
           </a:p>
         </p:txBody>
       </p:sp>
@@ -34971,35 +33903,35 @@
           <a:p>
             <a:pPr lvl="2"/>
             <a:r>
-              <a:rPr lang="en-GB"/>
+              <a:rPr lang="en-GB" dirty="0"/>
               <a:t>Out of SDKs there are couple of tools available for automation like JS to XML and XML to JSON converters and others as well</a:t>
             </a:r>
           </a:p>
           <a:p>
             <a:pPr lvl="2"/>
             <a:r>
-              <a:rPr lang="en-GB"/>
+              <a:rPr lang="en-GB" dirty="0"/>
               <a:t>HTTP requests can be handled</a:t>
             </a:r>
           </a:p>
           <a:p>
             <a:pPr lvl="2"/>
             <a:r>
-              <a:rPr lang="en-GB"/>
+              <a:rPr lang="en-GB" dirty="0"/>
               <a:t>File transfer can be handled</a:t>
             </a:r>
           </a:p>
           <a:p>
             <a:pPr lvl="2"/>
             <a:r>
-              <a:rPr lang="en-GB"/>
+              <a:rPr lang="en-GB" dirty="0"/>
               <a:t>S4 connectivity can be achieved to trigger processes in SAP</a:t>
             </a:r>
           </a:p>
           <a:p>
             <a:pPr lvl="2"/>
             <a:r>
-              <a:rPr lang="en-GB"/>
+              <a:rPr lang="en-GB" dirty="0"/>
               <a:t>Timeline can be monitored during execution for debug purpose</a:t>
             </a:r>
           </a:p>
@@ -35028,7 +33960,7 @@
           <a:lstStyle/>
           <a:p>
             <a:r>
-              <a:rPr lang="en-US" sz="1800"/>
+              <a:rPr lang="en-US" sz="1800" dirty="0"/>
               <a:t>Tools available to design automation</a:t>
             </a:r>
           </a:p>
@@ -35057,7 +33989,7 @@
           <a:lstStyle/>
           <a:p>
             <a:r>
-              <a:rPr lang="en-US" sz="3200" b="1">
+              <a:rPr lang="en-US" sz="3200" b="1" dirty="0">
                 <a:latin typeface="Calibri" panose="020F0502020204030204" pitchFamily="34" charset="0"/>
                 <a:cs typeface="Calibri" panose="020F0502020204030204" pitchFamily="34" charset="0"/>
               </a:rPr>
@@ -35260,7 +34192,7 @@
             </a:lvl9pPr>
           </a:lstStyle>
           <a:p>
-            <a:endParaRPr lang="en-GB" sz="1300"/>
+            <a:endParaRPr lang="en-GB" sz="1300" dirty="0"/>
           </a:p>
         </p:txBody>
       </p:sp>
@@ -35403,7 +34335,7 @@
           <a:lstStyle/>
           <a:p>
             <a:r>
-              <a:rPr lang="en-GB" sz="3200" b="1">
+              <a:rPr lang="en-GB" sz="3200" b="1" dirty="0">
                 <a:latin typeface="Calibri" panose="020F0502020204030204" pitchFamily="34" charset="0"/>
                 <a:cs typeface="Calibri" panose="020F0502020204030204" pitchFamily="34" charset="0"/>
               </a:rPr>
@@ -35461,7 +34393,7 @@
                 <a:buNone/>
               </a:pPr>
               <a:r>
-                <a:rPr lang="en-GB" sz="4400">
+                <a:rPr lang="en-GB" sz="4400" dirty="0">
                   <a:solidFill>
                     <a:schemeClr val="bg1"/>
                   </a:solidFill>
@@ -35475,7 +34407,7 @@
                 <a:buNone/>
               </a:pPr>
               <a:r>
-                <a:rPr lang="en-GB" sz="1400">
+                <a:rPr lang="en-GB" sz="1400" dirty="0">
                   <a:solidFill>
                     <a:schemeClr val="bg1"/>
                   </a:solidFill>
@@ -37510,7 +36442,7 @@
                 <a:buNone/>
               </a:pPr>
               <a:r>
-                <a:rPr lang="en-GB" sz="4400">
+                <a:rPr lang="en-GB" sz="4400" dirty="0">
                   <a:solidFill>
                     <a:schemeClr val="bg1"/>
                   </a:solidFill>
@@ -37524,7 +36456,7 @@
                 <a:buNone/>
               </a:pPr>
               <a:r>
-                <a:rPr lang="en-GB" sz="1400">
+                <a:rPr lang="en-GB" sz="1400" dirty="0">
                   <a:solidFill>
                     <a:schemeClr val="bg1"/>
                   </a:solidFill>
@@ -37569,7 +36501,7 @@
                 <a:buNone/>
               </a:pPr>
               <a:r>
-                <a:rPr lang="en-GB" sz="4400">
+                <a:rPr lang="en-GB" sz="4400" dirty="0">
                   <a:solidFill>
                     <a:schemeClr val="bg1"/>
                   </a:solidFill>
@@ -37583,7 +36515,7 @@
                 <a:buNone/>
               </a:pPr>
               <a:r>
-                <a:rPr lang="en-GB" sz="1400">
+                <a:rPr lang="en-GB" sz="1400" dirty="0">
                   <a:solidFill>
                     <a:schemeClr val="bg1"/>
                   </a:solidFill>
@@ -37628,7 +36560,7 @@
                 <a:buNone/>
               </a:pPr>
               <a:r>
-                <a:rPr lang="en-GB" sz="4400">
+                <a:rPr lang="en-GB" sz="4400" dirty="0">
                   <a:solidFill>
                     <a:schemeClr val="bg1"/>
                   </a:solidFill>
@@ -37642,7 +36574,7 @@
                 <a:buNone/>
               </a:pPr>
               <a:r>
-                <a:rPr lang="en-GB" sz="1400">
+                <a:rPr lang="en-GB" sz="1400" dirty="0">
                   <a:solidFill>
                     <a:schemeClr val="bg1"/>
                   </a:solidFill>
@@ -37687,7 +36619,7 @@
                 <a:buNone/>
               </a:pPr>
               <a:r>
-                <a:rPr lang="en-GB" sz="4400">
+                <a:rPr lang="en-GB" sz="4400" dirty="0">
                   <a:solidFill>
                     <a:schemeClr val="bg1"/>
                   </a:solidFill>
@@ -37701,7 +36633,7 @@
                 <a:buNone/>
               </a:pPr>
               <a:r>
-                <a:rPr lang="en-GB" sz="1400">
+                <a:rPr lang="en-GB" sz="1400" dirty="0">
                   <a:solidFill>
                     <a:schemeClr val="bg1"/>
                   </a:solidFill>
@@ -37746,7 +36678,7 @@
                 <a:buNone/>
               </a:pPr>
               <a:r>
-                <a:rPr lang="en-GB" sz="4400">
+                <a:rPr lang="en-GB" sz="4400" dirty="0">
                   <a:solidFill>
                     <a:schemeClr val="bg1"/>
                   </a:solidFill>
@@ -37760,7 +36692,7 @@
                 <a:buNone/>
               </a:pPr>
               <a:r>
-                <a:rPr lang="en-GB" sz="1400">
+                <a:rPr lang="en-GB" sz="1400" dirty="0">
                   <a:solidFill>
                     <a:schemeClr val="bg1"/>
                   </a:solidFill>
@@ -38771,57 +37703,8 @@
 </file>
 
 <file path=customXml/item1.xml><?xml version="1.0" encoding="utf-8"?>
-<p:properties xmlns:p="http://schemas.microsoft.com/office/2006/metadata/properties" xmlns:xsi="http://www.w3.org/2001/XMLSchema-instance" xmlns:pc="http://schemas.microsoft.com/office/infopath/2007/PartnerControls">
-  <documentManagement>
-    <SharedWithUsers xmlns="f384d200-71ad-4bc9-9d00-4e792d9d34a8">
-      <UserInfo>
-        <DisplayName>Pandey, Divya</DisplayName>
-        <AccountId>73</AccountId>
-        <AccountType/>
-      </UserInfo>
-      <UserInfo>
-        <DisplayName>Verma, Sandeep</DisplayName>
-        <AccountId>74</AccountId>
-        <AccountType/>
-      </UserInfo>
-      <UserInfo>
-        <DisplayName>Parade, Pankaj Suresh</DisplayName>
-        <AccountId>2547</AccountId>
-        <AccountType/>
-      </UserInfo>
-      <UserInfo>
-        <DisplayName>Surwade, Gaurav</DisplayName>
-        <AccountId>968</AccountId>
-        <AccountType/>
-      </UserInfo>
-      <UserInfo>
-        <DisplayName>Dubey, Abhineet</DisplayName>
-        <AccountId>1188</AccountId>
-        <AccountType/>
-      </UserInfo>
-      <UserInfo>
-        <DisplayName>Sharma, Ayushi</DisplayName>
-        <AccountId>2552</AccountId>
-        <AccountType/>
-      </UserInfo>
-    </SharedWithUsers>
-    <MediaLengthInSeconds xmlns="ed1847f7-4432-48e0-964f-25724acf5ead" xsi:nil="true"/>
-  </documentManagement>
-</p:properties>
-</file>
-
-<file path=customXml/item2.xml><?xml version="1.0" encoding="utf-8"?>
-<?mso-contentType ?>
-<FormTemplates xmlns="http://schemas.microsoft.com/sharepoint/v3/contenttype/forms">
-  <Display>DocumentLibraryForm</Display>
-  <Edit>DocumentLibraryForm</Edit>
-  <New>DocumentLibraryForm</New>
-</FormTemplates>
-</file>
-
-<file path=customXml/item3.xml><?xml version="1.0" encoding="utf-8"?>
-<ct:contentTypeSchema xmlns:ct="http://schemas.microsoft.com/office/2006/metadata/contentType" xmlns:ma="http://schemas.microsoft.com/office/2006/metadata/properties/metaAttributes" ct:_="" ma:_="" ma:contentTypeName="Document" ma:contentTypeID="0x010100DBD685BAC3E09C4AA021D8E42E0DC2FC" ma:contentTypeVersion="14" ma:contentTypeDescription="Create a new document." ma:contentTypeScope="" ma:versionID="b9b83c56ce1ae3eaf881c9d673fc721e">
-  <xsd:schema xmlns:xsd="http://www.w3.org/2001/XMLSchema" xmlns:xs="http://www.w3.org/2001/XMLSchema" xmlns:p="http://schemas.microsoft.com/office/2006/metadata/properties" xmlns:ns2="ed1847f7-4432-48e0-964f-25724acf5ead" xmlns:ns3="f384d200-71ad-4bc9-9d00-4e792d9d34a8" targetNamespace="http://schemas.microsoft.com/office/2006/metadata/properties" ma:root="true" ma:fieldsID="ab4e358f85e29d65b0c06168b676b381" ns2:_="" ns3:_="">
+<ct:contentTypeSchema xmlns:ct="http://schemas.microsoft.com/office/2006/metadata/contentType" xmlns:ma="http://schemas.microsoft.com/office/2006/metadata/properties/metaAttributes" ct:_="" ma:_="" ma:contentTypeName="Document" ma:contentTypeID="0x010100DBD685BAC3E09C4AA021D8E42E0DC2FC" ma:contentTypeVersion="13" ma:contentTypeDescription="Create a new document." ma:contentTypeScope="" ma:versionID="4ab2831d4a1ee4b021870ebb079b5b1f">
+  <xsd:schema xmlns:xsd="http://www.w3.org/2001/XMLSchema" xmlns:xs="http://www.w3.org/2001/XMLSchema" xmlns:p="http://schemas.microsoft.com/office/2006/metadata/properties" xmlns:ns2="ed1847f7-4432-48e0-964f-25724acf5ead" xmlns:ns3="f384d200-71ad-4bc9-9d00-4e792d9d34a8" targetNamespace="http://schemas.microsoft.com/office/2006/metadata/properties" ma:root="true" ma:fieldsID="3fde5e4dc1464fb184eb686ecbad8b18" ns2:_="" ns3:_="">
     <xsd:import namespace="ed1847f7-4432-48e0-964f-25724acf5ead"/>
     <xsd:import namespace="f384d200-71ad-4bc9-9d00-4e792d9d34a8"/>
     <xsd:element name="properties">
@@ -38843,7 +37726,6 @@
                 <xsd:element ref="ns2:MediaServiceDateTaken" minOccurs="0"/>
                 <xsd:element ref="ns2:MediaLengthInSeconds" minOccurs="0"/>
                 <xsd:element ref="ns2:MediaServiceObjectDetectorVersions" minOccurs="0"/>
-                <xsd:element ref="ns2:MediaServiceSearchProperties" minOccurs="0"/>
               </xsd:all>
             </xsd:complexType>
           </xsd:element>
@@ -38911,11 +37793,6 @@
     <xsd:element name="MediaServiceObjectDetectorVersions" ma:index="20" nillable="true" ma:displayName="MediaServiceObjectDetectorVersions" ma:hidden="true" ma:indexed="true" ma:internalName="MediaServiceObjectDetectorVersions" ma:readOnly="true">
       <xsd:simpleType>
         <xsd:restriction base="dms:Text"/>
-      </xsd:simpleType>
-    </xsd:element>
-    <xsd:element name="MediaServiceSearchProperties" ma:index="21" nillable="true" ma:displayName="MediaServiceSearchProperties" ma:hidden="true" ma:internalName="MediaServiceSearchProperties" ma:readOnly="true">
-      <xsd:simpleType>
-        <xsd:restriction base="dms:Note"/>
       </xsd:simpleType>
     </xsd:element>
   </xsd:schema>
@@ -39048,48 +37925,77 @@
 </ct:contentTypeSchema>
 </file>
 
+<file path=customXml/item2.xml><?xml version="1.0" encoding="utf-8"?>
+<p:properties xmlns:p="http://schemas.microsoft.com/office/2006/metadata/properties" xmlns:xsi="http://www.w3.org/2001/XMLSchema-instance" xmlns:pc="http://schemas.microsoft.com/office/infopath/2007/PartnerControls">
+  <documentManagement>
+    <SharedWithUsers xmlns="f384d200-71ad-4bc9-9d00-4e792d9d34a8">
+      <UserInfo>
+        <DisplayName>Pandey, Divya</DisplayName>
+        <AccountId>73</AccountId>
+        <AccountType/>
+      </UserInfo>
+      <UserInfo>
+        <DisplayName>Verma, Sandeep</DisplayName>
+        <AccountId>74</AccountId>
+        <AccountType/>
+      </UserInfo>
+    </SharedWithUsers>
+    <MediaLengthInSeconds xmlns="ed1847f7-4432-48e0-964f-25724acf5ead" xsi:nil="true"/>
+  </documentManagement>
+</p:properties>
+</file>
+
+<file path=customXml/item3.xml><?xml version="1.0" encoding="utf-8"?>
+<?mso-contentType ?>
+<FormTemplates xmlns="http://schemas.microsoft.com/sharepoint/v3/contenttype/forms">
+  <Display>DocumentLibraryForm</Display>
+  <Edit>DocumentLibraryForm</Edit>
+  <New>DocumentLibraryForm</New>
+</FormTemplates>
+</file>
+
 <file path=customXml/itemProps1.xml><?xml version="1.0" encoding="utf-8"?>
-<ds:datastoreItem xmlns:ds="http://schemas.openxmlformats.org/officeDocument/2006/customXml" ds:itemID="{1870824B-0447-4F67-A3CE-65C88E7C5133}">
+<ds:datastoreItem xmlns:ds="http://schemas.openxmlformats.org/officeDocument/2006/customXml" ds:itemID="{A4F00BB1-80E5-4E9E-9475-EE37196E6187}">
   <ds:schemaRefs>
-    <ds:schemaRef ds:uri="3deb29b2-9f08-4609-a7dd-f913f64aeebc"/>
-    <ds:schemaRef ds:uri="e3f18b36-2a69-4a57-b787-c406cfa6560a"/>
+    <ds:schemaRef ds:uri="http://schemas.microsoft.com/office/2006/metadata/contentType"/>
+    <ds:schemaRef ds:uri="http://schemas.microsoft.com/office/2006/metadata/properties/metaAttributes"/>
+    <ds:schemaRef ds:uri="http://www.w3.org/2001/XMLSchema"/>
+    <ds:schemaRef ds:uri="http://schemas.microsoft.com/office/2006/metadata/properties"/>
     <ds:schemaRef ds:uri="ed1847f7-4432-48e0-964f-25724acf5ead"/>
     <ds:schemaRef ds:uri="f384d200-71ad-4bc9-9d00-4e792d9d34a8"/>
-    <ds:schemaRef ds:uri="http://purl.org/dc/dcmitype/"/>
+    <ds:schemaRef ds:uri="http://schemas.microsoft.com/office/2006/documentManagement/types"/>
+    <ds:schemaRef ds:uri="http://schemas.microsoft.com/office/infopath/2007/PartnerControls"/>
+    <ds:schemaRef ds:uri="http://schemas.openxmlformats.org/package/2006/metadata/core-properties"/>
     <ds:schemaRef ds:uri="http://purl.org/dc/elements/1.1/"/>
     <ds:schemaRef ds:uri="http://purl.org/dc/terms/"/>
-    <ds:schemaRef ds:uri="http://schemas.microsoft.com/office/2006/documentManagement/types"/>
-    <ds:schemaRef ds:uri="http://schemas.microsoft.com/office/2006/metadata/properties"/>
-    <ds:schemaRef ds:uri="http://schemas.microsoft.com/office/infopath/2007/PartnerControls"/>
-    <ds:schemaRef ds:uri="http://schemas.openxmlformats.org/package/2006/metadata/core-properties"/>
-    <ds:schemaRef ds:uri="http://www.w3.org/XML/1998/namespace"/>
+    <ds:schemaRef ds:uri="http://schemas.microsoft.com/internal/obd"/>
   </ds:schemaRefs>
 </ds:datastoreItem>
 </file>
 
 <file path=customXml/itemProps2.xml><?xml version="1.0" encoding="utf-8"?>
+<ds:datastoreItem xmlns:ds="http://schemas.openxmlformats.org/officeDocument/2006/customXml" ds:itemID="{1870824B-0447-4F67-A3CE-65C88E7C5133}">
+  <ds:schemaRefs>
+    <ds:schemaRef ds:uri="e3f18b36-2a69-4a57-b787-c406cfa6560a"/>
+    <ds:schemaRef ds:uri="http://schemas.microsoft.com/office/infopath/2007/PartnerControls"/>
+    <ds:schemaRef ds:uri="http://purl.org/dc/terms/"/>
+    <ds:schemaRef ds:uri="http://www.w3.org/XML/1998/namespace"/>
+    <ds:schemaRef ds:uri="http://schemas.microsoft.com/office/2006/documentManagement/types"/>
+    <ds:schemaRef ds:uri="3deb29b2-9f08-4609-a7dd-f913f64aeebc"/>
+    <ds:schemaRef ds:uri="http://schemas.openxmlformats.org/package/2006/metadata/core-properties"/>
+    <ds:schemaRef ds:uri="http://schemas.microsoft.com/office/2006/metadata/properties"/>
+    <ds:schemaRef ds:uri="http://purl.org/dc/dcmitype/"/>
+    <ds:schemaRef ds:uri="http://purl.org/dc/elements/1.1/"/>
+    <ds:schemaRef ds:uri="f384d200-71ad-4bc9-9d00-4e792d9d34a8"/>
+    <ds:schemaRef ds:uri="ed1847f7-4432-48e0-964f-25724acf5ead"/>
+  </ds:schemaRefs>
+</ds:datastoreItem>
+</file>
+
+<file path=customXml/itemProps3.xml><?xml version="1.0" encoding="utf-8"?>
 <ds:datastoreItem xmlns:ds="http://schemas.openxmlformats.org/officeDocument/2006/customXml" ds:itemID="{9EE16009-4C9A-4D77-8D1E-1AFCC642A190}">
   <ds:schemaRefs>
     <ds:schemaRef ds:uri="http://schemas.microsoft.com/sharepoint/v3/contenttype/forms"/>
   </ds:schemaRefs>
 </ds:datastoreItem>
-</file>
-
-<file path=customXml/itemProps3.xml><?xml version="1.0" encoding="utf-8"?>
-<ds:datastoreItem xmlns:ds="http://schemas.openxmlformats.org/officeDocument/2006/customXml" ds:itemID="{98161082-1D55-4D58-B9EB-4BEF8508C06E}">
-  <ds:schemaRefs>
-    <ds:schemaRef ds:uri="ed1847f7-4432-48e0-964f-25724acf5ead"/>
-    <ds:schemaRef ds:uri="f384d200-71ad-4bc9-9d00-4e792d9d34a8"/>
-    <ds:schemaRef ds:uri="http://purl.org/dc/elements/1.1/"/>
-    <ds:schemaRef ds:uri="http://purl.org/dc/terms/"/>
-    <ds:schemaRef ds:uri="http://schemas.microsoft.com/internal/obd"/>
-    <ds:schemaRef ds:uri="http://schemas.microsoft.com/office/2006/documentManagement/types"/>
-    <ds:schemaRef ds:uri="http://schemas.microsoft.com/office/2006/metadata/contentType"/>
-    <ds:schemaRef ds:uri="http://schemas.microsoft.com/office/2006/metadata/properties"/>
-    <ds:schemaRef ds:uri="http://schemas.microsoft.com/office/2006/metadata/properties/metaAttributes"/>
-    <ds:schemaRef ds:uri="http://schemas.microsoft.com/office/infopath/2007/PartnerControls"/>
-    <ds:schemaRef ds:uri="http://schemas.openxmlformats.org/package/2006/metadata/core-properties"/>
-    <ds:schemaRef ds:uri="http://www.w3.org/2001/XMLSchema"/>
-  </ds:schemaRefs>
-</ds:datastoreItem>
 </file>